--- a/plugins/aqmen/shared/market-sizing-deck-template.pptx
+++ b/plugins/aqmen/shared/market-sizing-deck-template.pptx
@@ -17,6 +17,8 @@
     <p:sldId id="265" r:id="rId16"/>
     <p:sldId id="266" r:id="rId17"/>
     <p:sldId id="267" r:id="rId18"/>
+    <p:sldId id="268" r:id="rId19"/>
+    <p:sldId id="269" r:id="rId20"/>
   </p:sldIdLst>
   <p:sldSz cx="12191695" cy="6858000" type="screen4x3"/>
   <p:notesSz cx="6858000" cy="9144000"/>
@@ -126,7 +128,7 @@
     <c:plotArea>
       <c:barChart>
         <c:barDir val="col"/>
-        <c:grouping val="clustered"/>
+        <c:grouping val="stacked"/>
         <c:ser>
           <c:idx val="0"/>
           <c:order val="0"/>
@@ -136,7 +138,7 @@
               <c:strCache>
                 <c:ptCount val="1"/>
                 <c:pt idx="0">
-                  <c:v>Market size</c:v>
+                  <c:v>[Region A]</c:v>
                 </c:pt>
               </c:strCache>
             </c:strRef>
@@ -162,7 +164,7 @@
                 </a:pPr>
               </a:p>
             </c:txPr>
-            <c:dLblPos val="outEnd"/>
+            <c:dLblPos val="ctr"/>
             <c:showLegendKey val="0"/>
             <c:showVal val="0"/>
             <c:showCatName val="0"/>
@@ -204,27 +206,224 @@
                 <c:formatCode>#,##0.0</c:formatCode>
                 <c:ptCount val="6"/>
                 <c:pt idx="0">
-                  <c:v>11.2</c:v>
+                  <c:v>7.2</c:v>
                 </c:pt>
                 <c:pt idx="1">
-                  <c:v>9.4</c:v>
+                  <c:v>6.0</c:v>
                 </c:pt>
                 <c:pt idx="2">
-                  <c:v>9.1</c:v>
+                  <c:v>5.9</c:v>
                 </c:pt>
                 <c:pt idx="3">
-                  <c:v>10.4</c:v>
+                  <c:v>6.7</c:v>
                 </c:pt>
                 <c:pt idx="4">
-                  <c:v>11.0</c:v>
+                  <c:v>7.1</c:v>
                 </c:pt>
                 <c:pt idx="5">
-                  <c:v>14.6</c:v>
+                  <c:v>9.4</c:v>
                 </c:pt>
               </c:numCache>
             </c:numRef>
           </c:val>
         </c:ser>
+        <c:ser>
+          <c:idx val="1"/>
+          <c:order val="1"/>
+          <c:tx>
+            <c:strRef>
+              <c:f>Sheet1!$C$1</c:f>
+              <c:strCache>
+                <c:ptCount val="1"/>
+                <c:pt idx="0">
+                  <c:v>[Region B]</c:v>
+                </c:pt>
+              </c:strCache>
+            </c:strRef>
+          </c:tx>
+          <c:spPr>
+            <a:solidFill>
+              <a:srgbClr val="0728A3"/>
+            </a:solidFill>
+            <a:ln>
+              <a:noFill/>
+            </a:ln>
+          </c:spPr>
+          <c:dLbls>
+            <c:numFmt formatCode="#,##0.0" sourceLinked="0"/>
+            <c:txPr>
+              <a:bodyPr/>
+              <a:lstStyle/>
+              <a:p>
+                <a:pPr>
+                  <a:defRPr sz="900">
+                    <a:latin typeface="Montserrat Medium"/>
+                  </a:defRPr>
+                </a:pPr>
+              </a:p>
+            </c:txPr>
+            <c:dLblPos val="ctr"/>
+            <c:showLegendKey val="0"/>
+            <c:showVal val="0"/>
+            <c:showCatName val="0"/>
+            <c:showSerName val="0"/>
+            <c:showPercent val="0"/>
+            <c:showBubbleSize val="0"/>
+            <c:showLeaderLines val="1"/>
+          </c:dLbls>
+          <c:cat>
+            <c:strRef>
+              <c:f>Sheet1!$A$2:$A$7</c:f>
+              <c:strCache>
+                <c:ptCount val="6"/>
+                <c:pt idx="0">
+                  <c:v>'21</c:v>
+                </c:pt>
+                <c:pt idx="1">
+                  <c:v>'22</c:v>
+                </c:pt>
+                <c:pt idx="2">
+                  <c:v>'23</c:v>
+                </c:pt>
+                <c:pt idx="3">
+                  <c:v>'24</c:v>
+                </c:pt>
+                <c:pt idx="4">
+                  <c:v>'25E</c:v>
+                </c:pt>
+                <c:pt idx="5">
+                  <c:v>'29E</c:v>
+                </c:pt>
+              </c:strCache>
+            </c:strRef>
+          </c:cat>
+          <c:val>
+            <c:numRef>
+              <c:f>Sheet1!$C$2:$C$7</c:f>
+              <c:numCache>
+                <c:formatCode>#,##0.0</c:formatCode>
+                <c:ptCount val="6"/>
+                <c:pt idx="0">
+                  <c:v>2.6</c:v>
+                </c:pt>
+                <c:pt idx="1">
+                  <c:v>2.2</c:v>
+                </c:pt>
+                <c:pt idx="2">
+                  <c:v>2.1</c:v>
+                </c:pt>
+                <c:pt idx="3">
+                  <c:v>2.4</c:v>
+                </c:pt>
+                <c:pt idx="4">
+                  <c:v>2.5</c:v>
+                </c:pt>
+                <c:pt idx="5">
+                  <c:v>3.3</c:v>
+                </c:pt>
+              </c:numCache>
+            </c:numRef>
+          </c:val>
+        </c:ser>
+        <c:ser>
+          <c:idx val="2"/>
+          <c:order val="2"/>
+          <c:tx>
+            <c:strRef>
+              <c:f>Sheet1!$D$1</c:f>
+              <c:strCache>
+                <c:ptCount val="1"/>
+                <c:pt idx="0">
+                  <c:v>[Region C]</c:v>
+                </c:pt>
+              </c:strCache>
+            </c:strRef>
+          </c:tx>
+          <c:spPr>
+            <a:solidFill>
+              <a:srgbClr val="2E6FD6"/>
+            </a:solidFill>
+            <a:ln>
+              <a:noFill/>
+            </a:ln>
+          </c:spPr>
+          <c:dLbls>
+            <c:numFmt formatCode="#,##0.0" sourceLinked="0"/>
+            <c:txPr>
+              <a:bodyPr/>
+              <a:lstStyle/>
+              <a:p>
+                <a:pPr>
+                  <a:defRPr sz="900">
+                    <a:latin typeface="Montserrat Medium"/>
+                  </a:defRPr>
+                </a:pPr>
+              </a:p>
+            </c:txPr>
+            <c:dLblPos val="ctr"/>
+            <c:showLegendKey val="0"/>
+            <c:showVal val="0"/>
+            <c:showCatName val="0"/>
+            <c:showSerName val="0"/>
+            <c:showPercent val="0"/>
+            <c:showBubbleSize val="0"/>
+            <c:showLeaderLines val="1"/>
+          </c:dLbls>
+          <c:cat>
+            <c:strRef>
+              <c:f>Sheet1!$A$2:$A$7</c:f>
+              <c:strCache>
+                <c:ptCount val="6"/>
+                <c:pt idx="0">
+                  <c:v>'21</c:v>
+                </c:pt>
+                <c:pt idx="1">
+                  <c:v>'22</c:v>
+                </c:pt>
+                <c:pt idx="2">
+                  <c:v>'23</c:v>
+                </c:pt>
+                <c:pt idx="3">
+                  <c:v>'24</c:v>
+                </c:pt>
+                <c:pt idx="4">
+                  <c:v>'25E</c:v>
+                </c:pt>
+                <c:pt idx="5">
+                  <c:v>'29E</c:v>
+                </c:pt>
+              </c:strCache>
+            </c:strRef>
+          </c:cat>
+          <c:val>
+            <c:numRef>
+              <c:f>Sheet1!$D$2:$D$7</c:f>
+              <c:numCache>
+                <c:formatCode>#,##0.0</c:formatCode>
+                <c:ptCount val="6"/>
+                <c:pt idx="0">
+                  <c:v>1.4</c:v>
+                </c:pt>
+                <c:pt idx="1">
+                  <c:v>1.2</c:v>
+                </c:pt>
+                <c:pt idx="2">
+                  <c:v>1.1</c:v>
+                </c:pt>
+                <c:pt idx="3">
+                  <c:v>1.3</c:v>
+                </c:pt>
+                <c:pt idx="4">
+                  <c:v>1.4</c:v>
+                </c:pt>
+                <c:pt idx="5">
+                  <c:v>1.9</c:v>
+                </c:pt>
+              </c:numCache>
+            </c:numRef>
+          </c:val>
+        </c:ser>
+        <c:overlap val="100"/>
         <c:axId val="-2068027336"/>
         <c:axId val="-2113994440"/>
       </c:barChart>
@@ -302,6 +501,21 @@
         <c:crosses val="autoZero"/>
       </c:valAx>
     </c:plotArea>
+    <c:legend>
+      <c:legendPos val="b"/>
+      <c:overlay val="0"/>
+      <c:txPr>
+        <a:bodyPr/>
+        <a:lstStyle/>
+        <a:p>
+          <a:pPr>
+            <a:defRPr sz="900">
+              <a:latin typeface="Montserrat Medium"/>
+            </a:defRPr>
+          </a:pPr>
+        </a:p>
+      </c:txPr>
+    </c:legend>
     <c:dispBlanksAs val="gap"/>
   </c:chart>
   <c:txPr>
@@ -4533,7 +4747,7 @@
                 </a:solidFill>
                 <a:latin typeface="Montserrat"/>
               </a:rPr>
-              <a:t>Sensitivity</a:t>
+              <a:t>Segmentation breakdown</a:t>
             </a:r>
           </a:p>
         </p:txBody>
@@ -4668,7 +4882,7 @@
                 </a:solidFill>
                 <a:latin typeface="Montserrat"/>
               </a:rPr>
-              <a:t>[Driver] moves the answer most — the swing is ~$[X]B</a:t>
+              <a:t>[Segment A] drives over half of the market by value</a:t>
             </a:r>
           </a:p>
         </p:txBody>
@@ -4676,56 +4890,6 @@
       <p:sp>
         <p:nvSpPr>
           <p:cNvPr id="7" name="TextBox 6"/>
-          <p:cNvSpPr txBox="1"/>
-          <p:nvPr/>
-        </p:nvSpPr>
-        <p:spPr>
-          <a:xfrm>
-            <a:off x="10362895" y="1536192"/>
-            <a:ext cx="1554480" cy="219456"/>
-          </a:xfrm>
-          <a:prstGeom prst="rect">
-            <a:avLst/>
-          </a:prstGeom>
-          <a:noFill/>
-          <a:ln w="6350">
-            <a:solidFill>
-              <a:srgbClr val="8A8A8A"/>
-            </a:solidFill>
-          </a:ln>
-        </p:spPr>
-        <p:txBody>
-          <a:bodyPr wrap="square" anchor="ctr" lIns="0" rIns="0" tIns="0" bIns="0">
-            <a:spAutoFit/>
-          </a:bodyPr>
-          <a:lstStyle/>
-          <a:p>
-            <a:pPr algn="ctr">
-              <a:lnSpc>
-                <a:spcPct val="105000"/>
-              </a:lnSpc>
-              <a:spcBef>
-                <a:spcPts val="0"/>
-              </a:spcBef>
-              <a:spcAft>
-                <a:spcPts val="200"/>
-              </a:spcAft>
-            </a:pPr>
-            <a:r>
-              <a:rPr sz="850" b="0" i="0">
-                <a:solidFill>
-                  <a:srgbClr val="302E2E"/>
-                </a:solidFill>
-                <a:latin typeface="Montserrat Medium"/>
-              </a:rPr>
-              <a:t>ILLUSTRATIVE</a:t>
-            </a:r>
-          </a:p>
-        </p:txBody>
-      </p:sp>
-      <p:sp>
-        <p:nvSpPr>
-          <p:cNvPr id="8" name="TextBox 7"/>
           <p:cNvSpPr txBox="1"/>
           <p:nvPr/>
         </p:nvSpPr>
@@ -4763,14 +4927,14 @@
                 </a:solidFill>
                 <a:latin typeface="Montserrat"/>
               </a:rPr>
-              <a:t>Sensitivity of TAM to key drivers, $B</a:t>
+              <a:t>[Market] by segment, $B</a:t>
             </a:r>
           </a:p>
         </p:txBody>
       </p:sp>
       <p:graphicFrame>
         <p:nvGraphicFramePr>
-          <p:cNvPr id="9" name="Chart 8"/>
+          <p:cNvPr id="8" name="Chart 7"/>
           <p:cNvGraphicFramePr>
             <a:graphicFrameLocks noGrp="1"/>
           </p:cNvGraphicFramePr>
@@ -4788,7 +4952,7 @@
       </p:graphicFrame>
       <p:cxnSp>
         <p:nvCxnSpPr>
-          <p:cNvPr id="10" name="Connector 9"/>
+          <p:cNvPr id="9" name="Connector 8"/>
           <p:cNvCxnSpPr/>
           <p:nvPr/>
         </p:nvCxnSpPr>
@@ -4823,7 +4987,7 @@
       </p:cxnSp>
       <p:sp>
         <p:nvSpPr>
-          <p:cNvPr id="11" name="Isosceles Triangle 10"/>
+          <p:cNvPr id="10" name="Isosceles Triangle 9"/>
           <p:cNvSpPr/>
           <p:nvPr/>
         </p:nvSpPr>
@@ -4867,7 +5031,7 @@
       </p:sp>
       <p:sp>
         <p:nvSpPr>
-          <p:cNvPr id="12" name="TextBox 11"/>
+          <p:cNvPr id="11" name="TextBox 10"/>
           <p:cNvSpPr txBox="1"/>
           <p:nvPr/>
         </p:nvSpPr>
@@ -4912,7 +5076,7 @@
       </p:sp>
       <p:sp>
         <p:nvSpPr>
-          <p:cNvPr id="13" name="TextBox 12"/>
+          <p:cNvPr id="12" name="TextBox 11"/>
           <p:cNvSpPr txBox="1"/>
           <p:nvPr/>
         </p:nvSpPr>
@@ -4959,7 +5123,7 @@
                 </a:solidFill>
                 <a:latin typeface="Montserrat Medium"/>
               </a:rPr>
-              <a:t>[Driver 1] dominates the range</a:t>
+              <a:t>Mix skews to [Segment A] in [Region A]</a:t>
             </a:r>
           </a:p>
           <a:p>
@@ -4990,7 +5154,7 @@
                 </a:solidFill>
                 <a:latin typeface="Montserrat Medium"/>
               </a:rPr>
-              <a:t>Prioritise diligence on [Driver 1]</a:t>
+              <a:t>[Segment C] is nascent everywhere</a:t>
             </a:r>
           </a:p>
         </p:txBody>
@@ -5107,7 +5271,7 @@
                 </a:solidFill>
                 <a:latin typeface="Montserrat"/>
               </a:rPr>
-              <a:t>Scenario</a:t>
+              <a:t>Triangulation</a:t>
             </a:r>
           </a:p>
         </p:txBody>
@@ -5242,7 +5406,7 @@
                 </a:solidFill>
                 <a:latin typeface="Montserrat"/>
               </a:rPr>
-              <a:t>[Scenario]: [one-line thesis] lifts the market to ~$[XX]B</a:t>
+              <a:t>Bottom-up and top-down reconcile to within [X]%</a:t>
             </a:r>
           </a:p>
         </p:txBody>
@@ -5255,7 +5419,7 @@
         </p:nvSpPr>
         <p:spPr>
           <a:xfrm>
-            <a:off x="502920" y="1783080"/>
+            <a:off x="502920" y="1691640"/>
             <a:ext cx="7269480" cy="320040"/>
           </a:xfrm>
           <a:prstGeom prst="rect">
@@ -5287,158 +5451,29 @@
                 </a:solidFill>
                 <a:latin typeface="Montserrat"/>
               </a:rPr>
-              <a:t>Trend (qualitative thesis)</a:t>
-            </a:r>
-          </a:p>
-        </p:txBody>
-      </p:sp>
-      <p:sp>
-        <p:nvSpPr>
-          <p:cNvPr id="8" name="TextBox 7"/>
-          <p:cNvSpPr txBox="1"/>
-          <p:nvPr/>
-        </p:nvSpPr>
-        <p:spPr>
-          <a:xfrm>
-            <a:off x="502920" y="2194560"/>
-            <a:ext cx="7269480" cy="4160520"/>
-          </a:xfrm>
-          <a:prstGeom prst="rect">
-            <a:avLst/>
-          </a:prstGeom>
-          <a:noFill/>
-        </p:spPr>
-        <p:txBody>
-          <a:bodyPr wrap="square" anchor="t" lIns="0" rIns="0" tIns="0" bIns="0">
-            <a:spAutoFit/>
-          </a:bodyPr>
-          <a:lstStyle/>
-          <a:p>
-            <a:pPr algn="l">
-              <a:lnSpc>
-                <a:spcPct val="110000"/>
-              </a:lnSpc>
-              <a:spcBef>
-                <a:spcPts val="0"/>
-              </a:spcBef>
-              <a:spcAft>
-                <a:spcPts val="600"/>
-              </a:spcAft>
-            </a:pPr>
-            <a:r>
-              <a:rPr sz="1200" b="1" i="0">
-                <a:solidFill>
-                  <a:srgbClr val="03045E"/>
-                </a:solidFill>
-                <a:latin typeface="Montserrat Medium"/>
-              </a:rPr>
-              <a:t>•  </a:t>
-            </a:r>
-            <a:r>
-              <a:rPr sz="1200" b="1" i="0">
-                <a:solidFill>
-                  <a:srgbClr val="302E2E"/>
-                </a:solidFill>
-                <a:latin typeface="Montserrat Medium"/>
-              </a:rPr>
-              <a:t>[Directional thesis in plain words — what changes and why]</a:t>
-            </a:r>
-          </a:p>
-          <a:p>
-            <a:pPr algn="l">
-              <a:lnSpc>
-                <a:spcPct val="110000"/>
-              </a:lnSpc>
-              <a:spcBef>
-                <a:spcPts val="0"/>
-              </a:spcBef>
-              <a:spcAft>
-                <a:spcPts val="600"/>
-              </a:spcAft>
-            </a:pPr>
-            <a:r>
-              <a:rPr sz="1200" b="1" i="0">
-                <a:solidFill>
-                  <a:srgbClr val="03045E"/>
-                </a:solidFill>
-                <a:latin typeface="Montserrat Medium"/>
-              </a:rPr>
-              <a:t>•  </a:t>
-            </a:r>
-            <a:r>
-              <a:rPr sz="1200" b="0" i="0">
-                <a:solidFill>
-                  <a:srgbClr val="302E2E"/>
-                </a:solidFill>
-                <a:latin typeface="Montserrat Medium"/>
-              </a:rPr>
-              <a:t>Overrides vs Base (quantitative):</a:t>
-            </a:r>
-          </a:p>
-          <a:p>
-            <a:pPr algn="l">
-              <a:lnSpc>
-                <a:spcPct val="110000"/>
-              </a:lnSpc>
-              <a:spcBef>
-                <a:spcPts val="0"/>
-              </a:spcBef>
-              <a:spcAft>
-                <a:spcPts val="600"/>
-              </a:spcAft>
-            </a:pPr>
-            <a:r>
-              <a:rPr sz="1200" b="1" i="0">
-                <a:solidFill>
-                  <a:srgbClr val="03045E"/>
-                </a:solidFill>
-                <a:latin typeface="Montserrat Medium"/>
-              </a:rPr>
-              <a:t>    –  </a:t>
-            </a:r>
-            <a:r>
-              <a:rPr sz="1200" b="0" i="0">
-                <a:solidFill>
-                  <a:srgbClr val="302E2E"/>
-                </a:solidFill>
-                <a:latin typeface="Montserrat Medium"/>
-              </a:rPr>
-              <a:t>[driver] [assumption] → [value] (was [base])</a:t>
-            </a:r>
-          </a:p>
-          <a:p>
-            <a:pPr algn="l">
-              <a:lnSpc>
-                <a:spcPct val="110000"/>
-              </a:lnSpc>
-              <a:spcBef>
-                <a:spcPts val="0"/>
-              </a:spcBef>
-              <a:spcAft>
-                <a:spcPts val="600"/>
-              </a:spcAft>
-            </a:pPr>
-            <a:r>
-              <a:rPr sz="1200" b="1" i="0">
-                <a:solidFill>
-                  <a:srgbClr val="03045E"/>
-                </a:solidFill>
-                <a:latin typeface="Montserrat Medium"/>
-              </a:rPr>
-              <a:t>    –  </a:t>
-            </a:r>
-            <a:r>
-              <a:rPr sz="1200" b="0" i="0">
-                <a:solidFill>
-                  <a:srgbClr val="302E2E"/>
-                </a:solidFill>
-                <a:latin typeface="Montserrat Medium"/>
-              </a:rPr>
-              <a:t>[driver] [assumption] → [value] (was [base])</a:t>
-            </a:r>
-          </a:p>
-        </p:txBody>
-      </p:sp>
+              <a:t>Triangulation, $B</a:t>
+            </a:r>
+          </a:p>
+        </p:txBody>
+      </p:sp>
+      <p:graphicFrame>
+        <p:nvGraphicFramePr>
+          <p:cNvPr id="8" name="Chart 7"/>
+          <p:cNvGraphicFramePr>
+            <a:graphicFrameLocks noGrp="1"/>
+          </p:cNvGraphicFramePr>
+          <p:nvPr/>
+        </p:nvGraphicFramePr>
+        <p:xfrm>
+          <a:off x="502920" y="2103120"/>
+          <a:ext cx="7269480" cy="4251960"/>
+        </p:xfrm>
+        <a:graphic>
+          <a:graphicData uri="http://schemas.openxmlformats.org/drawingml/2006/chart">
+            <c:chart xmlns:c="http://schemas.openxmlformats.org/drawingml/2006/chart" r:id="rId2"/>
+          </a:graphicData>
+        </a:graphic>
+      </p:graphicFrame>
       <p:cxnSp>
         <p:nvCxnSpPr>
           <p:cNvPr id="9" name="Connector 8"/>
@@ -5612,7 +5647,7 @@
                 </a:solidFill>
                 <a:latin typeface="Montserrat Medium"/>
               </a:rPr>
-              <a:t>Thesis stated in words, then the numbers that implement it</a:t>
+              <a:t>Two independent methods agree within [X]%</a:t>
             </a:r>
           </a:p>
           <a:p>
@@ -5643,7 +5678,7 @@
                 </a:solidFill>
                 <a:latin typeface="Montserrat Medium"/>
               </a:rPr>
-              <a:t>Base case shown before this scenario</a:t>
+              <a:t>Divergence explained by [reason]</a:t>
             </a:r>
           </a:p>
         </p:txBody>
@@ -5751,7 +5786,7 @@
                 </a:solidFill>
                 <a:latin typeface="Montserrat"/>
               </a:rPr>
-              <a:t>Appendix:  </a:t>
+              <a:t>Market Sizing:  </a:t>
             </a:r>
             <a:r>
               <a:rPr sz="1050" b="0" i="1">
@@ -5760,7 +5795,7 @@
                 </a:solidFill>
                 <a:latin typeface="Montserrat"/>
               </a:rPr>
-              <a:t>Sources &amp; confidence</a:t>
+              <a:t>Sensitivity</a:t>
             </a:r>
           </a:p>
         </p:txBody>
@@ -5805,7 +5840,7 @@
                 </a:solidFill>
                 <a:latin typeface="Montserrat Medium"/>
               </a:rPr>
-              <a:t>Source: Confidence: 5 primary · 4 credible secondary · 3 triangulated (news cap) · 2 weak · 1 estimate</a:t>
+              <a:t>Source: aqmen analysis</a:t>
             </a:r>
           </a:p>
         </p:txBody>
@@ -5851,6 +5886,1233 @@
                 <a:latin typeface="Montserrat Medium"/>
               </a:rPr>
               <a:t>11</a:t>
+            </a:r>
+          </a:p>
+        </p:txBody>
+      </p:sp>
+      <p:sp>
+        <p:nvSpPr>
+          <p:cNvPr id="6" name="TextBox 5"/>
+          <p:cNvSpPr txBox="1"/>
+          <p:nvPr/>
+        </p:nvSpPr>
+        <p:spPr>
+          <a:xfrm>
+            <a:off x="502920" y="566928"/>
+            <a:ext cx="11185855" cy="1051560"/>
+          </a:xfrm>
+          <a:prstGeom prst="rect">
+            <a:avLst/>
+          </a:prstGeom>
+          <a:noFill/>
+        </p:spPr>
+        <p:txBody>
+          <a:bodyPr wrap="square" anchor="t" lIns="0" rIns="0" tIns="0" bIns="0">
+            <a:spAutoFit/>
+          </a:bodyPr>
+          <a:lstStyle/>
+          <a:p>
+            <a:pPr algn="l">
+              <a:lnSpc>
+                <a:spcPct val="102000"/>
+              </a:lnSpc>
+              <a:spcBef>
+                <a:spcPts val="0"/>
+              </a:spcBef>
+              <a:spcAft>
+                <a:spcPts val="200"/>
+              </a:spcAft>
+            </a:pPr>
+            <a:r>
+              <a:rPr sz="2400" b="1" i="0">
+                <a:solidFill>
+                  <a:srgbClr val="03045E"/>
+                </a:solidFill>
+                <a:latin typeface="Montserrat"/>
+              </a:rPr>
+              <a:t>[Driver] moves the answer most — the swing is ~$[X]B</a:t>
+            </a:r>
+          </a:p>
+        </p:txBody>
+      </p:sp>
+      <p:sp>
+        <p:nvSpPr>
+          <p:cNvPr id="7" name="TextBox 6"/>
+          <p:cNvSpPr txBox="1"/>
+          <p:nvPr/>
+        </p:nvSpPr>
+        <p:spPr>
+          <a:xfrm>
+            <a:off x="10362895" y="1536192"/>
+            <a:ext cx="1554480" cy="219456"/>
+          </a:xfrm>
+          <a:prstGeom prst="rect">
+            <a:avLst/>
+          </a:prstGeom>
+          <a:noFill/>
+          <a:ln w="6350">
+            <a:solidFill>
+              <a:srgbClr val="8A8A8A"/>
+            </a:solidFill>
+          </a:ln>
+        </p:spPr>
+        <p:txBody>
+          <a:bodyPr wrap="square" anchor="ctr" lIns="0" rIns="0" tIns="0" bIns="0">
+            <a:spAutoFit/>
+          </a:bodyPr>
+          <a:lstStyle/>
+          <a:p>
+            <a:pPr algn="ctr">
+              <a:lnSpc>
+                <a:spcPct val="105000"/>
+              </a:lnSpc>
+              <a:spcBef>
+                <a:spcPts val="0"/>
+              </a:spcBef>
+              <a:spcAft>
+                <a:spcPts val="200"/>
+              </a:spcAft>
+            </a:pPr>
+            <a:r>
+              <a:rPr sz="850" b="0" i="0">
+                <a:solidFill>
+                  <a:srgbClr val="302E2E"/>
+                </a:solidFill>
+                <a:latin typeface="Montserrat Medium"/>
+              </a:rPr>
+              <a:t>ILLUSTRATIVE</a:t>
+            </a:r>
+          </a:p>
+        </p:txBody>
+      </p:sp>
+      <p:sp>
+        <p:nvSpPr>
+          <p:cNvPr id="8" name="TextBox 7"/>
+          <p:cNvSpPr txBox="1"/>
+          <p:nvPr/>
+        </p:nvSpPr>
+        <p:spPr>
+          <a:xfrm>
+            <a:off x="502920" y="1691640"/>
+            <a:ext cx="7269480" cy="320040"/>
+          </a:xfrm>
+          <a:prstGeom prst="rect">
+            <a:avLst/>
+          </a:prstGeom>
+          <a:noFill/>
+        </p:spPr>
+        <p:txBody>
+          <a:bodyPr wrap="square" anchor="t" lIns="0" rIns="0" tIns="0" bIns="0">
+            <a:spAutoFit/>
+          </a:bodyPr>
+          <a:lstStyle/>
+          <a:p>
+            <a:pPr algn="l">
+              <a:lnSpc>
+                <a:spcPct val="105000"/>
+              </a:lnSpc>
+              <a:spcBef>
+                <a:spcPts val="0"/>
+              </a:spcBef>
+              <a:spcAft>
+                <a:spcPts val="200"/>
+              </a:spcAft>
+            </a:pPr>
+            <a:r>
+              <a:rPr sz="1400" b="1" i="0">
+                <a:solidFill>
+                  <a:srgbClr val="03045E"/>
+                </a:solidFill>
+                <a:latin typeface="Montserrat"/>
+              </a:rPr>
+              <a:t>Sensitivity of TAM to key drivers, $B</a:t>
+            </a:r>
+          </a:p>
+        </p:txBody>
+      </p:sp>
+      <p:graphicFrame>
+        <p:nvGraphicFramePr>
+          <p:cNvPr id="9" name="Chart 8"/>
+          <p:cNvGraphicFramePr>
+            <a:graphicFrameLocks noGrp="1"/>
+          </p:cNvGraphicFramePr>
+          <p:nvPr/>
+        </p:nvGraphicFramePr>
+        <p:xfrm>
+          <a:off x="502920" y="2103120"/>
+          <a:ext cx="7269480" cy="4251960"/>
+        </p:xfrm>
+        <a:graphic>
+          <a:graphicData uri="http://schemas.openxmlformats.org/drawingml/2006/chart">
+            <c:chart xmlns:c="http://schemas.openxmlformats.org/drawingml/2006/chart" r:id="rId2"/>
+          </a:graphicData>
+        </a:graphic>
+      </p:graphicFrame>
+      <p:cxnSp>
+        <p:nvCxnSpPr>
+          <p:cNvPr id="10" name="Connector 9"/>
+          <p:cNvCxnSpPr/>
+          <p:nvPr/>
+        </p:nvCxnSpPr>
+        <p:spPr>
+          <a:xfrm>
+            <a:off x="8001000" y="1463040"/>
+            <a:ext cx="0" cy="4892040"/>
+          </a:xfrm>
+          <a:prstGeom prst="bentConnector3">
+            <a:avLst/>
+          </a:prstGeom>
+          <a:ln w="12700">
+            <a:solidFill>
+              <a:srgbClr val="C9CBD6"/>
+            </a:solidFill>
+          </a:ln>
+        </p:spPr>
+        <p:style>
+          <a:lnRef idx="2">
+            <a:schemeClr val="accent1"/>
+          </a:lnRef>
+          <a:fillRef idx="0">
+            <a:schemeClr val="accent1"/>
+          </a:fillRef>
+          <a:effectRef idx="1">
+            <a:schemeClr val="accent1"/>
+          </a:effectRef>
+          <a:fontRef idx="minor">
+            <a:schemeClr val="tx1"/>
+          </a:fontRef>
+        </p:style>
+      </p:cxnSp>
+      <p:sp>
+        <p:nvSpPr>
+          <p:cNvPr id="11" name="Isosceles Triangle 10"/>
+          <p:cNvSpPr/>
+          <p:nvPr/>
+        </p:nvSpPr>
+        <p:spPr>
+          <a:xfrm rot="5400000">
+            <a:off x="8275320" y="1490472"/>
+            <a:ext cx="201168" cy="201168"/>
+          </a:xfrm>
+          <a:prstGeom prst="triangle">
+            <a:avLst/>
+          </a:prstGeom>
+          <a:solidFill>
+            <a:srgbClr val="03045E"/>
+          </a:solidFill>
+          <a:ln>
+            <a:noFill/>
+          </a:ln>
+          <a:effectLst/>
+        </p:spPr>
+        <p:style>
+          <a:lnRef idx="1">
+            <a:schemeClr val="accent1"/>
+          </a:lnRef>
+          <a:fillRef idx="3">
+            <a:schemeClr val="accent1"/>
+          </a:fillRef>
+          <a:effectRef idx="2">
+            <a:schemeClr val="accent1"/>
+          </a:effectRef>
+          <a:fontRef idx="minor">
+            <a:schemeClr val="lt1"/>
+          </a:fontRef>
+        </p:style>
+        <p:txBody>
+          <a:bodyPr rtlCol="0" anchor="ctr"/>
+          <a:lstStyle/>
+          <a:p>
+            <a:pPr algn="ctr"/>
+          </a:p>
+        </p:txBody>
+      </p:sp>
+      <p:sp>
+        <p:nvSpPr>
+          <p:cNvPr id="12" name="TextBox 11"/>
+          <p:cNvSpPr txBox="1"/>
+          <p:nvPr/>
+        </p:nvSpPr>
+        <p:spPr>
+          <a:xfrm>
+            <a:off x="8567928" y="1472184"/>
+            <a:ext cx="3136392" cy="274320"/>
+          </a:xfrm>
+          <a:prstGeom prst="rect">
+            <a:avLst/>
+          </a:prstGeom>
+          <a:noFill/>
+        </p:spPr>
+        <p:txBody>
+          <a:bodyPr wrap="square" anchor="t" lIns="0" rIns="0" tIns="0" bIns="0">
+            <a:spAutoFit/>
+          </a:bodyPr>
+          <a:lstStyle/>
+          <a:p>
+            <a:pPr algn="l">
+              <a:lnSpc>
+                <a:spcPct val="105000"/>
+              </a:lnSpc>
+              <a:spcBef>
+                <a:spcPts val="0"/>
+              </a:spcBef>
+              <a:spcAft>
+                <a:spcPts val="200"/>
+              </a:spcAft>
+            </a:pPr>
+            <a:r>
+              <a:rPr sz="1300" b="1" i="0">
+                <a:solidFill>
+                  <a:srgbClr val="03045E"/>
+                </a:solidFill>
+                <a:latin typeface="Montserrat"/>
+              </a:rPr>
+              <a:t>Key Takeaways</a:t>
+            </a:r>
+          </a:p>
+        </p:txBody>
+      </p:sp>
+      <p:sp>
+        <p:nvSpPr>
+          <p:cNvPr id="13" name="TextBox 12"/>
+          <p:cNvSpPr txBox="1"/>
+          <p:nvPr/>
+        </p:nvSpPr>
+        <p:spPr>
+          <a:xfrm>
+            <a:off x="8275320" y="1920240"/>
+            <a:ext cx="3429000" cy="4434840"/>
+          </a:xfrm>
+          <a:prstGeom prst="rect">
+            <a:avLst/>
+          </a:prstGeom>
+          <a:noFill/>
+        </p:spPr>
+        <p:txBody>
+          <a:bodyPr wrap="square" anchor="t" lIns="0" rIns="0" tIns="0" bIns="0">
+            <a:spAutoFit/>
+          </a:bodyPr>
+          <a:lstStyle/>
+          <a:p>
+            <a:pPr algn="l">
+              <a:lnSpc>
+                <a:spcPct val="108000"/>
+              </a:lnSpc>
+              <a:spcBef>
+                <a:spcPts val="0"/>
+              </a:spcBef>
+              <a:spcAft>
+                <a:spcPts val="700"/>
+              </a:spcAft>
+            </a:pPr>
+            <a:r>
+              <a:rPr sz="1100" b="1" i="0">
+                <a:solidFill>
+                  <a:srgbClr val="03045E"/>
+                </a:solidFill>
+                <a:latin typeface="Montserrat Medium"/>
+              </a:rPr>
+              <a:t>•  </a:t>
+            </a:r>
+            <a:r>
+              <a:rPr sz="1100" b="0" i="0">
+                <a:solidFill>
+                  <a:srgbClr val="302E2E"/>
+                </a:solidFill>
+                <a:latin typeface="Montserrat Medium"/>
+              </a:rPr>
+              <a:t>[Driver 1] dominates the range</a:t>
+            </a:r>
+          </a:p>
+          <a:p>
+            <a:pPr algn="l">
+              <a:lnSpc>
+                <a:spcPct val="108000"/>
+              </a:lnSpc>
+              <a:spcBef>
+                <a:spcPts val="0"/>
+              </a:spcBef>
+              <a:spcAft>
+                <a:spcPts val="700"/>
+              </a:spcAft>
+            </a:pPr>
+            <a:r>
+              <a:rPr sz="1100" b="1" i="0">
+                <a:solidFill>
+                  <a:srgbClr val="03045E"/>
+                </a:solidFill>
+                <a:latin typeface="Montserrat Medium"/>
+              </a:rPr>
+              <a:t>•  </a:t>
+            </a:r>
+            <a:r>
+              <a:rPr sz="1100" b="0" i="0">
+                <a:solidFill>
+                  <a:srgbClr val="302E2E"/>
+                </a:solidFill>
+                <a:latin typeface="Montserrat Medium"/>
+              </a:rPr>
+              <a:t>Prioritise diligence on [Driver 1]</a:t>
+            </a:r>
+          </a:p>
+        </p:txBody>
+      </p:sp>
+    </p:spTree>
+  </p:cSld>
+  <p:clrMapOvr>
+    <a:masterClrMapping/>
+  </p:clrMapOvr>
+</p:sld>
+</file>
+
+<file path=ppt/slides/slide13.xml><?xml version="1.0" encoding="utf-8"?>
+<p:sld xmlns:a="http://schemas.openxmlformats.org/drawingml/2006/main" xmlns:p="http://schemas.openxmlformats.org/presentationml/2006/main" xmlns:r="http://schemas.openxmlformats.org/officeDocument/2006/relationships">
+  <p:cSld>
+    <p:spTree>
+      <p:nvGrpSpPr>
+        <p:cNvPr id="1" name=""/>
+        <p:cNvGrpSpPr/>
+        <p:nvPr/>
+      </p:nvGrpSpPr>
+      <p:grpSpPr/>
+      <p:sp>
+        <p:nvSpPr>
+          <p:cNvPr id="2" name="TextBox 1"/>
+          <p:cNvSpPr txBox="1"/>
+          <p:nvPr/>
+        </p:nvSpPr>
+        <p:spPr>
+          <a:xfrm>
+            <a:off x="182880" y="91440"/>
+            <a:ext cx="1828800" cy="274320"/>
+          </a:xfrm>
+          <a:prstGeom prst="rect">
+            <a:avLst/>
+          </a:prstGeom>
+          <a:noFill/>
+        </p:spPr>
+        <p:txBody>
+          <a:bodyPr wrap="square" anchor="t" lIns="0" rIns="0" tIns="0" bIns="0">
+            <a:spAutoFit/>
+          </a:bodyPr>
+          <a:lstStyle/>
+          <a:p>
+            <a:pPr algn="l">
+              <a:lnSpc>
+                <a:spcPct val="105000"/>
+              </a:lnSpc>
+              <a:spcBef>
+                <a:spcPts val="0"/>
+              </a:spcBef>
+              <a:spcAft>
+                <a:spcPts val="200"/>
+              </a:spcAft>
+            </a:pPr>
+            <a:r>
+              <a:rPr sz="900" b="1" i="0">
+                <a:solidFill>
+                  <a:srgbClr val="2E6FD6"/>
+                </a:solidFill>
+                <a:latin typeface="Montserrat"/>
+              </a:rPr>
+              <a:t>DRAFT</a:t>
+            </a:r>
+          </a:p>
+        </p:txBody>
+      </p:sp>
+      <p:sp>
+        <p:nvSpPr>
+          <p:cNvPr id="3" name="TextBox 2"/>
+          <p:cNvSpPr txBox="1"/>
+          <p:nvPr/>
+        </p:nvSpPr>
+        <p:spPr>
+          <a:xfrm>
+            <a:off x="6065215" y="109728"/>
+            <a:ext cx="5943600" cy="274320"/>
+          </a:xfrm>
+          <a:prstGeom prst="rect">
+            <a:avLst/>
+          </a:prstGeom>
+          <a:noFill/>
+        </p:spPr>
+        <p:txBody>
+          <a:bodyPr wrap="square" anchor="t" lIns="0" rIns="0" tIns="0" bIns="0">
+            <a:spAutoFit/>
+          </a:bodyPr>
+          <a:lstStyle/>
+          <a:p>
+            <a:pPr algn="r">
+              <a:lnSpc>
+                <a:spcPct val="105000"/>
+              </a:lnSpc>
+              <a:spcBef>
+                <a:spcPts val="0"/>
+              </a:spcBef>
+              <a:spcAft>
+                <a:spcPts val="200"/>
+              </a:spcAft>
+            </a:pPr>
+            <a:r>
+              <a:rPr sz="1050" b="1" i="0">
+                <a:solidFill>
+                  <a:srgbClr val="03045E"/>
+                </a:solidFill>
+                <a:latin typeface="Montserrat"/>
+              </a:rPr>
+              <a:t>Market Sizing:  </a:t>
+            </a:r>
+            <a:r>
+              <a:rPr sz="1050" b="0" i="1">
+                <a:solidFill>
+                  <a:srgbClr val="03045E"/>
+                </a:solidFill>
+                <a:latin typeface="Montserrat"/>
+              </a:rPr>
+              <a:t>Scenario</a:t>
+            </a:r>
+          </a:p>
+        </p:txBody>
+      </p:sp>
+      <p:sp>
+        <p:nvSpPr>
+          <p:cNvPr id="4" name="TextBox 3"/>
+          <p:cNvSpPr txBox="1"/>
+          <p:nvPr/>
+        </p:nvSpPr>
+        <p:spPr>
+          <a:xfrm>
+            <a:off x="1417320" y="6528816"/>
+            <a:ext cx="8229600" cy="256032"/>
+          </a:xfrm>
+          <a:prstGeom prst="rect">
+            <a:avLst/>
+          </a:prstGeom>
+          <a:noFill/>
+        </p:spPr>
+        <p:txBody>
+          <a:bodyPr wrap="square" anchor="t" lIns="0" rIns="0" tIns="0" bIns="0">
+            <a:spAutoFit/>
+          </a:bodyPr>
+          <a:lstStyle/>
+          <a:p>
+            <a:pPr algn="l">
+              <a:lnSpc>
+                <a:spcPct val="105000"/>
+              </a:lnSpc>
+              <a:spcBef>
+                <a:spcPts val="0"/>
+              </a:spcBef>
+              <a:spcAft>
+                <a:spcPts val="200"/>
+              </a:spcAft>
+            </a:pPr>
+            <a:r>
+              <a:rPr sz="800" b="0" i="0">
+                <a:solidFill>
+                  <a:srgbClr val="8A8A8A"/>
+                </a:solidFill>
+                <a:latin typeface="Montserrat Medium"/>
+              </a:rPr>
+              <a:t>Source: aqmen analysis</a:t>
+            </a:r>
+          </a:p>
+        </p:txBody>
+      </p:sp>
+      <p:sp>
+        <p:nvSpPr>
+          <p:cNvPr id="5" name="TextBox 4"/>
+          <p:cNvSpPr txBox="1"/>
+          <p:nvPr/>
+        </p:nvSpPr>
+        <p:spPr>
+          <a:xfrm>
+            <a:off x="11368735" y="6510528"/>
+            <a:ext cx="548640" cy="256032"/>
+          </a:xfrm>
+          <a:prstGeom prst="rect">
+            <a:avLst/>
+          </a:prstGeom>
+          <a:noFill/>
+        </p:spPr>
+        <p:txBody>
+          <a:bodyPr wrap="square" anchor="t" lIns="0" rIns="0" tIns="0" bIns="0">
+            <a:spAutoFit/>
+          </a:bodyPr>
+          <a:lstStyle/>
+          <a:p>
+            <a:pPr algn="r">
+              <a:lnSpc>
+                <a:spcPct val="105000"/>
+              </a:lnSpc>
+              <a:spcBef>
+                <a:spcPts val="0"/>
+              </a:spcBef>
+              <a:spcAft>
+                <a:spcPts val="200"/>
+              </a:spcAft>
+            </a:pPr>
+            <a:r>
+              <a:rPr sz="900" b="0" i="0">
+                <a:solidFill>
+                  <a:srgbClr val="8A8A8A"/>
+                </a:solidFill>
+                <a:latin typeface="Montserrat Medium"/>
+              </a:rPr>
+              <a:t>12</a:t>
+            </a:r>
+          </a:p>
+        </p:txBody>
+      </p:sp>
+      <p:sp>
+        <p:nvSpPr>
+          <p:cNvPr id="6" name="TextBox 5"/>
+          <p:cNvSpPr txBox="1"/>
+          <p:nvPr/>
+        </p:nvSpPr>
+        <p:spPr>
+          <a:xfrm>
+            <a:off x="502920" y="566928"/>
+            <a:ext cx="11185855" cy="1051560"/>
+          </a:xfrm>
+          <a:prstGeom prst="rect">
+            <a:avLst/>
+          </a:prstGeom>
+          <a:noFill/>
+        </p:spPr>
+        <p:txBody>
+          <a:bodyPr wrap="square" anchor="t" lIns="0" rIns="0" tIns="0" bIns="0">
+            <a:spAutoFit/>
+          </a:bodyPr>
+          <a:lstStyle/>
+          <a:p>
+            <a:pPr algn="l">
+              <a:lnSpc>
+                <a:spcPct val="102000"/>
+              </a:lnSpc>
+              <a:spcBef>
+                <a:spcPts val="0"/>
+              </a:spcBef>
+              <a:spcAft>
+                <a:spcPts val="200"/>
+              </a:spcAft>
+            </a:pPr>
+            <a:r>
+              <a:rPr sz="2400" b="1" i="0">
+                <a:solidFill>
+                  <a:srgbClr val="03045E"/>
+                </a:solidFill>
+                <a:latin typeface="Montserrat"/>
+              </a:rPr>
+              <a:t>[Scenario]: [one-line thesis] lifts the market to ~$[XX]B</a:t>
+            </a:r>
+          </a:p>
+        </p:txBody>
+      </p:sp>
+      <p:sp>
+        <p:nvSpPr>
+          <p:cNvPr id="7" name="TextBox 6"/>
+          <p:cNvSpPr txBox="1"/>
+          <p:nvPr/>
+        </p:nvSpPr>
+        <p:spPr>
+          <a:xfrm>
+            <a:off x="502920" y="1783080"/>
+            <a:ext cx="7269480" cy="320040"/>
+          </a:xfrm>
+          <a:prstGeom prst="rect">
+            <a:avLst/>
+          </a:prstGeom>
+          <a:noFill/>
+        </p:spPr>
+        <p:txBody>
+          <a:bodyPr wrap="square" anchor="t" lIns="0" rIns="0" tIns="0" bIns="0">
+            <a:spAutoFit/>
+          </a:bodyPr>
+          <a:lstStyle/>
+          <a:p>
+            <a:pPr algn="l">
+              <a:lnSpc>
+                <a:spcPct val="105000"/>
+              </a:lnSpc>
+              <a:spcBef>
+                <a:spcPts val="0"/>
+              </a:spcBef>
+              <a:spcAft>
+                <a:spcPts val="200"/>
+              </a:spcAft>
+            </a:pPr>
+            <a:r>
+              <a:rPr sz="1400" b="1" i="0">
+                <a:solidFill>
+                  <a:srgbClr val="03045E"/>
+                </a:solidFill>
+                <a:latin typeface="Montserrat"/>
+              </a:rPr>
+              <a:t>Trend (qualitative thesis)</a:t>
+            </a:r>
+          </a:p>
+        </p:txBody>
+      </p:sp>
+      <p:sp>
+        <p:nvSpPr>
+          <p:cNvPr id="8" name="TextBox 7"/>
+          <p:cNvSpPr txBox="1"/>
+          <p:nvPr/>
+        </p:nvSpPr>
+        <p:spPr>
+          <a:xfrm>
+            <a:off x="502920" y="2194560"/>
+            <a:ext cx="7269480" cy="4160520"/>
+          </a:xfrm>
+          <a:prstGeom prst="rect">
+            <a:avLst/>
+          </a:prstGeom>
+          <a:noFill/>
+        </p:spPr>
+        <p:txBody>
+          <a:bodyPr wrap="square" anchor="t" lIns="0" rIns="0" tIns="0" bIns="0">
+            <a:spAutoFit/>
+          </a:bodyPr>
+          <a:lstStyle/>
+          <a:p>
+            <a:pPr algn="l">
+              <a:lnSpc>
+                <a:spcPct val="110000"/>
+              </a:lnSpc>
+              <a:spcBef>
+                <a:spcPts val="0"/>
+              </a:spcBef>
+              <a:spcAft>
+                <a:spcPts val="600"/>
+              </a:spcAft>
+            </a:pPr>
+            <a:r>
+              <a:rPr sz="1200" b="1" i="0">
+                <a:solidFill>
+                  <a:srgbClr val="03045E"/>
+                </a:solidFill>
+                <a:latin typeface="Montserrat Medium"/>
+              </a:rPr>
+              <a:t>•  </a:t>
+            </a:r>
+            <a:r>
+              <a:rPr sz="1200" b="1" i="0">
+                <a:solidFill>
+                  <a:srgbClr val="302E2E"/>
+                </a:solidFill>
+                <a:latin typeface="Montserrat Medium"/>
+              </a:rPr>
+              <a:t>[Directional thesis in plain words — what changes and why]</a:t>
+            </a:r>
+          </a:p>
+          <a:p>
+            <a:pPr algn="l">
+              <a:lnSpc>
+                <a:spcPct val="110000"/>
+              </a:lnSpc>
+              <a:spcBef>
+                <a:spcPts val="0"/>
+              </a:spcBef>
+              <a:spcAft>
+                <a:spcPts val="600"/>
+              </a:spcAft>
+            </a:pPr>
+            <a:r>
+              <a:rPr sz="1200" b="1" i="0">
+                <a:solidFill>
+                  <a:srgbClr val="03045E"/>
+                </a:solidFill>
+                <a:latin typeface="Montserrat Medium"/>
+              </a:rPr>
+              <a:t>•  </a:t>
+            </a:r>
+            <a:r>
+              <a:rPr sz="1200" b="0" i="0">
+                <a:solidFill>
+                  <a:srgbClr val="302E2E"/>
+                </a:solidFill>
+                <a:latin typeface="Montserrat Medium"/>
+              </a:rPr>
+              <a:t>Overrides vs Base (quantitative):</a:t>
+            </a:r>
+          </a:p>
+          <a:p>
+            <a:pPr algn="l">
+              <a:lnSpc>
+                <a:spcPct val="110000"/>
+              </a:lnSpc>
+              <a:spcBef>
+                <a:spcPts val="0"/>
+              </a:spcBef>
+              <a:spcAft>
+                <a:spcPts val="600"/>
+              </a:spcAft>
+            </a:pPr>
+            <a:r>
+              <a:rPr sz="1200" b="1" i="0">
+                <a:solidFill>
+                  <a:srgbClr val="03045E"/>
+                </a:solidFill>
+                <a:latin typeface="Montserrat Medium"/>
+              </a:rPr>
+              <a:t>    –  </a:t>
+            </a:r>
+            <a:r>
+              <a:rPr sz="1200" b="0" i="0">
+                <a:solidFill>
+                  <a:srgbClr val="302E2E"/>
+                </a:solidFill>
+                <a:latin typeface="Montserrat Medium"/>
+              </a:rPr>
+              <a:t>[driver] [assumption] → [value] (was [base])</a:t>
+            </a:r>
+          </a:p>
+          <a:p>
+            <a:pPr algn="l">
+              <a:lnSpc>
+                <a:spcPct val="110000"/>
+              </a:lnSpc>
+              <a:spcBef>
+                <a:spcPts val="0"/>
+              </a:spcBef>
+              <a:spcAft>
+                <a:spcPts val="600"/>
+              </a:spcAft>
+            </a:pPr>
+            <a:r>
+              <a:rPr sz="1200" b="1" i="0">
+                <a:solidFill>
+                  <a:srgbClr val="03045E"/>
+                </a:solidFill>
+                <a:latin typeface="Montserrat Medium"/>
+              </a:rPr>
+              <a:t>    –  </a:t>
+            </a:r>
+            <a:r>
+              <a:rPr sz="1200" b="0" i="0">
+                <a:solidFill>
+                  <a:srgbClr val="302E2E"/>
+                </a:solidFill>
+                <a:latin typeface="Montserrat Medium"/>
+              </a:rPr>
+              <a:t>[driver] [assumption] → [value] (was [base])</a:t>
+            </a:r>
+          </a:p>
+        </p:txBody>
+      </p:sp>
+      <p:cxnSp>
+        <p:nvCxnSpPr>
+          <p:cNvPr id="9" name="Connector 8"/>
+          <p:cNvCxnSpPr/>
+          <p:nvPr/>
+        </p:nvCxnSpPr>
+        <p:spPr>
+          <a:xfrm>
+            <a:off x="8001000" y="1463040"/>
+            <a:ext cx="0" cy="4892040"/>
+          </a:xfrm>
+          <a:prstGeom prst="bentConnector3">
+            <a:avLst/>
+          </a:prstGeom>
+          <a:ln w="12700">
+            <a:solidFill>
+              <a:srgbClr val="C9CBD6"/>
+            </a:solidFill>
+          </a:ln>
+        </p:spPr>
+        <p:style>
+          <a:lnRef idx="2">
+            <a:schemeClr val="accent1"/>
+          </a:lnRef>
+          <a:fillRef idx="0">
+            <a:schemeClr val="accent1"/>
+          </a:fillRef>
+          <a:effectRef idx="1">
+            <a:schemeClr val="accent1"/>
+          </a:effectRef>
+          <a:fontRef idx="minor">
+            <a:schemeClr val="tx1"/>
+          </a:fontRef>
+        </p:style>
+      </p:cxnSp>
+      <p:sp>
+        <p:nvSpPr>
+          <p:cNvPr id="10" name="Isosceles Triangle 9"/>
+          <p:cNvSpPr/>
+          <p:nvPr/>
+        </p:nvSpPr>
+        <p:spPr>
+          <a:xfrm rot="5400000">
+            <a:off x="8275320" y="1490472"/>
+            <a:ext cx="201168" cy="201168"/>
+          </a:xfrm>
+          <a:prstGeom prst="triangle">
+            <a:avLst/>
+          </a:prstGeom>
+          <a:solidFill>
+            <a:srgbClr val="03045E"/>
+          </a:solidFill>
+          <a:ln>
+            <a:noFill/>
+          </a:ln>
+          <a:effectLst/>
+        </p:spPr>
+        <p:style>
+          <a:lnRef idx="1">
+            <a:schemeClr val="accent1"/>
+          </a:lnRef>
+          <a:fillRef idx="3">
+            <a:schemeClr val="accent1"/>
+          </a:fillRef>
+          <a:effectRef idx="2">
+            <a:schemeClr val="accent1"/>
+          </a:effectRef>
+          <a:fontRef idx="minor">
+            <a:schemeClr val="lt1"/>
+          </a:fontRef>
+        </p:style>
+        <p:txBody>
+          <a:bodyPr rtlCol="0" anchor="ctr"/>
+          <a:lstStyle/>
+          <a:p>
+            <a:pPr algn="ctr"/>
+          </a:p>
+        </p:txBody>
+      </p:sp>
+      <p:sp>
+        <p:nvSpPr>
+          <p:cNvPr id="11" name="TextBox 10"/>
+          <p:cNvSpPr txBox="1"/>
+          <p:nvPr/>
+        </p:nvSpPr>
+        <p:spPr>
+          <a:xfrm>
+            <a:off x="8567928" y="1472184"/>
+            <a:ext cx="3136392" cy="274320"/>
+          </a:xfrm>
+          <a:prstGeom prst="rect">
+            <a:avLst/>
+          </a:prstGeom>
+          <a:noFill/>
+        </p:spPr>
+        <p:txBody>
+          <a:bodyPr wrap="square" anchor="t" lIns="0" rIns="0" tIns="0" bIns="0">
+            <a:spAutoFit/>
+          </a:bodyPr>
+          <a:lstStyle/>
+          <a:p>
+            <a:pPr algn="l">
+              <a:lnSpc>
+                <a:spcPct val="105000"/>
+              </a:lnSpc>
+              <a:spcBef>
+                <a:spcPts val="0"/>
+              </a:spcBef>
+              <a:spcAft>
+                <a:spcPts val="200"/>
+              </a:spcAft>
+            </a:pPr>
+            <a:r>
+              <a:rPr sz="1300" b="1" i="0">
+                <a:solidFill>
+                  <a:srgbClr val="03045E"/>
+                </a:solidFill>
+                <a:latin typeface="Montserrat"/>
+              </a:rPr>
+              <a:t>Key Takeaways</a:t>
+            </a:r>
+          </a:p>
+        </p:txBody>
+      </p:sp>
+      <p:sp>
+        <p:nvSpPr>
+          <p:cNvPr id="12" name="TextBox 11"/>
+          <p:cNvSpPr txBox="1"/>
+          <p:nvPr/>
+        </p:nvSpPr>
+        <p:spPr>
+          <a:xfrm>
+            <a:off x="8275320" y="1920240"/>
+            <a:ext cx="3429000" cy="4434840"/>
+          </a:xfrm>
+          <a:prstGeom prst="rect">
+            <a:avLst/>
+          </a:prstGeom>
+          <a:noFill/>
+        </p:spPr>
+        <p:txBody>
+          <a:bodyPr wrap="square" anchor="t" lIns="0" rIns="0" tIns="0" bIns="0">
+            <a:spAutoFit/>
+          </a:bodyPr>
+          <a:lstStyle/>
+          <a:p>
+            <a:pPr algn="l">
+              <a:lnSpc>
+                <a:spcPct val="108000"/>
+              </a:lnSpc>
+              <a:spcBef>
+                <a:spcPts val="0"/>
+              </a:spcBef>
+              <a:spcAft>
+                <a:spcPts val="700"/>
+              </a:spcAft>
+            </a:pPr>
+            <a:r>
+              <a:rPr sz="1100" b="1" i="0">
+                <a:solidFill>
+                  <a:srgbClr val="03045E"/>
+                </a:solidFill>
+                <a:latin typeface="Montserrat Medium"/>
+              </a:rPr>
+              <a:t>•  </a:t>
+            </a:r>
+            <a:r>
+              <a:rPr sz="1100" b="0" i="0">
+                <a:solidFill>
+                  <a:srgbClr val="302E2E"/>
+                </a:solidFill>
+                <a:latin typeface="Montserrat Medium"/>
+              </a:rPr>
+              <a:t>Thesis stated in words, then the numbers that implement it</a:t>
+            </a:r>
+          </a:p>
+          <a:p>
+            <a:pPr algn="l">
+              <a:lnSpc>
+                <a:spcPct val="108000"/>
+              </a:lnSpc>
+              <a:spcBef>
+                <a:spcPts val="0"/>
+              </a:spcBef>
+              <a:spcAft>
+                <a:spcPts val="700"/>
+              </a:spcAft>
+            </a:pPr>
+            <a:r>
+              <a:rPr sz="1100" b="1" i="0">
+                <a:solidFill>
+                  <a:srgbClr val="03045E"/>
+                </a:solidFill>
+                <a:latin typeface="Montserrat Medium"/>
+              </a:rPr>
+              <a:t>•  </a:t>
+            </a:r>
+            <a:r>
+              <a:rPr sz="1100" b="0" i="0">
+                <a:solidFill>
+                  <a:srgbClr val="302E2E"/>
+                </a:solidFill>
+                <a:latin typeface="Montserrat Medium"/>
+              </a:rPr>
+              <a:t>Base case shown before this scenario</a:t>
+            </a:r>
+          </a:p>
+        </p:txBody>
+      </p:sp>
+    </p:spTree>
+  </p:cSld>
+  <p:clrMapOvr>
+    <a:masterClrMapping/>
+  </p:clrMapOvr>
+</p:sld>
+</file>
+
+<file path=ppt/slides/slide14.xml><?xml version="1.0" encoding="utf-8"?>
+<p:sld xmlns:a="http://schemas.openxmlformats.org/drawingml/2006/main" xmlns:p="http://schemas.openxmlformats.org/presentationml/2006/main" xmlns:r="http://schemas.openxmlformats.org/officeDocument/2006/relationships">
+  <p:cSld>
+    <p:spTree>
+      <p:nvGrpSpPr>
+        <p:cNvPr id="1" name=""/>
+        <p:cNvGrpSpPr/>
+        <p:nvPr/>
+      </p:nvGrpSpPr>
+      <p:grpSpPr/>
+      <p:sp>
+        <p:nvSpPr>
+          <p:cNvPr id="2" name="TextBox 1"/>
+          <p:cNvSpPr txBox="1"/>
+          <p:nvPr/>
+        </p:nvSpPr>
+        <p:spPr>
+          <a:xfrm>
+            <a:off x="182880" y="91440"/>
+            <a:ext cx="1828800" cy="274320"/>
+          </a:xfrm>
+          <a:prstGeom prst="rect">
+            <a:avLst/>
+          </a:prstGeom>
+          <a:noFill/>
+        </p:spPr>
+        <p:txBody>
+          <a:bodyPr wrap="square" anchor="t" lIns="0" rIns="0" tIns="0" bIns="0">
+            <a:spAutoFit/>
+          </a:bodyPr>
+          <a:lstStyle/>
+          <a:p>
+            <a:pPr algn="l">
+              <a:lnSpc>
+                <a:spcPct val="105000"/>
+              </a:lnSpc>
+              <a:spcBef>
+                <a:spcPts val="0"/>
+              </a:spcBef>
+              <a:spcAft>
+                <a:spcPts val="200"/>
+              </a:spcAft>
+            </a:pPr>
+            <a:r>
+              <a:rPr sz="900" b="1" i="0">
+                <a:solidFill>
+                  <a:srgbClr val="2E6FD6"/>
+                </a:solidFill>
+                <a:latin typeface="Montserrat"/>
+              </a:rPr>
+              <a:t>DRAFT</a:t>
+            </a:r>
+          </a:p>
+        </p:txBody>
+      </p:sp>
+      <p:sp>
+        <p:nvSpPr>
+          <p:cNvPr id="3" name="TextBox 2"/>
+          <p:cNvSpPr txBox="1"/>
+          <p:nvPr/>
+        </p:nvSpPr>
+        <p:spPr>
+          <a:xfrm>
+            <a:off x="6065215" y="109728"/>
+            <a:ext cx="5943600" cy="274320"/>
+          </a:xfrm>
+          <a:prstGeom prst="rect">
+            <a:avLst/>
+          </a:prstGeom>
+          <a:noFill/>
+        </p:spPr>
+        <p:txBody>
+          <a:bodyPr wrap="square" anchor="t" lIns="0" rIns="0" tIns="0" bIns="0">
+            <a:spAutoFit/>
+          </a:bodyPr>
+          <a:lstStyle/>
+          <a:p>
+            <a:pPr algn="r">
+              <a:lnSpc>
+                <a:spcPct val="105000"/>
+              </a:lnSpc>
+              <a:spcBef>
+                <a:spcPts val="0"/>
+              </a:spcBef>
+              <a:spcAft>
+                <a:spcPts val="200"/>
+              </a:spcAft>
+            </a:pPr>
+            <a:r>
+              <a:rPr sz="1050" b="1" i="0">
+                <a:solidFill>
+                  <a:srgbClr val="03045E"/>
+                </a:solidFill>
+                <a:latin typeface="Montserrat"/>
+              </a:rPr>
+              <a:t>Appendix:  </a:t>
+            </a:r>
+            <a:r>
+              <a:rPr sz="1050" b="0" i="1">
+                <a:solidFill>
+                  <a:srgbClr val="03045E"/>
+                </a:solidFill>
+                <a:latin typeface="Montserrat"/>
+              </a:rPr>
+              <a:t>Sources &amp; confidence</a:t>
+            </a:r>
+          </a:p>
+        </p:txBody>
+      </p:sp>
+      <p:sp>
+        <p:nvSpPr>
+          <p:cNvPr id="4" name="TextBox 3"/>
+          <p:cNvSpPr txBox="1"/>
+          <p:nvPr/>
+        </p:nvSpPr>
+        <p:spPr>
+          <a:xfrm>
+            <a:off x="1417320" y="6528816"/>
+            <a:ext cx="8229600" cy="256032"/>
+          </a:xfrm>
+          <a:prstGeom prst="rect">
+            <a:avLst/>
+          </a:prstGeom>
+          <a:noFill/>
+        </p:spPr>
+        <p:txBody>
+          <a:bodyPr wrap="square" anchor="t" lIns="0" rIns="0" tIns="0" bIns="0">
+            <a:spAutoFit/>
+          </a:bodyPr>
+          <a:lstStyle/>
+          <a:p>
+            <a:pPr algn="l">
+              <a:lnSpc>
+                <a:spcPct val="105000"/>
+              </a:lnSpc>
+              <a:spcBef>
+                <a:spcPts val="0"/>
+              </a:spcBef>
+              <a:spcAft>
+                <a:spcPts val="200"/>
+              </a:spcAft>
+            </a:pPr>
+            <a:r>
+              <a:rPr sz="800" b="0" i="0">
+                <a:solidFill>
+                  <a:srgbClr val="8A8A8A"/>
+                </a:solidFill>
+                <a:latin typeface="Montserrat Medium"/>
+              </a:rPr>
+              <a:t>Source: Confidence: 5 primary · 4 credible secondary · 3 triangulated (news cap) · 2 weak · 1 estimate</a:t>
+            </a:r>
+          </a:p>
+        </p:txBody>
+      </p:sp>
+      <p:sp>
+        <p:nvSpPr>
+          <p:cNvPr id="5" name="TextBox 4"/>
+          <p:cNvSpPr txBox="1"/>
+          <p:nvPr/>
+        </p:nvSpPr>
+        <p:spPr>
+          <a:xfrm>
+            <a:off x="11368735" y="6510528"/>
+            <a:ext cx="548640" cy="256032"/>
+          </a:xfrm>
+          <a:prstGeom prst="rect">
+            <a:avLst/>
+          </a:prstGeom>
+          <a:noFill/>
+        </p:spPr>
+        <p:txBody>
+          <a:bodyPr wrap="square" anchor="t" lIns="0" rIns="0" tIns="0" bIns="0">
+            <a:spAutoFit/>
+          </a:bodyPr>
+          <a:lstStyle/>
+          <a:p>
+            <a:pPr algn="r">
+              <a:lnSpc>
+                <a:spcPct val="105000"/>
+              </a:lnSpc>
+              <a:spcBef>
+                <a:spcPts val="0"/>
+              </a:spcBef>
+              <a:spcAft>
+                <a:spcPts val="200"/>
+              </a:spcAft>
+            </a:pPr>
+            <a:r>
+              <a:rPr sz="900" b="0" i="0">
+                <a:solidFill>
+                  <a:srgbClr val="8A8A8A"/>
+                </a:solidFill>
+                <a:latin typeface="Montserrat Medium"/>
+              </a:rPr>
+              <a:t>13</a:t>
             </a:r>
           </a:p>
         </p:txBody>
@@ -8695,7 +9957,7 @@
                 </a:solidFill>
                 <a:latin typeface="Montserrat"/>
               </a:rPr>
-              <a:t>Headline TAM view</a:t>
+              <a:t>Market expression &amp; drivers</a:t>
             </a:r>
           </a:p>
         </p:txBody>
@@ -8740,7 +10002,7 @@
                 </a:solidFill>
                 <a:latin typeface="Montserrat Medium"/>
               </a:rPr>
-              <a:t>Source: [sources], aqmen</a:t>
+              <a:t>Source: aqmen</a:t>
             </a:r>
           </a:p>
         </p:txBody>
@@ -8830,7 +10092,7 @@
                 </a:solidFill>
                 <a:latin typeface="Montserrat"/>
               </a:rPr>
-              <a:t>The TAM is a ~$[XX]B opportunity, led by [Region]</a:t>
+              <a:t>The market resolves to a price × quantity build on a few key drivers</a:t>
             </a:r>
           </a:p>
         </p:txBody>
@@ -8875,23 +10137,246 @@
                 </a:solidFill>
                 <a:latin typeface="Montserrat"/>
               </a:rPr>
-              <a:t>[Market] TAM by region, [base year] $B</a:t>
-            </a:r>
-          </a:p>
-        </p:txBody>
-      </p:sp>
-      <p:sp>
-        <p:nvSpPr>
-          <p:cNvPr id="8" name="Rectangle 7"/>
+              <a:t>[Market] — market expression &amp; driver tree</a:t>
+            </a:r>
+          </a:p>
+        </p:txBody>
+      </p:sp>
+      <p:sp>
+        <p:nvSpPr>
+          <p:cNvPr id="8" name="TextBox 7"/>
+          <p:cNvSpPr txBox="1"/>
+          <p:nvPr/>
+        </p:nvSpPr>
+        <p:spPr>
+          <a:xfrm>
+            <a:off x="5790895" y="1673352"/>
+            <a:ext cx="1234440" cy="228600"/>
+          </a:xfrm>
+          <a:prstGeom prst="rect">
+            <a:avLst/>
+          </a:prstGeom>
+          <a:noFill/>
+        </p:spPr>
+        <p:txBody>
+          <a:bodyPr wrap="square" anchor="ctr" lIns="0" rIns="0" tIns="0" bIns="0">
+            <a:spAutoFit/>
+          </a:bodyPr>
+          <a:lstStyle/>
+          <a:p>
+            <a:pPr algn="r">
+              <a:lnSpc>
+                <a:spcPct val="105000"/>
+              </a:lnSpc>
+              <a:spcBef>
+                <a:spcPts val="0"/>
+              </a:spcBef>
+              <a:spcAft>
+                <a:spcPts val="200"/>
+              </a:spcAft>
+            </a:pPr>
+            <a:r>
+              <a:rPr sz="950" b="1" i="0">
+                <a:solidFill>
+                  <a:srgbClr val="03045E"/>
+                </a:solidFill>
+                <a:latin typeface="Montserrat"/>
+              </a:rPr>
+              <a:t>Certainty:</a:t>
+            </a:r>
+          </a:p>
+        </p:txBody>
+      </p:sp>
+      <p:sp>
+        <p:nvSpPr>
+          <p:cNvPr id="9" name="Oval 8"/>
           <p:cNvSpPr/>
           <p:nvPr/>
         </p:nvSpPr>
         <p:spPr>
           <a:xfrm>
-            <a:off x="502920" y="2075688"/>
-            <a:ext cx="146304" cy="146304"/>
-          </a:xfrm>
-          <a:prstGeom prst="rect">
+            <a:off x="7071055" y="1709928"/>
+            <a:ext cx="118872" cy="118872"/>
+          </a:xfrm>
+          <a:prstGeom prst="ellipse">
+            <a:avLst/>
+          </a:prstGeom>
+          <a:solidFill>
+            <a:srgbClr val="9B1C1C"/>
+          </a:solidFill>
+          <a:ln>
+            <a:noFill/>
+          </a:ln>
+          <a:effectLst/>
+        </p:spPr>
+        <p:style>
+          <a:lnRef idx="1">
+            <a:schemeClr val="accent1"/>
+          </a:lnRef>
+          <a:fillRef idx="3">
+            <a:schemeClr val="accent1"/>
+          </a:fillRef>
+          <a:effectRef idx="2">
+            <a:schemeClr val="accent1"/>
+          </a:effectRef>
+          <a:fontRef idx="minor">
+            <a:schemeClr val="lt1"/>
+          </a:fontRef>
+        </p:style>
+        <p:txBody>
+          <a:bodyPr rtlCol="0" anchor="ctr"/>
+          <a:lstStyle/>
+          <a:p>
+            <a:pPr algn="ctr"/>
+          </a:p>
+        </p:txBody>
+      </p:sp>
+      <p:sp>
+        <p:nvSpPr>
+          <p:cNvPr id="10" name="TextBox 9"/>
+          <p:cNvSpPr txBox="1"/>
+          <p:nvPr/>
+        </p:nvSpPr>
+        <p:spPr>
+          <a:xfrm>
+            <a:off x="7235647" y="1673352"/>
+            <a:ext cx="777240" cy="228600"/>
+          </a:xfrm>
+          <a:prstGeom prst="rect">
+            <a:avLst/>
+          </a:prstGeom>
+          <a:noFill/>
+        </p:spPr>
+        <p:txBody>
+          <a:bodyPr wrap="square" anchor="ctr" lIns="0" rIns="0" tIns="0" bIns="0">
+            <a:spAutoFit/>
+          </a:bodyPr>
+          <a:lstStyle/>
+          <a:p>
+            <a:pPr algn="l">
+              <a:lnSpc>
+                <a:spcPct val="105000"/>
+              </a:lnSpc>
+              <a:spcBef>
+                <a:spcPts val="0"/>
+              </a:spcBef>
+              <a:spcAft>
+                <a:spcPts val="200"/>
+              </a:spcAft>
+            </a:pPr>
+            <a:r>
+              <a:rPr sz="950" b="0" i="0">
+                <a:solidFill>
+                  <a:srgbClr val="302E2E"/>
+                </a:solidFill>
+                <a:latin typeface="Montserrat Medium"/>
+              </a:rPr>
+              <a:t>Low</a:t>
+            </a:r>
+          </a:p>
+        </p:txBody>
+      </p:sp>
+      <p:sp>
+        <p:nvSpPr>
+          <p:cNvPr id="11" name="Oval 10"/>
+          <p:cNvSpPr/>
+          <p:nvPr/>
+        </p:nvSpPr>
+        <p:spPr>
+          <a:xfrm>
+            <a:off x="8122615" y="1709928"/>
+            <a:ext cx="118872" cy="118872"/>
+          </a:xfrm>
+          <a:prstGeom prst="ellipse">
+            <a:avLst/>
+          </a:prstGeom>
+          <a:solidFill>
+            <a:srgbClr val="B7791F"/>
+          </a:solidFill>
+          <a:ln>
+            <a:noFill/>
+          </a:ln>
+          <a:effectLst/>
+        </p:spPr>
+        <p:style>
+          <a:lnRef idx="1">
+            <a:schemeClr val="accent1"/>
+          </a:lnRef>
+          <a:fillRef idx="3">
+            <a:schemeClr val="accent1"/>
+          </a:fillRef>
+          <a:effectRef idx="2">
+            <a:schemeClr val="accent1"/>
+          </a:effectRef>
+          <a:fontRef idx="minor">
+            <a:schemeClr val="lt1"/>
+          </a:fontRef>
+        </p:style>
+        <p:txBody>
+          <a:bodyPr rtlCol="0" anchor="ctr"/>
+          <a:lstStyle/>
+          <a:p>
+            <a:pPr algn="ctr"/>
+          </a:p>
+        </p:txBody>
+      </p:sp>
+      <p:sp>
+        <p:nvSpPr>
+          <p:cNvPr id="12" name="TextBox 11"/>
+          <p:cNvSpPr txBox="1"/>
+          <p:nvPr/>
+        </p:nvSpPr>
+        <p:spPr>
+          <a:xfrm>
+            <a:off x="8287207" y="1673352"/>
+            <a:ext cx="777240" cy="228600"/>
+          </a:xfrm>
+          <a:prstGeom prst="rect">
+            <a:avLst/>
+          </a:prstGeom>
+          <a:noFill/>
+        </p:spPr>
+        <p:txBody>
+          <a:bodyPr wrap="square" anchor="ctr" lIns="0" rIns="0" tIns="0" bIns="0">
+            <a:spAutoFit/>
+          </a:bodyPr>
+          <a:lstStyle/>
+          <a:p>
+            <a:pPr algn="l">
+              <a:lnSpc>
+                <a:spcPct val="105000"/>
+              </a:lnSpc>
+              <a:spcBef>
+                <a:spcPts val="0"/>
+              </a:spcBef>
+              <a:spcAft>
+                <a:spcPts val="200"/>
+              </a:spcAft>
+            </a:pPr>
+            <a:r>
+              <a:rPr sz="950" b="0" i="0">
+                <a:solidFill>
+                  <a:srgbClr val="302E2E"/>
+                </a:solidFill>
+                <a:latin typeface="Montserrat Medium"/>
+              </a:rPr>
+              <a:t>Medium</a:t>
+            </a:r>
+          </a:p>
+        </p:txBody>
+      </p:sp>
+      <p:sp>
+        <p:nvSpPr>
+          <p:cNvPr id="13" name="Oval 12"/>
+          <p:cNvSpPr/>
+          <p:nvPr/>
+        </p:nvSpPr>
+        <p:spPr>
+          <a:xfrm>
+            <a:off x="9174175" y="1709928"/>
+            <a:ext cx="118872" cy="118872"/>
+          </a:xfrm>
+          <a:prstGeom prst="ellipse">
             <a:avLst/>
           </a:prstGeom>
           <a:solidFill>
@@ -8926,14 +10411,14 @@
       </p:sp>
       <p:sp>
         <p:nvSpPr>
-          <p:cNvPr id="9" name="TextBox 8"/>
+          <p:cNvPr id="14" name="TextBox 13"/>
           <p:cNvSpPr txBox="1"/>
           <p:nvPr/>
         </p:nvSpPr>
         <p:spPr>
           <a:xfrm>
-            <a:off x="722376" y="2048256"/>
-            <a:ext cx="2011680" cy="228600"/>
+            <a:off x="9338767" y="1673352"/>
+            <a:ext cx="777240" cy="228600"/>
           </a:xfrm>
           <a:prstGeom prst="rect">
             <a:avLst/>
@@ -8964,27 +10449,212 @@
                 </a:solidFill>
                 <a:latin typeface="Montserrat Medium"/>
               </a:rPr>
-              <a:t>Whitespace</a:t>
-            </a:r>
-          </a:p>
-        </p:txBody>
-      </p:sp>
-      <p:sp>
-        <p:nvSpPr>
-          <p:cNvPr id="10" name="Rectangle 9"/>
+              <a:t>High</a:t>
+            </a:r>
+          </a:p>
+        </p:txBody>
+      </p:sp>
+      <p:sp>
+        <p:nvSpPr>
+          <p:cNvPr id="15" name="TextBox 14"/>
+          <p:cNvSpPr txBox="1"/>
+          <p:nvPr/>
+        </p:nvSpPr>
+        <p:spPr>
+          <a:xfrm>
+            <a:off x="502920" y="1901952"/>
+            <a:ext cx="3423818" cy="320040"/>
+          </a:xfrm>
+          <a:prstGeom prst="rect">
+            <a:avLst/>
+          </a:prstGeom>
+          <a:noFill/>
+        </p:spPr>
+        <p:txBody>
+          <a:bodyPr wrap="square" anchor="t" lIns="0" rIns="0" tIns="0" bIns="0">
+            <a:spAutoFit/>
+          </a:bodyPr>
+          <a:lstStyle/>
+          <a:p>
+            <a:pPr algn="ctr">
+              <a:lnSpc>
+                <a:spcPct val="105000"/>
+              </a:lnSpc>
+              <a:spcBef>
+                <a:spcPts val="0"/>
+              </a:spcBef>
+              <a:spcAft>
+                <a:spcPts val="200"/>
+              </a:spcAft>
+            </a:pPr>
+            <a:r>
+              <a:rPr sz="1050" b="1" i="1">
+                <a:solidFill>
+                  <a:srgbClr val="03045E"/>
+                </a:solidFill>
+                <a:latin typeface="Montserrat"/>
+              </a:rPr>
+              <a:t>Market expression</a:t>
+            </a:r>
+          </a:p>
+        </p:txBody>
+      </p:sp>
+      <p:sp>
+        <p:nvSpPr>
+          <p:cNvPr id="16" name="Rounded Rectangle 15"/>
           <p:cNvSpPr/>
           <p:nvPr/>
         </p:nvSpPr>
         <p:spPr>
           <a:xfrm>
-            <a:off x="1865376" y="2075688"/>
-            <a:ext cx="146304" cy="146304"/>
-          </a:xfrm>
-          <a:prstGeom prst="rect">
-            <a:avLst/>
+            <a:off x="502920" y="3817620"/>
+            <a:ext cx="3423818" cy="868680"/>
+          </a:xfrm>
+          <a:prstGeom prst="roundRect">
+            <a:avLst>
+              <a:gd name="adj" fmla="val 8000"/>
+            </a:avLst>
           </a:prstGeom>
           <a:solidFill>
-            <a:srgbClr val="0728A3"/>
+            <a:srgbClr val="D6EEF5"/>
+          </a:solidFill>
+          <a:ln w="9525">
+            <a:solidFill>
+              <a:srgbClr val="2E6FD6"/>
+            </a:solidFill>
+          </a:ln>
+          <a:effectLst/>
+        </p:spPr>
+        <p:style>
+          <a:lnRef idx="1">
+            <a:schemeClr val="accent1"/>
+          </a:lnRef>
+          <a:fillRef idx="3">
+            <a:schemeClr val="accent1"/>
+          </a:fillRef>
+          <a:effectRef idx="2">
+            <a:schemeClr val="accent1"/>
+          </a:effectRef>
+          <a:fontRef idx="minor">
+            <a:schemeClr val="lt1"/>
+          </a:fontRef>
+        </p:style>
+        <p:txBody>
+          <a:bodyPr rtlCol="0" anchor="ctr"/>
+          <a:lstStyle/>
+          <a:p>
+            <a:pPr algn="ctr"/>
+          </a:p>
+        </p:txBody>
+      </p:sp>
+      <p:sp>
+        <p:nvSpPr>
+          <p:cNvPr id="17" name="TextBox 16"/>
+          <p:cNvSpPr txBox="1"/>
+          <p:nvPr/>
+        </p:nvSpPr>
+        <p:spPr>
+          <a:xfrm>
+            <a:off x="557784" y="3817620"/>
+            <a:ext cx="3314090" cy="411480"/>
+          </a:xfrm>
+          <a:prstGeom prst="rect">
+            <a:avLst/>
+          </a:prstGeom>
+          <a:noFill/>
+        </p:spPr>
+        <p:txBody>
+          <a:bodyPr wrap="square" anchor="ctr" lIns="0" rIns="0" tIns="0" bIns="0">
+            <a:spAutoFit/>
+          </a:bodyPr>
+          <a:lstStyle/>
+          <a:p>
+            <a:pPr algn="ctr">
+              <a:lnSpc>
+                <a:spcPct val="100000"/>
+              </a:lnSpc>
+              <a:spcBef>
+                <a:spcPts val="0"/>
+              </a:spcBef>
+              <a:spcAft>
+                <a:spcPts val="200"/>
+              </a:spcAft>
+            </a:pPr>
+            <a:r>
+              <a:rPr sz="950" b="1" i="0">
+                <a:solidFill>
+                  <a:srgbClr val="03045E"/>
+                </a:solidFill>
+                <a:latin typeface="Montserrat"/>
+              </a:rPr>
+              <a:t>[Market] size</a:t>
+            </a:r>
+          </a:p>
+        </p:txBody>
+      </p:sp>
+      <p:sp>
+        <p:nvSpPr>
+          <p:cNvPr id="18" name="TextBox 17"/>
+          <p:cNvSpPr txBox="1"/>
+          <p:nvPr/>
+        </p:nvSpPr>
+        <p:spPr>
+          <a:xfrm>
+            <a:off x="557784" y="4229100"/>
+            <a:ext cx="3314090" cy="182880"/>
+          </a:xfrm>
+          <a:prstGeom prst="rect">
+            <a:avLst/>
+          </a:prstGeom>
+          <a:noFill/>
+        </p:spPr>
+        <p:txBody>
+          <a:bodyPr wrap="square" anchor="ctr" lIns="0" rIns="0" tIns="0" bIns="0">
+            <a:spAutoFit/>
+          </a:bodyPr>
+          <a:lstStyle/>
+          <a:p>
+            <a:pPr algn="ctr">
+              <a:lnSpc>
+                <a:spcPct val="105000"/>
+              </a:lnSpc>
+              <a:spcBef>
+                <a:spcPts val="0"/>
+              </a:spcBef>
+              <a:spcAft>
+                <a:spcPts val="200"/>
+              </a:spcAft>
+            </a:pPr>
+            <a:r>
+              <a:rPr sz="750" b="0" i="1">
+                <a:solidFill>
+                  <a:srgbClr val="0728A3"/>
+                </a:solidFill>
+                <a:latin typeface="Montserrat Medium"/>
+              </a:rPr>
+              <a:t>= engagements × avg cost</a:t>
+            </a:r>
+          </a:p>
+        </p:txBody>
+      </p:sp>
+      <p:sp>
+        <p:nvSpPr>
+          <p:cNvPr id="19" name="Rounded Rectangle 18"/>
+          <p:cNvSpPr/>
+          <p:nvPr/>
+        </p:nvSpPr>
+        <p:spPr>
+          <a:xfrm>
+            <a:off x="557784" y="4393692"/>
+            <a:ext cx="3314090" cy="274320"/>
+          </a:xfrm>
+          <a:prstGeom prst="roundRect">
+            <a:avLst>
+              <a:gd name="adj" fmla="val 12000"/>
+            </a:avLst>
+          </a:prstGeom>
+          <a:solidFill>
+            <a:srgbClr val="020462"/>
           </a:solidFill>
           <a:ln>
             <a:noFill/>
@@ -9015,14 +10685,14 @@
       </p:sp>
       <p:sp>
         <p:nvSpPr>
-          <p:cNvPr id="11" name="TextBox 10"/>
+          <p:cNvPr id="20" name="TextBox 19"/>
           <p:cNvSpPr txBox="1"/>
           <p:nvPr/>
         </p:nvSpPr>
         <p:spPr>
           <a:xfrm>
-            <a:off x="2084832" y="2048256"/>
-            <a:ext cx="2011680" cy="228600"/>
+            <a:off x="557784" y="4393692"/>
+            <a:ext cx="3314090" cy="274320"/>
           </a:xfrm>
           <a:prstGeom prst="rect">
             <a:avLst/>
@@ -9035,7 +10705,7 @@
           </a:bodyPr>
           <a:lstStyle/>
           <a:p>
-            <a:pPr algn="l">
+            <a:pPr algn="ctr">
               <a:lnSpc>
                 <a:spcPct val="105000"/>
               </a:lnSpc>
@@ -9047,102 +10717,35 @@
               </a:spcAft>
             </a:pPr>
             <a:r>
-              <a:rPr sz="950" b="0" i="0">
-                <a:solidFill>
-                  <a:srgbClr val="302E2E"/>
+              <a:rPr sz="900" b="1" i="0">
+                <a:solidFill>
+                  <a:srgbClr val="FEFFFF"/>
                 </a:solidFill>
                 <a:latin typeface="Montserrat Medium"/>
               </a:rPr>
-              <a:t>SAM</a:t>
-            </a:r>
-          </a:p>
-        </p:txBody>
-      </p:sp>
-      <p:sp>
-        <p:nvSpPr>
-          <p:cNvPr id="12" name="TextBox 11"/>
-          <p:cNvSpPr txBox="1"/>
-          <p:nvPr/>
-        </p:nvSpPr>
-        <p:spPr>
-          <a:xfrm>
-            <a:off x="502920" y="2286000"/>
-            <a:ext cx="4270071" cy="411480"/>
-          </a:xfrm>
-          <a:prstGeom prst="rect">
-            <a:avLst/>
-          </a:prstGeom>
-          <a:noFill/>
-        </p:spPr>
-        <p:txBody>
-          <a:bodyPr wrap="square" anchor="t" lIns="0" rIns="0" tIns="0" bIns="0">
-            <a:spAutoFit/>
-          </a:bodyPr>
-          <a:lstStyle/>
-          <a:p>
-            <a:pPr algn="ctr">
-              <a:lnSpc>
-                <a:spcPct val="105000"/>
-              </a:lnSpc>
-              <a:spcBef>
-                <a:spcPts val="0"/>
-              </a:spcBef>
-              <a:spcAft>
-                <a:spcPts val="200"/>
-              </a:spcAft>
-            </a:pPr>
-            <a:r>
-              <a:rPr sz="1200" b="1" i="0">
-                <a:solidFill>
-                  <a:srgbClr val="03045E"/>
-                </a:solidFill>
-                <a:latin typeface="Montserrat Medium"/>
-              </a:rPr>
-              <a:t>53.3</a:t>
-            </a:r>
-          </a:p>
-          <a:p>
-            <a:pPr algn="ctr">
-              <a:lnSpc>
-                <a:spcPct val="105000"/>
-              </a:lnSpc>
-              <a:spcBef>
-                <a:spcPts val="0"/>
-              </a:spcBef>
-              <a:spcAft>
-                <a:spcPts val="200"/>
-              </a:spcAft>
-            </a:pPr>
-            <a:r>
-              <a:rPr sz="1000" b="0" i="1">
-                <a:solidFill>
-                  <a:srgbClr val="8A8A8A"/>
-                </a:solidFill>
-                <a:latin typeface="Montserrat Medium"/>
-              </a:rPr>
-              <a:t>(61%)</a:t>
-            </a:r>
-          </a:p>
-        </p:txBody>
-      </p:sp>
-      <p:sp>
-        <p:nvSpPr>
-          <p:cNvPr id="13" name="Rectangle 12"/>
+              <a:t>$mn</a:t>
+            </a:r>
+          </a:p>
+        </p:txBody>
+      </p:sp>
+      <p:sp>
+        <p:nvSpPr>
+          <p:cNvPr id="21" name="Oval 20"/>
           <p:cNvSpPr/>
           <p:nvPr/>
         </p:nvSpPr>
         <p:spPr>
           <a:xfrm>
-            <a:off x="502920" y="2743200"/>
-            <a:ext cx="4270071" cy="2878043"/>
-          </a:xfrm>
-          <a:prstGeom prst="rect">
+            <a:off x="3771290" y="3863340"/>
+            <a:ext cx="109728" cy="109728"/>
+          </a:xfrm>
+          <a:prstGeom prst="ellipse">
             <a:avLst/>
           </a:prstGeom>
           <a:solidFill>
             <a:srgbClr val="03045E"/>
           </a:solidFill>
-          <a:ln w="12700">
+          <a:ln w="9525">
             <a:solidFill>
               <a:srgbClr val="FEFFFF"/>
             </a:solidFill>
@@ -9173,14 +10776,107 @@
       </p:sp>
       <p:sp>
         <p:nvSpPr>
-          <p:cNvPr id="14" name="TextBox 13"/>
+          <p:cNvPr id="22" name="TextBox 21"/>
           <p:cNvSpPr txBox="1"/>
           <p:nvPr/>
         </p:nvSpPr>
         <p:spPr>
           <a:xfrm>
-            <a:off x="502920" y="2743200"/>
-            <a:ext cx="4270071" cy="2878043"/>
+            <a:off x="4383938" y="1901952"/>
+            <a:ext cx="3423818" cy="320040"/>
+          </a:xfrm>
+          <a:prstGeom prst="rect">
+            <a:avLst/>
+          </a:prstGeom>
+          <a:noFill/>
+        </p:spPr>
+        <p:txBody>
+          <a:bodyPr wrap="square" anchor="t" lIns="0" rIns="0" tIns="0" bIns="0">
+            <a:spAutoFit/>
+          </a:bodyPr>
+          <a:lstStyle/>
+          <a:p>
+            <a:pPr algn="ctr">
+              <a:lnSpc>
+                <a:spcPct val="105000"/>
+              </a:lnSpc>
+              <a:spcBef>
+                <a:spcPts val="0"/>
+              </a:spcBef>
+              <a:spcAft>
+                <a:spcPts val="200"/>
+              </a:spcAft>
+            </a:pPr>
+            <a:r>
+              <a:rPr sz="1050" b="1" i="1">
+                <a:solidFill>
+                  <a:srgbClr val="03045E"/>
+                </a:solidFill>
+                <a:latin typeface="Montserrat"/>
+              </a:rPr>
+              <a:t>Quantity × Price</a:t>
+            </a:r>
+          </a:p>
+        </p:txBody>
+      </p:sp>
+      <p:sp>
+        <p:nvSpPr>
+          <p:cNvPr id="23" name="Rounded Rectangle 22"/>
+          <p:cNvSpPr/>
+          <p:nvPr/>
+        </p:nvSpPr>
+        <p:spPr>
+          <a:xfrm>
+            <a:off x="4383938" y="3300984"/>
+            <a:ext cx="3423818" cy="868680"/>
+          </a:xfrm>
+          <a:prstGeom prst="roundRect">
+            <a:avLst>
+              <a:gd name="adj" fmla="val 8000"/>
+            </a:avLst>
+          </a:prstGeom>
+          <a:solidFill>
+            <a:srgbClr val="D6EEF5"/>
+          </a:solidFill>
+          <a:ln w="9525">
+            <a:solidFill>
+              <a:srgbClr val="2E6FD6"/>
+            </a:solidFill>
+          </a:ln>
+          <a:effectLst/>
+        </p:spPr>
+        <p:style>
+          <a:lnRef idx="1">
+            <a:schemeClr val="accent1"/>
+          </a:lnRef>
+          <a:fillRef idx="3">
+            <a:schemeClr val="accent1"/>
+          </a:fillRef>
+          <a:effectRef idx="2">
+            <a:schemeClr val="accent1"/>
+          </a:effectRef>
+          <a:fontRef idx="minor">
+            <a:schemeClr val="lt1"/>
+          </a:fontRef>
+        </p:style>
+        <p:txBody>
+          <a:bodyPr rtlCol="0" anchor="ctr"/>
+          <a:lstStyle/>
+          <a:p>
+            <a:pPr algn="ctr"/>
+          </a:p>
+        </p:txBody>
+      </p:sp>
+      <p:sp>
+        <p:nvSpPr>
+          <p:cNvPr id="24" name="TextBox 23"/>
+          <p:cNvSpPr txBox="1"/>
+          <p:nvPr/>
+        </p:nvSpPr>
+        <p:spPr>
+          <a:xfrm>
+            <a:off x="4438802" y="3300984"/>
+            <a:ext cx="3314090" cy="411480"/>
           </a:xfrm>
           <a:prstGeom prst="rect">
             <a:avLst/>
@@ -9195,6 +10891,51 @@
           <a:p>
             <a:pPr algn="ctr">
               <a:lnSpc>
+                <a:spcPct val="100000"/>
+              </a:lnSpc>
+              <a:spcBef>
+                <a:spcPts val="0"/>
+              </a:spcBef>
+              <a:spcAft>
+                <a:spcPts val="200"/>
+              </a:spcAft>
+            </a:pPr>
+            <a:r>
+              <a:rPr sz="950" b="1" i="0">
+                <a:solidFill>
+                  <a:srgbClr val="03045E"/>
+                </a:solidFill>
+                <a:latin typeface="Montserrat"/>
+              </a:rPr>
+              <a:t># of engagements</a:t>
+            </a:r>
+          </a:p>
+        </p:txBody>
+      </p:sp>
+      <p:sp>
+        <p:nvSpPr>
+          <p:cNvPr id="25" name="TextBox 24"/>
+          <p:cNvSpPr txBox="1"/>
+          <p:nvPr/>
+        </p:nvSpPr>
+        <p:spPr>
+          <a:xfrm>
+            <a:off x="4438802" y="3712464"/>
+            <a:ext cx="3314090" cy="182880"/>
+          </a:xfrm>
+          <a:prstGeom prst="rect">
+            <a:avLst/>
+          </a:prstGeom>
+          <a:noFill/>
+        </p:spPr>
+        <p:txBody>
+          <a:bodyPr wrap="square" anchor="ctr" lIns="0" rIns="0" tIns="0" bIns="0">
+            <a:spAutoFit/>
+          </a:bodyPr>
+          <a:lstStyle/>
+          <a:p>
+            <a:pPr algn="ctr">
+              <a:lnSpc>
                 <a:spcPct val="105000"/>
               </a:lnSpc>
               <a:spcBef>
@@ -9205,35 +10946,126 @@
               </a:spcAft>
             </a:pPr>
             <a:r>
-              <a:rPr sz="1000" b="1" i="0">
+              <a:rPr sz="750" b="0" i="1">
+                <a:solidFill>
+                  <a:srgbClr val="0728A3"/>
+                </a:solidFill>
+                <a:latin typeface="Montserrat Medium"/>
+              </a:rPr>
+              <a:t>= deals × parties × penetration × share</a:t>
+            </a:r>
+          </a:p>
+        </p:txBody>
+      </p:sp>
+      <p:sp>
+        <p:nvSpPr>
+          <p:cNvPr id="26" name="Rounded Rectangle 25"/>
+          <p:cNvSpPr/>
+          <p:nvPr/>
+        </p:nvSpPr>
+        <p:spPr>
+          <a:xfrm>
+            <a:off x="4438802" y="3877056"/>
+            <a:ext cx="3314090" cy="274320"/>
+          </a:xfrm>
+          <a:prstGeom prst="roundRect">
+            <a:avLst>
+              <a:gd name="adj" fmla="val 12000"/>
+            </a:avLst>
+          </a:prstGeom>
+          <a:solidFill>
+            <a:srgbClr val="020462"/>
+          </a:solidFill>
+          <a:ln>
+            <a:noFill/>
+          </a:ln>
+          <a:effectLst/>
+        </p:spPr>
+        <p:style>
+          <a:lnRef idx="1">
+            <a:schemeClr val="accent1"/>
+          </a:lnRef>
+          <a:fillRef idx="3">
+            <a:schemeClr val="accent1"/>
+          </a:fillRef>
+          <a:effectRef idx="2">
+            <a:schemeClr val="accent1"/>
+          </a:effectRef>
+          <a:fontRef idx="minor">
+            <a:schemeClr val="lt1"/>
+          </a:fontRef>
+        </p:style>
+        <p:txBody>
+          <a:bodyPr rtlCol="0" anchor="ctr"/>
+          <a:lstStyle/>
+          <a:p>
+            <a:pPr algn="ctr"/>
+          </a:p>
+        </p:txBody>
+      </p:sp>
+      <p:sp>
+        <p:nvSpPr>
+          <p:cNvPr id="27" name="TextBox 26"/>
+          <p:cNvSpPr txBox="1"/>
+          <p:nvPr/>
+        </p:nvSpPr>
+        <p:spPr>
+          <a:xfrm>
+            <a:off x="4438802" y="3877056"/>
+            <a:ext cx="3314090" cy="274320"/>
+          </a:xfrm>
+          <a:prstGeom prst="rect">
+            <a:avLst/>
+          </a:prstGeom>
+          <a:noFill/>
+        </p:spPr>
+        <p:txBody>
+          <a:bodyPr wrap="square" anchor="ctr" lIns="0" rIns="0" tIns="0" bIns="0">
+            <a:spAutoFit/>
+          </a:bodyPr>
+          <a:lstStyle/>
+          <a:p>
+            <a:pPr algn="ctr">
+              <a:lnSpc>
+                <a:spcPct val="105000"/>
+              </a:lnSpc>
+              <a:spcBef>
+                <a:spcPts val="0"/>
+              </a:spcBef>
+              <a:spcAft>
+                <a:spcPts val="200"/>
+              </a:spcAft>
+            </a:pPr>
+            <a:r>
+              <a:rPr sz="900" b="1" i="0">
                 <a:solidFill>
                   <a:srgbClr val="FEFFFF"/>
                 </a:solidFill>
                 <a:latin typeface="Montserrat Medium"/>
               </a:rPr>
-              <a:t>46.6</a:t>
-            </a:r>
-          </a:p>
-        </p:txBody>
-      </p:sp>
-      <p:sp>
-        <p:nvSpPr>
-          <p:cNvPr id="15" name="Rectangle 14"/>
+              <a:t>[eng.]</a:t>
+            </a:r>
+          </a:p>
+        </p:txBody>
+      </p:sp>
+      <p:sp>
+        <p:nvSpPr>
+          <p:cNvPr id="28" name="Oval 27"/>
           <p:cNvSpPr/>
           <p:nvPr/>
         </p:nvSpPr>
         <p:spPr>
           <a:xfrm>
-            <a:off x="502920" y="5621243"/>
-            <a:ext cx="4270071" cy="413796"/>
-          </a:xfrm>
-          <a:prstGeom prst="rect">
+            <a:off x="7652308" y="3346704"/>
+            <a:ext cx="109728" cy="109728"/>
+          </a:xfrm>
+          <a:prstGeom prst="ellipse">
             <a:avLst/>
           </a:prstGeom>
           <a:solidFill>
-            <a:srgbClr val="0728A3"/>
+            <a:srgbClr val="B7791F"/>
           </a:solidFill>
-          <a:ln w="12700">
+          <a:ln w="9525">
             <a:solidFill>
               <a:srgbClr val="FEFFFF"/>
             </a:solidFill>
@@ -9264,14 +11096,62 @@
       </p:sp>
       <p:sp>
         <p:nvSpPr>
-          <p:cNvPr id="16" name="TextBox 15"/>
+          <p:cNvPr id="29" name="Rounded Rectangle 28"/>
+          <p:cNvSpPr/>
+          <p:nvPr/>
+        </p:nvSpPr>
+        <p:spPr>
+          <a:xfrm>
+            <a:off x="4383938" y="4334256"/>
+            <a:ext cx="3423818" cy="868680"/>
+          </a:xfrm>
+          <a:prstGeom prst="roundRect">
+            <a:avLst>
+              <a:gd name="adj" fmla="val 8000"/>
+            </a:avLst>
+          </a:prstGeom>
+          <a:solidFill>
+            <a:srgbClr val="D6EEF5"/>
+          </a:solidFill>
+          <a:ln w="9525">
+            <a:solidFill>
+              <a:srgbClr val="2E6FD6"/>
+            </a:solidFill>
+          </a:ln>
+          <a:effectLst/>
+        </p:spPr>
+        <p:style>
+          <a:lnRef idx="1">
+            <a:schemeClr val="accent1"/>
+          </a:lnRef>
+          <a:fillRef idx="3">
+            <a:schemeClr val="accent1"/>
+          </a:fillRef>
+          <a:effectRef idx="2">
+            <a:schemeClr val="accent1"/>
+          </a:effectRef>
+          <a:fontRef idx="minor">
+            <a:schemeClr val="lt1"/>
+          </a:fontRef>
+        </p:style>
+        <p:txBody>
+          <a:bodyPr rtlCol="0" anchor="ctr"/>
+          <a:lstStyle/>
+          <a:p>
+            <a:pPr algn="ctr"/>
+          </a:p>
+        </p:txBody>
+      </p:sp>
+      <p:sp>
+        <p:nvSpPr>
+          <p:cNvPr id="30" name="TextBox 29"/>
           <p:cNvSpPr txBox="1"/>
           <p:nvPr/>
         </p:nvSpPr>
         <p:spPr>
           <a:xfrm>
-            <a:off x="502920" y="5621243"/>
-            <a:ext cx="4270071" cy="413796"/>
+            <a:off x="4438802" y="4334256"/>
+            <a:ext cx="3314090" cy="411480"/>
           </a:xfrm>
           <a:prstGeom prst="rect">
             <a:avLst/>
@@ -9286,7 +11166,7 @@
           <a:p>
             <a:pPr algn="ctr">
               <a:lnSpc>
-                <a:spcPct val="105000"/>
+                <a:spcPct val="100000"/>
               </a:lnSpc>
               <a:spcBef>
                 <a:spcPts val="0"/>
@@ -9296,27 +11176,27 @@
               </a:spcAft>
             </a:pPr>
             <a:r>
-              <a:rPr sz="1000" b="1" i="0">
-                <a:solidFill>
-                  <a:srgbClr val="FEFFFF"/>
-                </a:solidFill>
-                <a:latin typeface="Montserrat Medium"/>
-              </a:rPr>
-              <a:t>6.7</a:t>
-            </a:r>
-          </a:p>
-        </p:txBody>
-      </p:sp>
-      <p:sp>
-        <p:nvSpPr>
-          <p:cNvPr id="17" name="TextBox 16"/>
+              <a:rPr sz="950" b="1" i="0">
+                <a:solidFill>
+                  <a:srgbClr val="03045E"/>
+                </a:solidFill>
+                <a:latin typeface="Montserrat"/>
+              </a:rPr>
+              <a:t>Avg engagement cost</a:t>
+            </a:r>
+          </a:p>
+        </p:txBody>
+      </p:sp>
+      <p:sp>
+        <p:nvSpPr>
+          <p:cNvPr id="31" name="TextBox 30"/>
           <p:cNvSpPr txBox="1"/>
           <p:nvPr/>
         </p:nvSpPr>
         <p:spPr>
           <a:xfrm>
-            <a:off x="502920" y="6080760"/>
-            <a:ext cx="4270071" cy="274320"/>
+            <a:off x="4438802" y="4745736"/>
+            <a:ext cx="3314090" cy="182880"/>
           </a:xfrm>
           <a:prstGeom prst="rect">
             <a:avLst/>
@@ -9324,7 +11204,7 @@
           <a:noFill/>
         </p:spPr>
         <p:txBody>
-          <a:bodyPr wrap="square" anchor="t" lIns="0" rIns="0" tIns="0" bIns="0">
+          <a:bodyPr wrap="square" anchor="ctr" lIns="0" rIns="0" tIns="0" bIns="0">
             <a:spAutoFit/>
           </a:bodyPr>
           <a:lstStyle/>
@@ -9341,27 +11221,73 @@
               </a:spcAft>
             </a:pPr>
             <a:r>
-              <a:rPr sz="1050" b="1" i="0">
-                <a:solidFill>
-                  <a:srgbClr val="03045E"/>
-                </a:solidFill>
-                <a:latin typeface="Montserrat"/>
-              </a:rPr>
-              <a:t>[Region A]</a:t>
-            </a:r>
-          </a:p>
-        </p:txBody>
-      </p:sp>
-      <p:sp>
-        <p:nvSpPr>
-          <p:cNvPr id="18" name="TextBox 17"/>
+              <a:rPr sz="750" b="0" i="1">
+                <a:solidFill>
+                  <a:srgbClr val="0728A3"/>
+                </a:solidFill>
+                <a:latin typeface="Montserrat Medium"/>
+              </a:rPr>
+              <a:t>= weekly rate × duration</a:t>
+            </a:r>
+          </a:p>
+        </p:txBody>
+      </p:sp>
+      <p:sp>
+        <p:nvSpPr>
+          <p:cNvPr id="32" name="Rounded Rectangle 31"/>
+          <p:cNvSpPr/>
+          <p:nvPr/>
+        </p:nvSpPr>
+        <p:spPr>
+          <a:xfrm>
+            <a:off x="4438802" y="4910328"/>
+            <a:ext cx="3314090" cy="274320"/>
+          </a:xfrm>
+          <a:prstGeom prst="roundRect">
+            <a:avLst>
+              <a:gd name="adj" fmla="val 12000"/>
+            </a:avLst>
+          </a:prstGeom>
+          <a:solidFill>
+            <a:srgbClr val="020462"/>
+          </a:solidFill>
+          <a:ln>
+            <a:noFill/>
+          </a:ln>
+          <a:effectLst/>
+        </p:spPr>
+        <p:style>
+          <a:lnRef idx="1">
+            <a:schemeClr val="accent1"/>
+          </a:lnRef>
+          <a:fillRef idx="3">
+            <a:schemeClr val="accent1"/>
+          </a:fillRef>
+          <a:effectRef idx="2">
+            <a:schemeClr val="accent1"/>
+          </a:effectRef>
+          <a:fontRef idx="minor">
+            <a:schemeClr val="lt1"/>
+          </a:fontRef>
+        </p:style>
+        <p:txBody>
+          <a:bodyPr rtlCol="0" anchor="ctr"/>
+          <a:lstStyle/>
+          <a:p>
+            <a:pPr algn="ctr"/>
+          </a:p>
+        </p:txBody>
+      </p:sp>
+      <p:sp>
+        <p:nvSpPr>
+          <p:cNvPr id="33" name="TextBox 32"/>
           <p:cNvSpPr txBox="1"/>
           <p:nvPr/>
         </p:nvSpPr>
         <p:spPr>
           <a:xfrm>
-            <a:off x="4882719" y="2286000"/>
-            <a:ext cx="1674380" cy="411480"/>
+            <a:off x="4438802" y="4910328"/>
+            <a:ext cx="3314090" cy="274320"/>
           </a:xfrm>
           <a:prstGeom prst="rect">
             <a:avLst/>
@@ -9369,7 +11295,7 @@
           <a:noFill/>
         </p:spPr>
         <p:txBody>
-          <a:bodyPr wrap="square" anchor="t" lIns="0" rIns="0" tIns="0" bIns="0">
+          <a:bodyPr wrap="square" anchor="ctr" lIns="0" rIns="0" tIns="0" bIns="0">
             <a:spAutoFit/>
           </a:bodyPr>
           <a:lstStyle/>
@@ -9386,57 +11312,35 @@
               </a:spcAft>
             </a:pPr>
             <a:r>
-              <a:rPr sz="1200" b="1" i="0">
-                <a:solidFill>
-                  <a:srgbClr val="03045E"/>
+              <a:rPr sz="900" b="1" i="0">
+                <a:solidFill>
+                  <a:srgbClr val="FEFFFF"/>
                 </a:solidFill>
                 <a:latin typeface="Montserrat Medium"/>
               </a:rPr>
-              <a:t>20.8</a:t>
-            </a:r>
-          </a:p>
-          <a:p>
-            <a:pPr algn="ctr">
-              <a:lnSpc>
-                <a:spcPct val="105000"/>
-              </a:lnSpc>
-              <a:spcBef>
-                <a:spcPts val="0"/>
-              </a:spcBef>
-              <a:spcAft>
-                <a:spcPts val="200"/>
-              </a:spcAft>
-            </a:pPr>
-            <a:r>
-              <a:rPr sz="1000" b="0" i="1">
-                <a:solidFill>
-                  <a:srgbClr val="8A8A8A"/>
-                </a:solidFill>
-                <a:latin typeface="Montserrat Medium"/>
-              </a:rPr>
-              <a:t>(24%)</a:t>
-            </a:r>
-          </a:p>
-        </p:txBody>
-      </p:sp>
-      <p:sp>
-        <p:nvSpPr>
-          <p:cNvPr id="19" name="Rectangle 18"/>
+              <a:t>[$/eng.]</a:t>
+            </a:r>
+          </a:p>
+        </p:txBody>
+      </p:sp>
+      <p:sp>
+        <p:nvSpPr>
+          <p:cNvPr id="34" name="Oval 33"/>
           <p:cNvSpPr/>
           <p:nvPr/>
         </p:nvSpPr>
         <p:spPr>
           <a:xfrm>
-            <a:off x="4882719" y="2743200"/>
-            <a:ext cx="1674380" cy="1136395"/>
-          </a:xfrm>
-          <a:prstGeom prst="rect">
+            <a:off x="7652308" y="4379976"/>
+            <a:ext cx="109728" cy="109728"/>
+          </a:xfrm>
+          <a:prstGeom prst="ellipse">
             <a:avLst/>
           </a:prstGeom>
           <a:solidFill>
-            <a:srgbClr val="03045E"/>
+            <a:srgbClr val="B7791F"/>
           </a:solidFill>
-          <a:ln w="12700">
+          <a:ln w="9525">
             <a:solidFill>
               <a:srgbClr val="FEFFFF"/>
             </a:solidFill>
@@ -9467,14 +11371,107 @@
       </p:sp>
       <p:sp>
         <p:nvSpPr>
-          <p:cNvPr id="20" name="TextBox 19"/>
+          <p:cNvPr id="35" name="TextBox 34"/>
           <p:cNvSpPr txBox="1"/>
           <p:nvPr/>
         </p:nvSpPr>
         <p:spPr>
           <a:xfrm>
-            <a:off x="4882719" y="2743200"/>
-            <a:ext cx="1674380" cy="1136395"/>
+            <a:off x="8264956" y="1901952"/>
+            <a:ext cx="3423818" cy="320040"/>
+          </a:xfrm>
+          <a:prstGeom prst="rect">
+            <a:avLst/>
+          </a:prstGeom>
+          <a:noFill/>
+        </p:spPr>
+        <p:txBody>
+          <a:bodyPr wrap="square" anchor="t" lIns="0" rIns="0" tIns="0" bIns="0">
+            <a:spAutoFit/>
+          </a:bodyPr>
+          <a:lstStyle/>
+          <a:p>
+            <a:pPr algn="ctr">
+              <a:lnSpc>
+                <a:spcPct val="105000"/>
+              </a:lnSpc>
+              <a:spcBef>
+                <a:spcPts val="0"/>
+              </a:spcBef>
+              <a:spcAft>
+                <a:spcPts val="200"/>
+              </a:spcAft>
+            </a:pPr>
+            <a:r>
+              <a:rPr sz="1050" b="1" i="1">
+                <a:solidFill>
+                  <a:srgbClr val="03045E"/>
+                </a:solidFill>
+                <a:latin typeface="Montserrat"/>
+              </a:rPr>
+              <a:t>Drivers (leaf assumptions)</a:t>
+            </a:r>
+          </a:p>
+        </p:txBody>
+      </p:sp>
+      <p:sp>
+        <p:nvSpPr>
+          <p:cNvPr id="36" name="Rounded Rectangle 35"/>
+          <p:cNvSpPr/>
+          <p:nvPr/>
+        </p:nvSpPr>
+        <p:spPr>
+          <a:xfrm>
+            <a:off x="8264956" y="2286000"/>
+            <a:ext cx="3423818" cy="518160"/>
+          </a:xfrm>
+          <a:prstGeom prst="roundRect">
+            <a:avLst>
+              <a:gd name="adj" fmla="val 8000"/>
+            </a:avLst>
+          </a:prstGeom>
+          <a:solidFill>
+            <a:srgbClr val="D6EEF5"/>
+          </a:solidFill>
+          <a:ln w="9525">
+            <a:solidFill>
+              <a:srgbClr val="2E6FD6"/>
+            </a:solidFill>
+          </a:ln>
+          <a:effectLst/>
+        </p:spPr>
+        <p:style>
+          <a:lnRef idx="1">
+            <a:schemeClr val="accent1"/>
+          </a:lnRef>
+          <a:fillRef idx="3">
+            <a:schemeClr val="accent1"/>
+          </a:fillRef>
+          <a:effectRef idx="2">
+            <a:schemeClr val="accent1"/>
+          </a:effectRef>
+          <a:fontRef idx="minor">
+            <a:schemeClr val="lt1"/>
+          </a:fontRef>
+        </p:style>
+        <p:txBody>
+          <a:bodyPr rtlCol="0" anchor="ctr"/>
+          <a:lstStyle/>
+          <a:p>
+            <a:pPr algn="ctr"/>
+          </a:p>
+        </p:txBody>
+      </p:sp>
+      <p:sp>
+        <p:nvSpPr>
+          <p:cNvPr id="37" name="TextBox 36"/>
+          <p:cNvSpPr txBox="1"/>
+          <p:nvPr/>
+        </p:nvSpPr>
+        <p:spPr>
+          <a:xfrm>
+            <a:off x="8319820" y="2286000"/>
+            <a:ext cx="3314090" cy="331623"/>
           </a:xfrm>
           <a:prstGeom prst="rect">
             <a:avLst/>
@@ -9489,6 +11486,97 @@
           <a:p>
             <a:pPr algn="ctr">
               <a:lnSpc>
+                <a:spcPct val="100000"/>
+              </a:lnSpc>
+              <a:spcBef>
+                <a:spcPts val="0"/>
+              </a:spcBef>
+              <a:spcAft>
+                <a:spcPts val="200"/>
+              </a:spcAft>
+            </a:pPr>
+            <a:r>
+              <a:rPr sz="950" b="1" i="0">
+                <a:solidFill>
+                  <a:srgbClr val="03045E"/>
+                </a:solidFill>
+                <a:latin typeface="Montserrat"/>
+              </a:rPr>
+              <a:t># of deals</a:t>
+            </a:r>
+          </a:p>
+        </p:txBody>
+      </p:sp>
+      <p:sp>
+        <p:nvSpPr>
+          <p:cNvPr id="38" name="Rounded Rectangle 37"/>
+          <p:cNvSpPr/>
+          <p:nvPr/>
+        </p:nvSpPr>
+        <p:spPr>
+          <a:xfrm>
+            <a:off x="8319820" y="2599335"/>
+            <a:ext cx="3314090" cy="186537"/>
+          </a:xfrm>
+          <a:prstGeom prst="roundRect">
+            <a:avLst>
+              <a:gd name="adj" fmla="val 12000"/>
+            </a:avLst>
+          </a:prstGeom>
+          <a:solidFill>
+            <a:srgbClr val="020462"/>
+          </a:solidFill>
+          <a:ln>
+            <a:noFill/>
+          </a:ln>
+          <a:effectLst/>
+        </p:spPr>
+        <p:style>
+          <a:lnRef idx="1">
+            <a:schemeClr val="accent1"/>
+          </a:lnRef>
+          <a:fillRef idx="3">
+            <a:schemeClr val="accent1"/>
+          </a:fillRef>
+          <a:effectRef idx="2">
+            <a:schemeClr val="accent1"/>
+          </a:effectRef>
+          <a:fontRef idx="minor">
+            <a:schemeClr val="lt1"/>
+          </a:fontRef>
+        </p:style>
+        <p:txBody>
+          <a:bodyPr rtlCol="0" anchor="ctr"/>
+          <a:lstStyle/>
+          <a:p>
+            <a:pPr algn="ctr"/>
+          </a:p>
+        </p:txBody>
+      </p:sp>
+      <p:sp>
+        <p:nvSpPr>
+          <p:cNvPr id="39" name="TextBox 38"/>
+          <p:cNvSpPr txBox="1"/>
+          <p:nvPr/>
+        </p:nvSpPr>
+        <p:spPr>
+          <a:xfrm>
+            <a:off x="8319820" y="2599335"/>
+            <a:ext cx="3314090" cy="186537"/>
+          </a:xfrm>
+          <a:prstGeom prst="rect">
+            <a:avLst/>
+          </a:prstGeom>
+          <a:noFill/>
+        </p:spPr>
+        <p:txBody>
+          <a:bodyPr wrap="square" anchor="ctr" lIns="0" rIns="0" tIns="0" bIns="0">
+            <a:spAutoFit/>
+          </a:bodyPr>
+          <a:lstStyle/>
+          <a:p>
+            <a:pPr algn="ctr">
+              <a:lnSpc>
                 <a:spcPct val="105000"/>
               </a:lnSpc>
               <a:spcBef>
@@ -9499,35 +11587,35 @@
               </a:spcAft>
             </a:pPr>
             <a:r>
-              <a:rPr sz="1000" b="1" i="0">
+              <a:rPr sz="900" b="1" i="0">
                 <a:solidFill>
                   <a:srgbClr val="FEFFFF"/>
                 </a:solidFill>
                 <a:latin typeface="Montserrat Medium"/>
               </a:rPr>
-              <a:t>18.4</a:t>
-            </a:r>
-          </a:p>
-        </p:txBody>
-      </p:sp>
-      <p:sp>
-        <p:nvSpPr>
-          <p:cNvPr id="21" name="Rectangle 20"/>
+              <a:t>[deals]</a:t>
+            </a:r>
+          </a:p>
+        </p:txBody>
+      </p:sp>
+      <p:sp>
+        <p:nvSpPr>
+          <p:cNvPr id="40" name="Oval 39"/>
           <p:cNvSpPr/>
           <p:nvPr/>
         </p:nvSpPr>
         <p:spPr>
           <a:xfrm>
-            <a:off x="4882719" y="3879595"/>
-            <a:ext cx="1674380" cy="148225"/>
-          </a:xfrm>
-          <a:prstGeom prst="rect">
+            <a:off x="11533326" y="2331720"/>
+            <a:ext cx="109728" cy="109728"/>
+          </a:xfrm>
+          <a:prstGeom prst="ellipse">
             <a:avLst/>
           </a:prstGeom>
           <a:solidFill>
-            <a:srgbClr val="0728A3"/>
+            <a:srgbClr val="B7791F"/>
           </a:solidFill>
-          <a:ln w="12700">
+          <a:ln w="9525">
             <a:solidFill>
               <a:srgbClr val="FEFFFF"/>
             </a:solidFill>
@@ -9558,14 +11646,62 @@
       </p:sp>
       <p:sp>
         <p:nvSpPr>
-          <p:cNvPr id="22" name="TextBox 21"/>
+          <p:cNvPr id="41" name="Rounded Rectangle 40"/>
+          <p:cNvSpPr/>
+          <p:nvPr/>
+        </p:nvSpPr>
+        <p:spPr>
+          <a:xfrm>
+            <a:off x="8264956" y="2968752"/>
+            <a:ext cx="3423818" cy="518160"/>
+          </a:xfrm>
+          <a:prstGeom prst="roundRect">
+            <a:avLst>
+              <a:gd name="adj" fmla="val 8000"/>
+            </a:avLst>
+          </a:prstGeom>
+          <a:solidFill>
+            <a:srgbClr val="D6EEF5"/>
+          </a:solidFill>
+          <a:ln w="9525">
+            <a:solidFill>
+              <a:srgbClr val="2E6FD6"/>
+            </a:solidFill>
+          </a:ln>
+          <a:effectLst/>
+        </p:spPr>
+        <p:style>
+          <a:lnRef idx="1">
+            <a:schemeClr val="accent1"/>
+          </a:lnRef>
+          <a:fillRef idx="3">
+            <a:schemeClr val="accent1"/>
+          </a:fillRef>
+          <a:effectRef idx="2">
+            <a:schemeClr val="accent1"/>
+          </a:effectRef>
+          <a:fontRef idx="minor">
+            <a:schemeClr val="lt1"/>
+          </a:fontRef>
+        </p:style>
+        <p:txBody>
+          <a:bodyPr rtlCol="0" anchor="ctr"/>
+          <a:lstStyle/>
+          <a:p>
+            <a:pPr algn="ctr"/>
+          </a:p>
+        </p:txBody>
+      </p:sp>
+      <p:sp>
+        <p:nvSpPr>
+          <p:cNvPr id="42" name="TextBox 41"/>
           <p:cNvSpPr txBox="1"/>
           <p:nvPr/>
         </p:nvSpPr>
         <p:spPr>
           <a:xfrm>
-            <a:off x="4882719" y="3879595"/>
-            <a:ext cx="1674380" cy="148225"/>
+            <a:off x="8319820" y="2968752"/>
+            <a:ext cx="3314090" cy="331623"/>
           </a:xfrm>
           <a:prstGeom prst="rect">
             <a:avLst/>
@@ -9580,7 +11716,7 @@
           <a:p>
             <a:pPr algn="ctr">
               <a:lnSpc>
-                <a:spcPct val="105000"/>
+                <a:spcPct val="100000"/>
               </a:lnSpc>
               <a:spcBef>
                 <a:spcPts val="0"/>
@@ -9590,27 +11726,73 @@
               </a:spcAft>
             </a:pPr>
             <a:r>
-              <a:rPr sz="1000" b="1" i="0">
-                <a:solidFill>
-                  <a:srgbClr val="FEFFFF"/>
-                </a:solidFill>
-                <a:latin typeface="Montserrat Medium"/>
-              </a:rPr>
-              <a:t>2.4</a:t>
-            </a:r>
-          </a:p>
-        </p:txBody>
-      </p:sp>
-      <p:sp>
-        <p:nvSpPr>
-          <p:cNvPr id="23" name="TextBox 22"/>
+              <a:rPr sz="950" b="1" i="0">
+                <a:solidFill>
+                  <a:srgbClr val="03045E"/>
+                </a:solidFill>
+                <a:latin typeface="Montserrat"/>
+              </a:rPr>
+              <a:t>Interested parties</a:t>
+            </a:r>
+          </a:p>
+        </p:txBody>
+      </p:sp>
+      <p:sp>
+        <p:nvSpPr>
+          <p:cNvPr id="43" name="Rounded Rectangle 42"/>
+          <p:cNvSpPr/>
+          <p:nvPr/>
+        </p:nvSpPr>
+        <p:spPr>
+          <a:xfrm>
+            <a:off x="8319820" y="3282087"/>
+            <a:ext cx="3314090" cy="186537"/>
+          </a:xfrm>
+          <a:prstGeom prst="roundRect">
+            <a:avLst>
+              <a:gd name="adj" fmla="val 12000"/>
+            </a:avLst>
+          </a:prstGeom>
+          <a:solidFill>
+            <a:srgbClr val="020462"/>
+          </a:solidFill>
+          <a:ln>
+            <a:noFill/>
+          </a:ln>
+          <a:effectLst/>
+        </p:spPr>
+        <p:style>
+          <a:lnRef idx="1">
+            <a:schemeClr val="accent1"/>
+          </a:lnRef>
+          <a:fillRef idx="3">
+            <a:schemeClr val="accent1"/>
+          </a:fillRef>
+          <a:effectRef idx="2">
+            <a:schemeClr val="accent1"/>
+          </a:effectRef>
+          <a:fontRef idx="minor">
+            <a:schemeClr val="lt1"/>
+          </a:fontRef>
+        </p:style>
+        <p:txBody>
+          <a:bodyPr rtlCol="0" anchor="ctr"/>
+          <a:lstStyle/>
+          <a:p>
+            <a:pPr algn="ctr"/>
+          </a:p>
+        </p:txBody>
+      </p:sp>
+      <p:sp>
+        <p:nvSpPr>
+          <p:cNvPr id="44" name="TextBox 43"/>
           <p:cNvSpPr txBox="1"/>
           <p:nvPr/>
         </p:nvSpPr>
         <p:spPr>
           <a:xfrm>
-            <a:off x="4882719" y="6080760"/>
-            <a:ext cx="1674380" cy="274320"/>
+            <a:off x="8319820" y="3282087"/>
+            <a:ext cx="3314090" cy="186537"/>
           </a:xfrm>
           <a:prstGeom prst="rect">
             <a:avLst/>
@@ -9618,7 +11800,7 @@
           <a:noFill/>
         </p:spPr>
         <p:txBody>
-          <a:bodyPr wrap="square" anchor="t" lIns="0" rIns="0" tIns="0" bIns="0">
+          <a:bodyPr wrap="square" anchor="ctr" lIns="0" rIns="0" tIns="0" bIns="0">
             <a:spAutoFit/>
           </a:bodyPr>
           <a:lstStyle/>
@@ -9635,102 +11817,35 @@
               </a:spcAft>
             </a:pPr>
             <a:r>
-              <a:rPr sz="1050" b="1" i="0">
-                <a:solidFill>
-                  <a:srgbClr val="03045E"/>
-                </a:solidFill>
-                <a:latin typeface="Montserrat"/>
-              </a:rPr>
-              <a:t>[Region B]</a:t>
-            </a:r>
-          </a:p>
-        </p:txBody>
-      </p:sp>
-      <p:sp>
-        <p:nvSpPr>
-          <p:cNvPr id="24" name="TextBox 23"/>
-          <p:cNvSpPr txBox="1"/>
-          <p:nvPr/>
-        </p:nvSpPr>
-        <p:spPr>
-          <a:xfrm>
-            <a:off x="6666827" y="2286000"/>
-            <a:ext cx="1105571" cy="411480"/>
-          </a:xfrm>
-          <a:prstGeom prst="rect">
-            <a:avLst/>
-          </a:prstGeom>
-          <a:noFill/>
-        </p:spPr>
-        <p:txBody>
-          <a:bodyPr wrap="square" anchor="t" lIns="0" rIns="0" tIns="0" bIns="0">
-            <a:spAutoFit/>
-          </a:bodyPr>
-          <a:lstStyle/>
-          <a:p>
-            <a:pPr algn="ctr">
-              <a:lnSpc>
-                <a:spcPct val="105000"/>
-              </a:lnSpc>
-              <a:spcBef>
-                <a:spcPts val="0"/>
-              </a:spcBef>
-              <a:spcAft>
-                <a:spcPts val="200"/>
-              </a:spcAft>
-            </a:pPr>
-            <a:r>
-              <a:rPr sz="1200" b="1" i="0">
-                <a:solidFill>
-                  <a:srgbClr val="03045E"/>
+              <a:rPr sz="900" b="1" i="0">
+                <a:solidFill>
+                  <a:srgbClr val="FEFFFF"/>
                 </a:solidFill>
                 <a:latin typeface="Montserrat Medium"/>
               </a:rPr>
-              <a:t>13.8</a:t>
-            </a:r>
-          </a:p>
-          <a:p>
-            <a:pPr algn="ctr">
-              <a:lnSpc>
-                <a:spcPct val="105000"/>
-              </a:lnSpc>
-              <a:spcBef>
-                <a:spcPts val="0"/>
-              </a:spcBef>
-              <a:spcAft>
-                <a:spcPts val="200"/>
-              </a:spcAft>
-            </a:pPr>
-            <a:r>
-              <a:rPr sz="1000" b="0" i="1">
-                <a:solidFill>
-                  <a:srgbClr val="8A8A8A"/>
-                </a:solidFill>
-                <a:latin typeface="Montserrat Medium"/>
-              </a:rPr>
-              <a:t>(16%)</a:t>
-            </a:r>
-          </a:p>
-        </p:txBody>
-      </p:sp>
-      <p:sp>
-        <p:nvSpPr>
-          <p:cNvPr id="25" name="Rectangle 24"/>
+              <a:t>[/deal]</a:t>
+            </a:r>
+          </a:p>
+        </p:txBody>
+      </p:sp>
+      <p:sp>
+        <p:nvSpPr>
+          <p:cNvPr id="45" name="Oval 44"/>
           <p:cNvSpPr/>
           <p:nvPr/>
         </p:nvSpPr>
         <p:spPr>
           <a:xfrm>
-            <a:off x="6666827" y="2743200"/>
-            <a:ext cx="1105571" cy="772007"/>
-          </a:xfrm>
-          <a:prstGeom prst="rect">
+            <a:off x="11533326" y="3014472"/>
+            <a:ext cx="109728" cy="109728"/>
+          </a:xfrm>
+          <a:prstGeom prst="ellipse">
             <a:avLst/>
           </a:prstGeom>
           <a:solidFill>
-            <a:srgbClr val="03045E"/>
+            <a:srgbClr val="9B1C1C"/>
           </a:solidFill>
-          <a:ln w="12700">
+          <a:ln w="9525">
             <a:solidFill>
               <a:srgbClr val="FEFFFF"/>
             </a:solidFill>
@@ -9761,14 +11876,62 @@
       </p:sp>
       <p:sp>
         <p:nvSpPr>
-          <p:cNvPr id="26" name="TextBox 25"/>
+          <p:cNvPr id="46" name="Rounded Rectangle 45"/>
+          <p:cNvSpPr/>
+          <p:nvPr/>
+        </p:nvSpPr>
+        <p:spPr>
+          <a:xfrm>
+            <a:off x="8264956" y="3651504"/>
+            <a:ext cx="3423818" cy="518160"/>
+          </a:xfrm>
+          <a:prstGeom prst="roundRect">
+            <a:avLst>
+              <a:gd name="adj" fmla="val 8000"/>
+            </a:avLst>
+          </a:prstGeom>
+          <a:solidFill>
+            <a:srgbClr val="D6EEF5"/>
+          </a:solidFill>
+          <a:ln w="9525">
+            <a:solidFill>
+              <a:srgbClr val="2E6FD6"/>
+            </a:solidFill>
+          </a:ln>
+          <a:effectLst/>
+        </p:spPr>
+        <p:style>
+          <a:lnRef idx="1">
+            <a:schemeClr val="accent1"/>
+          </a:lnRef>
+          <a:fillRef idx="3">
+            <a:schemeClr val="accent1"/>
+          </a:fillRef>
+          <a:effectRef idx="2">
+            <a:schemeClr val="accent1"/>
+          </a:effectRef>
+          <a:fontRef idx="minor">
+            <a:schemeClr val="lt1"/>
+          </a:fontRef>
+        </p:style>
+        <p:txBody>
+          <a:bodyPr rtlCol="0" anchor="ctr"/>
+          <a:lstStyle/>
+          <a:p>
+            <a:pPr algn="ctr"/>
+          </a:p>
+        </p:txBody>
+      </p:sp>
+      <p:sp>
+        <p:nvSpPr>
+          <p:cNvPr id="47" name="TextBox 46"/>
           <p:cNvSpPr txBox="1"/>
           <p:nvPr/>
         </p:nvSpPr>
         <p:spPr>
           <a:xfrm>
-            <a:off x="6666827" y="2743200"/>
-            <a:ext cx="1105571" cy="772007"/>
+            <a:off x="8319820" y="3651504"/>
+            <a:ext cx="3314090" cy="331623"/>
           </a:xfrm>
           <a:prstGeom prst="rect">
             <a:avLst/>
@@ -9783,6 +11946,97 @@
           <a:p>
             <a:pPr algn="ctr">
               <a:lnSpc>
+                <a:spcPct val="100000"/>
+              </a:lnSpc>
+              <a:spcBef>
+                <a:spcPts val="0"/>
+              </a:spcBef>
+              <a:spcAft>
+                <a:spcPts val="200"/>
+              </a:spcAft>
+            </a:pPr>
+            <a:r>
+              <a:rPr sz="950" b="1" i="0">
+                <a:solidFill>
+                  <a:srgbClr val="03045E"/>
+                </a:solidFill>
+                <a:latin typeface="Montserrat"/>
+              </a:rPr>
+              <a:t>Penetration rate</a:t>
+            </a:r>
+          </a:p>
+        </p:txBody>
+      </p:sp>
+      <p:sp>
+        <p:nvSpPr>
+          <p:cNvPr id="48" name="Rounded Rectangle 47"/>
+          <p:cNvSpPr/>
+          <p:nvPr/>
+        </p:nvSpPr>
+        <p:spPr>
+          <a:xfrm>
+            <a:off x="8319820" y="3964839"/>
+            <a:ext cx="3314090" cy="186537"/>
+          </a:xfrm>
+          <a:prstGeom prst="roundRect">
+            <a:avLst>
+              <a:gd name="adj" fmla="val 12000"/>
+            </a:avLst>
+          </a:prstGeom>
+          <a:solidFill>
+            <a:srgbClr val="020462"/>
+          </a:solidFill>
+          <a:ln>
+            <a:noFill/>
+          </a:ln>
+          <a:effectLst/>
+        </p:spPr>
+        <p:style>
+          <a:lnRef idx="1">
+            <a:schemeClr val="accent1"/>
+          </a:lnRef>
+          <a:fillRef idx="3">
+            <a:schemeClr val="accent1"/>
+          </a:fillRef>
+          <a:effectRef idx="2">
+            <a:schemeClr val="accent1"/>
+          </a:effectRef>
+          <a:fontRef idx="minor">
+            <a:schemeClr val="lt1"/>
+          </a:fontRef>
+        </p:style>
+        <p:txBody>
+          <a:bodyPr rtlCol="0" anchor="ctr"/>
+          <a:lstStyle/>
+          <a:p>
+            <a:pPr algn="ctr"/>
+          </a:p>
+        </p:txBody>
+      </p:sp>
+      <p:sp>
+        <p:nvSpPr>
+          <p:cNvPr id="49" name="TextBox 48"/>
+          <p:cNvSpPr txBox="1"/>
+          <p:nvPr/>
+        </p:nvSpPr>
+        <p:spPr>
+          <a:xfrm>
+            <a:off x="8319820" y="3964839"/>
+            <a:ext cx="3314090" cy="186537"/>
+          </a:xfrm>
+          <a:prstGeom prst="rect">
+            <a:avLst/>
+          </a:prstGeom>
+          <a:noFill/>
+        </p:spPr>
+        <p:txBody>
+          <a:bodyPr wrap="square" anchor="ctr" lIns="0" rIns="0" tIns="0" bIns="0">
+            <a:spAutoFit/>
+          </a:bodyPr>
+          <a:lstStyle/>
+          <a:p>
+            <a:pPr algn="ctr">
+              <a:lnSpc>
                 <a:spcPct val="105000"/>
               </a:lnSpc>
               <a:spcBef>
@@ -9793,35 +12047,35 @@
               </a:spcAft>
             </a:pPr>
             <a:r>
-              <a:rPr sz="1000" b="1" i="0">
+              <a:rPr sz="900" b="1" i="0">
                 <a:solidFill>
                   <a:srgbClr val="FEFFFF"/>
                 </a:solidFill>
                 <a:latin typeface="Montserrat Medium"/>
               </a:rPr>
-              <a:t>12.5</a:t>
-            </a:r>
-          </a:p>
-        </p:txBody>
-      </p:sp>
-      <p:sp>
-        <p:nvSpPr>
-          <p:cNvPr id="27" name="Rectangle 26"/>
+              <a:t>[%]</a:t>
+            </a:r>
+          </a:p>
+        </p:txBody>
+      </p:sp>
+      <p:sp>
+        <p:nvSpPr>
+          <p:cNvPr id="50" name="Oval 49"/>
           <p:cNvSpPr/>
           <p:nvPr/>
         </p:nvSpPr>
         <p:spPr>
           <a:xfrm>
-            <a:off x="6666827" y="3515207"/>
-            <a:ext cx="1105571" cy="80288"/>
-          </a:xfrm>
-          <a:prstGeom prst="rect">
+            <a:off x="11533326" y="3697224"/>
+            <a:ext cx="109728" cy="109728"/>
+          </a:xfrm>
+          <a:prstGeom prst="ellipse">
             <a:avLst/>
           </a:prstGeom>
           <a:solidFill>
-            <a:srgbClr val="0728A3"/>
+            <a:srgbClr val="9B1C1C"/>
           </a:solidFill>
-          <a:ln w="12700">
+          <a:ln w="9525">
             <a:solidFill>
               <a:srgbClr val="FEFFFF"/>
             </a:solidFill>
@@ -9852,14 +12106,62 @@
       </p:sp>
       <p:sp>
         <p:nvSpPr>
-          <p:cNvPr id="28" name="TextBox 27"/>
+          <p:cNvPr id="51" name="Rounded Rectangle 50"/>
+          <p:cNvSpPr/>
+          <p:nvPr/>
+        </p:nvSpPr>
+        <p:spPr>
+          <a:xfrm>
+            <a:off x="8264956" y="4334256"/>
+            <a:ext cx="3423818" cy="518160"/>
+          </a:xfrm>
+          <a:prstGeom prst="roundRect">
+            <a:avLst>
+              <a:gd name="adj" fmla="val 8000"/>
+            </a:avLst>
+          </a:prstGeom>
+          <a:solidFill>
+            <a:srgbClr val="D6EEF5"/>
+          </a:solidFill>
+          <a:ln w="9525">
+            <a:solidFill>
+              <a:srgbClr val="2E6FD6"/>
+            </a:solidFill>
+          </a:ln>
+          <a:effectLst/>
+        </p:spPr>
+        <p:style>
+          <a:lnRef idx="1">
+            <a:schemeClr val="accent1"/>
+          </a:lnRef>
+          <a:fillRef idx="3">
+            <a:schemeClr val="accent1"/>
+          </a:fillRef>
+          <a:effectRef idx="2">
+            <a:schemeClr val="accent1"/>
+          </a:effectRef>
+          <a:fontRef idx="minor">
+            <a:schemeClr val="lt1"/>
+          </a:fontRef>
+        </p:style>
+        <p:txBody>
+          <a:bodyPr rtlCol="0" anchor="ctr"/>
+          <a:lstStyle/>
+          <a:p>
+            <a:pPr algn="ctr"/>
+          </a:p>
+        </p:txBody>
+      </p:sp>
+      <p:sp>
+        <p:nvSpPr>
+          <p:cNvPr id="52" name="TextBox 51"/>
           <p:cNvSpPr txBox="1"/>
           <p:nvPr/>
         </p:nvSpPr>
         <p:spPr>
           <a:xfrm>
-            <a:off x="6666827" y="3515207"/>
-            <a:ext cx="1105571" cy="80288"/>
+            <a:off x="8319820" y="4334256"/>
+            <a:ext cx="3314090" cy="331623"/>
           </a:xfrm>
           <a:prstGeom prst="rect">
             <a:avLst/>
@@ -9874,7 +12176,7 @@
           <a:p>
             <a:pPr algn="ctr">
               <a:lnSpc>
-                <a:spcPct val="105000"/>
+                <a:spcPct val="100000"/>
               </a:lnSpc>
               <a:spcBef>
                 <a:spcPts val="0"/>
@@ -9884,27 +12186,73 @@
               </a:spcAft>
             </a:pPr>
             <a:r>
-              <a:rPr sz="1000" b="1" i="0">
-                <a:solidFill>
-                  <a:srgbClr val="FEFFFF"/>
-                </a:solidFill>
-                <a:latin typeface="Montserrat Medium"/>
-              </a:rPr>
-              <a:t>1.3</a:t>
-            </a:r>
-          </a:p>
-        </p:txBody>
-      </p:sp>
-      <p:sp>
-        <p:nvSpPr>
-          <p:cNvPr id="29" name="TextBox 28"/>
+              <a:rPr sz="950" b="1" i="0">
+                <a:solidFill>
+                  <a:srgbClr val="03045E"/>
+                </a:solidFill>
+                <a:latin typeface="Montserrat"/>
+              </a:rPr>
+              <a:t>Provider share</a:t>
+            </a:r>
+          </a:p>
+        </p:txBody>
+      </p:sp>
+      <p:sp>
+        <p:nvSpPr>
+          <p:cNvPr id="53" name="Rounded Rectangle 52"/>
+          <p:cNvSpPr/>
+          <p:nvPr/>
+        </p:nvSpPr>
+        <p:spPr>
+          <a:xfrm>
+            <a:off x="8319820" y="4647591"/>
+            <a:ext cx="3314090" cy="186537"/>
+          </a:xfrm>
+          <a:prstGeom prst="roundRect">
+            <a:avLst>
+              <a:gd name="adj" fmla="val 12000"/>
+            </a:avLst>
+          </a:prstGeom>
+          <a:solidFill>
+            <a:srgbClr val="020462"/>
+          </a:solidFill>
+          <a:ln>
+            <a:noFill/>
+          </a:ln>
+          <a:effectLst/>
+        </p:spPr>
+        <p:style>
+          <a:lnRef idx="1">
+            <a:schemeClr val="accent1"/>
+          </a:lnRef>
+          <a:fillRef idx="3">
+            <a:schemeClr val="accent1"/>
+          </a:fillRef>
+          <a:effectRef idx="2">
+            <a:schemeClr val="accent1"/>
+          </a:effectRef>
+          <a:fontRef idx="minor">
+            <a:schemeClr val="lt1"/>
+          </a:fontRef>
+        </p:style>
+        <p:txBody>
+          <a:bodyPr rtlCol="0" anchor="ctr"/>
+          <a:lstStyle/>
+          <a:p>
+            <a:pPr algn="ctr"/>
+          </a:p>
+        </p:txBody>
+      </p:sp>
+      <p:sp>
+        <p:nvSpPr>
+          <p:cNvPr id="54" name="TextBox 53"/>
           <p:cNvSpPr txBox="1"/>
           <p:nvPr/>
         </p:nvSpPr>
         <p:spPr>
           <a:xfrm>
-            <a:off x="6666827" y="6080760"/>
-            <a:ext cx="1105571" cy="274320"/>
+            <a:off x="8319820" y="4647591"/>
+            <a:ext cx="3314090" cy="186537"/>
           </a:xfrm>
           <a:prstGeom prst="rect">
             <a:avLst/>
@@ -9912,7 +12260,7 @@
           <a:noFill/>
         </p:spPr>
         <p:txBody>
-          <a:bodyPr wrap="square" anchor="t" lIns="0" rIns="0" tIns="0" bIns="0">
+          <a:bodyPr wrap="square" anchor="ctr" lIns="0" rIns="0" tIns="0" bIns="0">
             <a:spAutoFit/>
           </a:bodyPr>
           <a:lstStyle/>
@@ -9929,27 +12277,533 @@
               </a:spcAft>
             </a:pPr>
             <a:r>
-              <a:rPr sz="1050" b="1" i="0">
+              <a:rPr sz="900" b="1" i="0">
+                <a:solidFill>
+                  <a:srgbClr val="FEFFFF"/>
+                </a:solidFill>
+                <a:latin typeface="Montserrat Medium"/>
+              </a:rPr>
+              <a:t>[%]</a:t>
+            </a:r>
+          </a:p>
+        </p:txBody>
+      </p:sp>
+      <p:sp>
+        <p:nvSpPr>
+          <p:cNvPr id="55" name="Oval 54"/>
+          <p:cNvSpPr/>
+          <p:nvPr/>
+        </p:nvSpPr>
+        <p:spPr>
+          <a:xfrm>
+            <a:off x="11533326" y="4379976"/>
+            <a:ext cx="109728" cy="109728"/>
+          </a:xfrm>
+          <a:prstGeom prst="ellipse">
+            <a:avLst/>
+          </a:prstGeom>
+          <a:solidFill>
+            <a:srgbClr val="9B1C1C"/>
+          </a:solidFill>
+          <a:ln w="9525">
+            <a:solidFill>
+              <a:srgbClr val="FEFFFF"/>
+            </a:solidFill>
+          </a:ln>
+          <a:effectLst/>
+        </p:spPr>
+        <p:style>
+          <a:lnRef idx="1">
+            <a:schemeClr val="accent1"/>
+          </a:lnRef>
+          <a:fillRef idx="3">
+            <a:schemeClr val="accent1"/>
+          </a:fillRef>
+          <a:effectRef idx="2">
+            <a:schemeClr val="accent1"/>
+          </a:effectRef>
+          <a:fontRef idx="minor">
+            <a:schemeClr val="lt1"/>
+          </a:fontRef>
+        </p:style>
+        <p:txBody>
+          <a:bodyPr rtlCol="0" anchor="ctr"/>
+          <a:lstStyle/>
+          <a:p>
+            <a:pPr algn="ctr"/>
+          </a:p>
+        </p:txBody>
+      </p:sp>
+      <p:sp>
+        <p:nvSpPr>
+          <p:cNvPr id="56" name="Rounded Rectangle 55"/>
+          <p:cNvSpPr/>
+          <p:nvPr/>
+        </p:nvSpPr>
+        <p:spPr>
+          <a:xfrm>
+            <a:off x="8264956" y="5017008"/>
+            <a:ext cx="3423818" cy="518160"/>
+          </a:xfrm>
+          <a:prstGeom prst="roundRect">
+            <a:avLst>
+              <a:gd name="adj" fmla="val 8000"/>
+            </a:avLst>
+          </a:prstGeom>
+          <a:solidFill>
+            <a:srgbClr val="D6EEF5"/>
+          </a:solidFill>
+          <a:ln w="9525">
+            <a:solidFill>
+              <a:srgbClr val="2E6FD6"/>
+            </a:solidFill>
+          </a:ln>
+          <a:effectLst/>
+        </p:spPr>
+        <p:style>
+          <a:lnRef idx="1">
+            <a:schemeClr val="accent1"/>
+          </a:lnRef>
+          <a:fillRef idx="3">
+            <a:schemeClr val="accent1"/>
+          </a:fillRef>
+          <a:effectRef idx="2">
+            <a:schemeClr val="accent1"/>
+          </a:effectRef>
+          <a:fontRef idx="minor">
+            <a:schemeClr val="lt1"/>
+          </a:fontRef>
+        </p:style>
+        <p:txBody>
+          <a:bodyPr rtlCol="0" anchor="ctr"/>
+          <a:lstStyle/>
+          <a:p>
+            <a:pPr algn="ctr"/>
+          </a:p>
+        </p:txBody>
+      </p:sp>
+      <p:sp>
+        <p:nvSpPr>
+          <p:cNvPr id="57" name="TextBox 56"/>
+          <p:cNvSpPr txBox="1"/>
+          <p:nvPr/>
+        </p:nvSpPr>
+        <p:spPr>
+          <a:xfrm>
+            <a:off x="8319820" y="5017008"/>
+            <a:ext cx="3314090" cy="331623"/>
+          </a:xfrm>
+          <a:prstGeom prst="rect">
+            <a:avLst/>
+          </a:prstGeom>
+          <a:noFill/>
+        </p:spPr>
+        <p:txBody>
+          <a:bodyPr wrap="square" anchor="ctr" lIns="0" rIns="0" tIns="0" bIns="0">
+            <a:spAutoFit/>
+          </a:bodyPr>
+          <a:lstStyle/>
+          <a:p>
+            <a:pPr algn="ctr">
+              <a:lnSpc>
+                <a:spcPct val="100000"/>
+              </a:lnSpc>
+              <a:spcBef>
+                <a:spcPts val="0"/>
+              </a:spcBef>
+              <a:spcAft>
+                <a:spcPts val="200"/>
+              </a:spcAft>
+            </a:pPr>
+            <a:r>
+              <a:rPr sz="950" b="1" i="0">
                 <a:solidFill>
                   <a:srgbClr val="03045E"/>
                 </a:solidFill>
                 <a:latin typeface="Montserrat"/>
               </a:rPr>
-              <a:t>[Region C]</a:t>
-            </a:r>
+              <a:t>Avg weekly rate</a:t>
+            </a:r>
+          </a:p>
+        </p:txBody>
+      </p:sp>
+      <p:sp>
+        <p:nvSpPr>
+          <p:cNvPr id="58" name="Rounded Rectangle 57"/>
+          <p:cNvSpPr/>
+          <p:nvPr/>
+        </p:nvSpPr>
+        <p:spPr>
+          <a:xfrm>
+            <a:off x="8319820" y="5330343"/>
+            <a:ext cx="3314090" cy="186537"/>
+          </a:xfrm>
+          <a:prstGeom prst="roundRect">
+            <a:avLst>
+              <a:gd name="adj" fmla="val 12000"/>
+            </a:avLst>
+          </a:prstGeom>
+          <a:solidFill>
+            <a:srgbClr val="020462"/>
+          </a:solidFill>
+          <a:ln>
+            <a:noFill/>
+          </a:ln>
+          <a:effectLst/>
+        </p:spPr>
+        <p:style>
+          <a:lnRef idx="1">
+            <a:schemeClr val="accent1"/>
+          </a:lnRef>
+          <a:fillRef idx="3">
+            <a:schemeClr val="accent1"/>
+          </a:fillRef>
+          <a:effectRef idx="2">
+            <a:schemeClr val="accent1"/>
+          </a:effectRef>
+          <a:fontRef idx="minor">
+            <a:schemeClr val="lt1"/>
+          </a:fontRef>
+        </p:style>
+        <p:txBody>
+          <a:bodyPr rtlCol="0" anchor="ctr"/>
+          <a:lstStyle/>
+          <a:p>
+            <a:pPr algn="ctr"/>
+          </a:p>
+        </p:txBody>
+      </p:sp>
+      <p:sp>
+        <p:nvSpPr>
+          <p:cNvPr id="59" name="TextBox 58"/>
+          <p:cNvSpPr txBox="1"/>
+          <p:nvPr/>
+        </p:nvSpPr>
+        <p:spPr>
+          <a:xfrm>
+            <a:off x="8319820" y="5330343"/>
+            <a:ext cx="3314090" cy="186537"/>
+          </a:xfrm>
+          <a:prstGeom prst="rect">
+            <a:avLst/>
+          </a:prstGeom>
+          <a:noFill/>
+        </p:spPr>
+        <p:txBody>
+          <a:bodyPr wrap="square" anchor="ctr" lIns="0" rIns="0" tIns="0" bIns="0">
+            <a:spAutoFit/>
+          </a:bodyPr>
+          <a:lstStyle/>
+          <a:p>
+            <a:pPr algn="ctr">
+              <a:lnSpc>
+                <a:spcPct val="105000"/>
+              </a:lnSpc>
+              <a:spcBef>
+                <a:spcPts val="0"/>
+              </a:spcBef>
+              <a:spcAft>
+                <a:spcPts val="200"/>
+              </a:spcAft>
+            </a:pPr>
+            <a:r>
+              <a:rPr sz="900" b="1" i="0">
+                <a:solidFill>
+                  <a:srgbClr val="FEFFFF"/>
+                </a:solidFill>
+                <a:latin typeface="Montserrat Medium"/>
+              </a:rPr>
+              <a:t>[$/wk]</a:t>
+            </a:r>
+          </a:p>
+        </p:txBody>
+      </p:sp>
+      <p:sp>
+        <p:nvSpPr>
+          <p:cNvPr id="60" name="Oval 59"/>
+          <p:cNvSpPr/>
+          <p:nvPr/>
+        </p:nvSpPr>
+        <p:spPr>
+          <a:xfrm>
+            <a:off x="11533326" y="5062728"/>
+            <a:ext cx="109728" cy="109728"/>
+          </a:xfrm>
+          <a:prstGeom prst="ellipse">
+            <a:avLst/>
+          </a:prstGeom>
+          <a:solidFill>
+            <a:srgbClr val="B7791F"/>
+          </a:solidFill>
+          <a:ln w="9525">
+            <a:solidFill>
+              <a:srgbClr val="FEFFFF"/>
+            </a:solidFill>
+          </a:ln>
+          <a:effectLst/>
+        </p:spPr>
+        <p:style>
+          <a:lnRef idx="1">
+            <a:schemeClr val="accent1"/>
+          </a:lnRef>
+          <a:fillRef idx="3">
+            <a:schemeClr val="accent1"/>
+          </a:fillRef>
+          <a:effectRef idx="2">
+            <a:schemeClr val="accent1"/>
+          </a:effectRef>
+          <a:fontRef idx="minor">
+            <a:schemeClr val="lt1"/>
+          </a:fontRef>
+        </p:style>
+        <p:txBody>
+          <a:bodyPr rtlCol="0" anchor="ctr"/>
+          <a:lstStyle/>
+          <a:p>
+            <a:pPr algn="ctr"/>
+          </a:p>
+        </p:txBody>
+      </p:sp>
+      <p:sp>
+        <p:nvSpPr>
+          <p:cNvPr id="61" name="Rounded Rectangle 60"/>
+          <p:cNvSpPr/>
+          <p:nvPr/>
+        </p:nvSpPr>
+        <p:spPr>
+          <a:xfrm>
+            <a:off x="8264956" y="5699760"/>
+            <a:ext cx="3423818" cy="518160"/>
+          </a:xfrm>
+          <a:prstGeom prst="roundRect">
+            <a:avLst>
+              <a:gd name="adj" fmla="val 8000"/>
+            </a:avLst>
+          </a:prstGeom>
+          <a:solidFill>
+            <a:srgbClr val="D6EEF5"/>
+          </a:solidFill>
+          <a:ln w="9525">
+            <a:solidFill>
+              <a:srgbClr val="2E6FD6"/>
+            </a:solidFill>
+          </a:ln>
+          <a:effectLst/>
+        </p:spPr>
+        <p:style>
+          <a:lnRef idx="1">
+            <a:schemeClr val="accent1"/>
+          </a:lnRef>
+          <a:fillRef idx="3">
+            <a:schemeClr val="accent1"/>
+          </a:fillRef>
+          <a:effectRef idx="2">
+            <a:schemeClr val="accent1"/>
+          </a:effectRef>
+          <a:fontRef idx="minor">
+            <a:schemeClr val="lt1"/>
+          </a:fontRef>
+        </p:style>
+        <p:txBody>
+          <a:bodyPr rtlCol="0" anchor="ctr"/>
+          <a:lstStyle/>
+          <a:p>
+            <a:pPr algn="ctr"/>
+          </a:p>
+        </p:txBody>
+      </p:sp>
+      <p:sp>
+        <p:nvSpPr>
+          <p:cNvPr id="62" name="TextBox 61"/>
+          <p:cNvSpPr txBox="1"/>
+          <p:nvPr/>
+        </p:nvSpPr>
+        <p:spPr>
+          <a:xfrm>
+            <a:off x="8319820" y="5699760"/>
+            <a:ext cx="3314090" cy="331623"/>
+          </a:xfrm>
+          <a:prstGeom prst="rect">
+            <a:avLst/>
+          </a:prstGeom>
+          <a:noFill/>
+        </p:spPr>
+        <p:txBody>
+          <a:bodyPr wrap="square" anchor="ctr" lIns="0" rIns="0" tIns="0" bIns="0">
+            <a:spAutoFit/>
+          </a:bodyPr>
+          <a:lstStyle/>
+          <a:p>
+            <a:pPr algn="ctr">
+              <a:lnSpc>
+                <a:spcPct val="100000"/>
+              </a:lnSpc>
+              <a:spcBef>
+                <a:spcPts val="0"/>
+              </a:spcBef>
+              <a:spcAft>
+                <a:spcPts val="200"/>
+              </a:spcAft>
+            </a:pPr>
+            <a:r>
+              <a:rPr sz="950" b="1" i="0">
+                <a:solidFill>
+                  <a:srgbClr val="03045E"/>
+                </a:solidFill>
+                <a:latin typeface="Montserrat"/>
+              </a:rPr>
+              <a:t>Avg duration</a:t>
+            </a:r>
+          </a:p>
+        </p:txBody>
+      </p:sp>
+      <p:sp>
+        <p:nvSpPr>
+          <p:cNvPr id="63" name="Rounded Rectangle 62"/>
+          <p:cNvSpPr/>
+          <p:nvPr/>
+        </p:nvSpPr>
+        <p:spPr>
+          <a:xfrm>
+            <a:off x="8319820" y="6013095"/>
+            <a:ext cx="3314090" cy="186537"/>
+          </a:xfrm>
+          <a:prstGeom prst="roundRect">
+            <a:avLst>
+              <a:gd name="adj" fmla="val 12000"/>
+            </a:avLst>
+          </a:prstGeom>
+          <a:solidFill>
+            <a:srgbClr val="020462"/>
+          </a:solidFill>
+          <a:ln>
+            <a:noFill/>
+          </a:ln>
+          <a:effectLst/>
+        </p:spPr>
+        <p:style>
+          <a:lnRef idx="1">
+            <a:schemeClr val="accent1"/>
+          </a:lnRef>
+          <a:fillRef idx="3">
+            <a:schemeClr val="accent1"/>
+          </a:fillRef>
+          <a:effectRef idx="2">
+            <a:schemeClr val="accent1"/>
+          </a:effectRef>
+          <a:fontRef idx="minor">
+            <a:schemeClr val="lt1"/>
+          </a:fontRef>
+        </p:style>
+        <p:txBody>
+          <a:bodyPr rtlCol="0" anchor="ctr"/>
+          <a:lstStyle/>
+          <a:p>
+            <a:pPr algn="ctr"/>
+          </a:p>
+        </p:txBody>
+      </p:sp>
+      <p:sp>
+        <p:nvSpPr>
+          <p:cNvPr id="64" name="TextBox 63"/>
+          <p:cNvSpPr txBox="1"/>
+          <p:nvPr/>
+        </p:nvSpPr>
+        <p:spPr>
+          <a:xfrm>
+            <a:off x="8319820" y="6013095"/>
+            <a:ext cx="3314090" cy="186537"/>
+          </a:xfrm>
+          <a:prstGeom prst="rect">
+            <a:avLst/>
+          </a:prstGeom>
+          <a:noFill/>
+        </p:spPr>
+        <p:txBody>
+          <a:bodyPr wrap="square" anchor="ctr" lIns="0" rIns="0" tIns="0" bIns="0">
+            <a:spAutoFit/>
+          </a:bodyPr>
+          <a:lstStyle/>
+          <a:p>
+            <a:pPr algn="ctr">
+              <a:lnSpc>
+                <a:spcPct val="105000"/>
+              </a:lnSpc>
+              <a:spcBef>
+                <a:spcPts val="0"/>
+              </a:spcBef>
+              <a:spcAft>
+                <a:spcPts val="200"/>
+              </a:spcAft>
+            </a:pPr>
+            <a:r>
+              <a:rPr sz="900" b="1" i="0">
+                <a:solidFill>
+                  <a:srgbClr val="FEFFFF"/>
+                </a:solidFill>
+                <a:latin typeface="Montserrat Medium"/>
+              </a:rPr>
+              <a:t>[wks]</a:t>
+            </a:r>
+          </a:p>
+        </p:txBody>
+      </p:sp>
+      <p:sp>
+        <p:nvSpPr>
+          <p:cNvPr id="65" name="Oval 64"/>
+          <p:cNvSpPr/>
+          <p:nvPr/>
+        </p:nvSpPr>
+        <p:spPr>
+          <a:xfrm>
+            <a:off x="11533326" y="5745480"/>
+            <a:ext cx="109728" cy="109728"/>
+          </a:xfrm>
+          <a:prstGeom prst="ellipse">
+            <a:avLst/>
+          </a:prstGeom>
+          <a:solidFill>
+            <a:srgbClr val="9B1C1C"/>
+          </a:solidFill>
+          <a:ln w="9525">
+            <a:solidFill>
+              <a:srgbClr val="FEFFFF"/>
+            </a:solidFill>
+          </a:ln>
+          <a:effectLst/>
+        </p:spPr>
+        <p:style>
+          <a:lnRef idx="1">
+            <a:schemeClr val="accent1"/>
+          </a:lnRef>
+          <a:fillRef idx="3">
+            <a:schemeClr val="accent1"/>
+          </a:fillRef>
+          <a:effectRef idx="2">
+            <a:schemeClr val="accent1"/>
+          </a:effectRef>
+          <a:fontRef idx="minor">
+            <a:schemeClr val="lt1"/>
+          </a:fontRef>
+        </p:style>
+        <p:txBody>
+          <a:bodyPr rtlCol="0" anchor="ctr"/>
+          <a:lstStyle/>
+          <a:p>
+            <a:pPr algn="ctr"/>
           </a:p>
         </p:txBody>
       </p:sp>
       <p:cxnSp>
         <p:nvCxnSpPr>
-          <p:cNvPr id="30" name="Connector 29"/>
+          <p:cNvPr id="66" name="Connector 65"/>
           <p:cNvCxnSpPr/>
           <p:nvPr/>
         </p:nvCxnSpPr>
         <p:spPr>
           <a:xfrm>
-            <a:off x="8001000" y="1463040"/>
-            <a:ext cx="0" cy="4892040"/>
+            <a:off x="4155338" y="3735324"/>
+            <a:ext cx="0" cy="1033272"/>
           </a:xfrm>
           <a:prstGeom prst="bentConnector3">
             <a:avLst/>
@@ -9975,25 +12829,132 @@
           </a:fontRef>
         </p:style>
       </p:cxnSp>
-      <p:sp>
-        <p:nvSpPr>
-          <p:cNvPr id="31" name="Isosceles Triangle 30"/>
+      <p:cxnSp>
+        <p:nvCxnSpPr>
+          <p:cNvPr id="67" name="Connector 66"/>
+          <p:cNvCxnSpPr/>
+          <p:nvPr/>
+        </p:nvCxnSpPr>
+        <p:spPr>
+          <a:xfrm>
+            <a:off x="3926738" y="4251960"/>
+            <a:ext cx="228600" cy="0"/>
+          </a:xfrm>
+          <a:prstGeom prst="bentConnector3">
+            <a:avLst/>
+          </a:prstGeom>
+          <a:ln w="12700">
+            <a:solidFill>
+              <a:srgbClr val="C9CBD6"/>
+            </a:solidFill>
+          </a:ln>
+        </p:spPr>
+        <p:style>
+          <a:lnRef idx="2">
+            <a:schemeClr val="accent1"/>
+          </a:lnRef>
+          <a:fillRef idx="0">
+            <a:schemeClr val="accent1"/>
+          </a:fillRef>
+          <a:effectRef idx="1">
+            <a:schemeClr val="accent1"/>
+          </a:effectRef>
+          <a:fontRef idx="minor">
+            <a:schemeClr val="tx1"/>
+          </a:fontRef>
+        </p:style>
+      </p:cxnSp>
+      <p:cxnSp>
+        <p:nvCxnSpPr>
+          <p:cNvPr id="68" name="Connector 67"/>
+          <p:cNvCxnSpPr/>
+          <p:nvPr/>
+        </p:nvCxnSpPr>
+        <p:spPr>
+          <a:xfrm>
+            <a:off x="4155338" y="3735324"/>
+            <a:ext cx="228600" cy="0"/>
+          </a:xfrm>
+          <a:prstGeom prst="bentConnector3">
+            <a:avLst/>
+          </a:prstGeom>
+          <a:ln w="12700">
+            <a:solidFill>
+              <a:srgbClr val="C9CBD6"/>
+            </a:solidFill>
+          </a:ln>
+        </p:spPr>
+        <p:style>
+          <a:lnRef idx="2">
+            <a:schemeClr val="accent1"/>
+          </a:lnRef>
+          <a:fillRef idx="0">
+            <a:schemeClr val="accent1"/>
+          </a:fillRef>
+          <a:effectRef idx="1">
+            <a:schemeClr val="accent1"/>
+          </a:effectRef>
+          <a:fontRef idx="minor">
+            <a:schemeClr val="tx1"/>
+          </a:fontRef>
+        </p:style>
+      </p:cxnSp>
+      <p:cxnSp>
+        <p:nvCxnSpPr>
+          <p:cNvPr id="69" name="Connector 68"/>
+          <p:cNvCxnSpPr/>
+          <p:nvPr/>
+        </p:nvCxnSpPr>
+        <p:spPr>
+          <a:xfrm>
+            <a:off x="4155338" y="4768596"/>
+            <a:ext cx="228600" cy="0"/>
+          </a:xfrm>
+          <a:prstGeom prst="bentConnector3">
+            <a:avLst/>
+          </a:prstGeom>
+          <a:ln w="12700">
+            <a:solidFill>
+              <a:srgbClr val="C9CBD6"/>
+            </a:solidFill>
+          </a:ln>
+        </p:spPr>
+        <p:style>
+          <a:lnRef idx="2">
+            <a:schemeClr val="accent1"/>
+          </a:lnRef>
+          <a:fillRef idx="0">
+            <a:schemeClr val="accent1"/>
+          </a:fillRef>
+          <a:effectRef idx="1">
+            <a:schemeClr val="accent1"/>
+          </a:effectRef>
+          <a:fontRef idx="minor">
+            <a:schemeClr val="tx1"/>
+          </a:fontRef>
+        </p:style>
+      </p:cxnSp>
+      <p:sp>
+        <p:nvSpPr>
+          <p:cNvPr id="70" name="Oval 69"/>
           <p:cNvSpPr/>
           <p:nvPr/>
         </p:nvSpPr>
         <p:spPr>
-          <a:xfrm rot="5400000">
-            <a:off x="8275320" y="1490472"/>
-            <a:ext cx="201168" cy="201168"/>
-          </a:xfrm>
-          <a:prstGeom prst="triangle">
+          <a:xfrm>
+            <a:off x="3903878" y="4114800"/>
+            <a:ext cx="274320" cy="274320"/>
+          </a:xfrm>
+          <a:prstGeom prst="ellipse">
             <a:avLst/>
           </a:prstGeom>
           <a:solidFill>
-            <a:srgbClr val="03045E"/>
+            <a:srgbClr val="FEFFFF"/>
           </a:solidFill>
-          <a:ln>
-            <a:noFill/>
+          <a:ln w="12700">
+            <a:solidFill>
+              <a:srgbClr val="03045E"/>
+            </a:solidFill>
           </a:ln>
           <a:effectLst/>
         </p:spPr>
@@ -10021,14 +12982,591 @@
       </p:sp>
       <p:sp>
         <p:nvSpPr>
-          <p:cNvPr id="32" name="TextBox 31"/>
+          <p:cNvPr id="71" name="TextBox 70"/>
           <p:cNvSpPr txBox="1"/>
           <p:nvPr/>
         </p:nvSpPr>
         <p:spPr>
           <a:xfrm>
-            <a:off x="8567928" y="1472184"/>
-            <a:ext cx="3136392" cy="274320"/>
+            <a:off x="3903878" y="4114800"/>
+            <a:ext cx="274320" cy="274320"/>
+          </a:xfrm>
+          <a:prstGeom prst="rect">
+            <a:avLst/>
+          </a:prstGeom>
+          <a:noFill/>
+        </p:spPr>
+        <p:txBody>
+          <a:bodyPr wrap="square" anchor="ctr" lIns="0" rIns="0" tIns="0" bIns="0">
+            <a:spAutoFit/>
+          </a:bodyPr>
+          <a:lstStyle/>
+          <a:p>
+            <a:pPr algn="ctr">
+              <a:lnSpc>
+                <a:spcPct val="105000"/>
+              </a:lnSpc>
+              <a:spcBef>
+                <a:spcPts val="0"/>
+              </a:spcBef>
+              <a:spcAft>
+                <a:spcPts val="200"/>
+              </a:spcAft>
+            </a:pPr>
+            <a:r>
+              <a:rPr sz="1300" b="1" i="0">
+                <a:solidFill>
+                  <a:srgbClr val="03045E"/>
+                </a:solidFill>
+                <a:latin typeface="Montserrat"/>
+              </a:rPr>
+              <a:t>×</a:t>
+            </a:r>
+          </a:p>
+        </p:txBody>
+      </p:sp>
+      <p:cxnSp>
+        <p:nvCxnSpPr>
+          <p:cNvPr id="72" name="Connector 71"/>
+          <p:cNvCxnSpPr/>
+          <p:nvPr/>
+        </p:nvCxnSpPr>
+        <p:spPr>
+          <a:xfrm>
+            <a:off x="8036356" y="2545080"/>
+            <a:ext cx="0" cy="2048256"/>
+          </a:xfrm>
+          <a:prstGeom prst="bentConnector3">
+            <a:avLst/>
+          </a:prstGeom>
+          <a:ln w="12700">
+            <a:solidFill>
+              <a:srgbClr val="C9CBD6"/>
+            </a:solidFill>
+          </a:ln>
+        </p:spPr>
+        <p:style>
+          <a:lnRef idx="2">
+            <a:schemeClr val="accent1"/>
+          </a:lnRef>
+          <a:fillRef idx="0">
+            <a:schemeClr val="accent1"/>
+          </a:fillRef>
+          <a:effectRef idx="1">
+            <a:schemeClr val="accent1"/>
+          </a:effectRef>
+          <a:fontRef idx="minor">
+            <a:schemeClr val="tx1"/>
+          </a:fontRef>
+        </p:style>
+      </p:cxnSp>
+      <p:cxnSp>
+        <p:nvCxnSpPr>
+          <p:cNvPr id="73" name="Connector 72"/>
+          <p:cNvCxnSpPr/>
+          <p:nvPr/>
+        </p:nvCxnSpPr>
+        <p:spPr>
+          <a:xfrm>
+            <a:off x="7807756" y="3735324"/>
+            <a:ext cx="228600" cy="0"/>
+          </a:xfrm>
+          <a:prstGeom prst="bentConnector3">
+            <a:avLst/>
+          </a:prstGeom>
+          <a:ln w="12700">
+            <a:solidFill>
+              <a:srgbClr val="C9CBD6"/>
+            </a:solidFill>
+          </a:ln>
+        </p:spPr>
+        <p:style>
+          <a:lnRef idx="2">
+            <a:schemeClr val="accent1"/>
+          </a:lnRef>
+          <a:fillRef idx="0">
+            <a:schemeClr val="accent1"/>
+          </a:fillRef>
+          <a:effectRef idx="1">
+            <a:schemeClr val="accent1"/>
+          </a:effectRef>
+          <a:fontRef idx="minor">
+            <a:schemeClr val="tx1"/>
+          </a:fontRef>
+        </p:style>
+      </p:cxnSp>
+      <p:cxnSp>
+        <p:nvCxnSpPr>
+          <p:cNvPr id="74" name="Connector 73"/>
+          <p:cNvCxnSpPr/>
+          <p:nvPr/>
+        </p:nvCxnSpPr>
+        <p:spPr>
+          <a:xfrm>
+            <a:off x="8036356" y="2545080"/>
+            <a:ext cx="228600" cy="0"/>
+          </a:xfrm>
+          <a:prstGeom prst="bentConnector3">
+            <a:avLst/>
+          </a:prstGeom>
+          <a:ln w="12700">
+            <a:solidFill>
+              <a:srgbClr val="C9CBD6"/>
+            </a:solidFill>
+          </a:ln>
+        </p:spPr>
+        <p:style>
+          <a:lnRef idx="2">
+            <a:schemeClr val="accent1"/>
+          </a:lnRef>
+          <a:fillRef idx="0">
+            <a:schemeClr val="accent1"/>
+          </a:fillRef>
+          <a:effectRef idx="1">
+            <a:schemeClr val="accent1"/>
+          </a:effectRef>
+          <a:fontRef idx="minor">
+            <a:schemeClr val="tx1"/>
+          </a:fontRef>
+        </p:style>
+      </p:cxnSp>
+      <p:cxnSp>
+        <p:nvCxnSpPr>
+          <p:cNvPr id="75" name="Connector 74"/>
+          <p:cNvCxnSpPr/>
+          <p:nvPr/>
+        </p:nvCxnSpPr>
+        <p:spPr>
+          <a:xfrm>
+            <a:off x="8036356" y="3227832"/>
+            <a:ext cx="228600" cy="0"/>
+          </a:xfrm>
+          <a:prstGeom prst="bentConnector3">
+            <a:avLst/>
+          </a:prstGeom>
+          <a:ln w="12700">
+            <a:solidFill>
+              <a:srgbClr val="C9CBD6"/>
+            </a:solidFill>
+          </a:ln>
+        </p:spPr>
+        <p:style>
+          <a:lnRef idx="2">
+            <a:schemeClr val="accent1"/>
+          </a:lnRef>
+          <a:fillRef idx="0">
+            <a:schemeClr val="accent1"/>
+          </a:fillRef>
+          <a:effectRef idx="1">
+            <a:schemeClr val="accent1"/>
+          </a:effectRef>
+          <a:fontRef idx="minor">
+            <a:schemeClr val="tx1"/>
+          </a:fontRef>
+        </p:style>
+      </p:cxnSp>
+      <p:cxnSp>
+        <p:nvCxnSpPr>
+          <p:cNvPr id="76" name="Connector 75"/>
+          <p:cNvCxnSpPr/>
+          <p:nvPr/>
+        </p:nvCxnSpPr>
+        <p:spPr>
+          <a:xfrm>
+            <a:off x="8036356" y="3910584"/>
+            <a:ext cx="228600" cy="0"/>
+          </a:xfrm>
+          <a:prstGeom prst="bentConnector3">
+            <a:avLst/>
+          </a:prstGeom>
+          <a:ln w="12700">
+            <a:solidFill>
+              <a:srgbClr val="C9CBD6"/>
+            </a:solidFill>
+          </a:ln>
+        </p:spPr>
+        <p:style>
+          <a:lnRef idx="2">
+            <a:schemeClr val="accent1"/>
+          </a:lnRef>
+          <a:fillRef idx="0">
+            <a:schemeClr val="accent1"/>
+          </a:fillRef>
+          <a:effectRef idx="1">
+            <a:schemeClr val="accent1"/>
+          </a:effectRef>
+          <a:fontRef idx="minor">
+            <a:schemeClr val="tx1"/>
+          </a:fontRef>
+        </p:style>
+      </p:cxnSp>
+      <p:cxnSp>
+        <p:nvCxnSpPr>
+          <p:cNvPr id="77" name="Connector 76"/>
+          <p:cNvCxnSpPr/>
+          <p:nvPr/>
+        </p:nvCxnSpPr>
+        <p:spPr>
+          <a:xfrm>
+            <a:off x="8036356" y="4593336"/>
+            <a:ext cx="228600" cy="0"/>
+          </a:xfrm>
+          <a:prstGeom prst="bentConnector3">
+            <a:avLst/>
+          </a:prstGeom>
+          <a:ln w="12700">
+            <a:solidFill>
+              <a:srgbClr val="C9CBD6"/>
+            </a:solidFill>
+          </a:ln>
+        </p:spPr>
+        <p:style>
+          <a:lnRef idx="2">
+            <a:schemeClr val="accent1"/>
+          </a:lnRef>
+          <a:fillRef idx="0">
+            <a:schemeClr val="accent1"/>
+          </a:fillRef>
+          <a:effectRef idx="1">
+            <a:schemeClr val="accent1"/>
+          </a:effectRef>
+          <a:fontRef idx="minor">
+            <a:schemeClr val="tx1"/>
+          </a:fontRef>
+        </p:style>
+      </p:cxnSp>
+      <p:sp>
+        <p:nvSpPr>
+          <p:cNvPr id="78" name="Oval 77"/>
+          <p:cNvSpPr/>
+          <p:nvPr/>
+        </p:nvSpPr>
+        <p:spPr>
+          <a:xfrm>
+            <a:off x="7784896" y="3598164"/>
+            <a:ext cx="274320" cy="274320"/>
+          </a:xfrm>
+          <a:prstGeom prst="ellipse">
+            <a:avLst/>
+          </a:prstGeom>
+          <a:solidFill>
+            <a:srgbClr val="FEFFFF"/>
+          </a:solidFill>
+          <a:ln w="12700">
+            <a:solidFill>
+              <a:srgbClr val="03045E"/>
+            </a:solidFill>
+          </a:ln>
+          <a:effectLst/>
+        </p:spPr>
+        <p:style>
+          <a:lnRef idx="1">
+            <a:schemeClr val="accent1"/>
+          </a:lnRef>
+          <a:fillRef idx="3">
+            <a:schemeClr val="accent1"/>
+          </a:fillRef>
+          <a:effectRef idx="2">
+            <a:schemeClr val="accent1"/>
+          </a:effectRef>
+          <a:fontRef idx="minor">
+            <a:schemeClr val="lt1"/>
+          </a:fontRef>
+        </p:style>
+        <p:txBody>
+          <a:bodyPr rtlCol="0" anchor="ctr"/>
+          <a:lstStyle/>
+          <a:p>
+            <a:pPr algn="ctr"/>
+          </a:p>
+        </p:txBody>
+      </p:sp>
+      <p:sp>
+        <p:nvSpPr>
+          <p:cNvPr id="79" name="TextBox 78"/>
+          <p:cNvSpPr txBox="1"/>
+          <p:nvPr/>
+        </p:nvSpPr>
+        <p:spPr>
+          <a:xfrm>
+            <a:off x="7784896" y="3598164"/>
+            <a:ext cx="274320" cy="274320"/>
+          </a:xfrm>
+          <a:prstGeom prst="rect">
+            <a:avLst/>
+          </a:prstGeom>
+          <a:noFill/>
+        </p:spPr>
+        <p:txBody>
+          <a:bodyPr wrap="square" anchor="ctr" lIns="0" rIns="0" tIns="0" bIns="0">
+            <a:spAutoFit/>
+          </a:bodyPr>
+          <a:lstStyle/>
+          <a:p>
+            <a:pPr algn="ctr">
+              <a:lnSpc>
+                <a:spcPct val="105000"/>
+              </a:lnSpc>
+              <a:spcBef>
+                <a:spcPts val="0"/>
+              </a:spcBef>
+              <a:spcAft>
+                <a:spcPts val="200"/>
+              </a:spcAft>
+            </a:pPr>
+            <a:r>
+              <a:rPr sz="1300" b="1" i="0">
+                <a:solidFill>
+                  <a:srgbClr val="03045E"/>
+                </a:solidFill>
+                <a:latin typeface="Montserrat"/>
+              </a:rPr>
+              <a:t>×</a:t>
+            </a:r>
+          </a:p>
+        </p:txBody>
+      </p:sp>
+      <p:cxnSp>
+        <p:nvCxnSpPr>
+          <p:cNvPr id="80" name="Connector 79"/>
+          <p:cNvCxnSpPr/>
+          <p:nvPr/>
+        </p:nvCxnSpPr>
+        <p:spPr>
+          <a:xfrm>
+            <a:off x="8036356" y="4768596"/>
+            <a:ext cx="0" cy="1190244"/>
+          </a:xfrm>
+          <a:prstGeom prst="bentConnector3">
+            <a:avLst/>
+          </a:prstGeom>
+          <a:ln w="12700">
+            <a:solidFill>
+              <a:srgbClr val="C9CBD6"/>
+            </a:solidFill>
+          </a:ln>
+        </p:spPr>
+        <p:style>
+          <a:lnRef idx="2">
+            <a:schemeClr val="accent1"/>
+          </a:lnRef>
+          <a:fillRef idx="0">
+            <a:schemeClr val="accent1"/>
+          </a:fillRef>
+          <a:effectRef idx="1">
+            <a:schemeClr val="accent1"/>
+          </a:effectRef>
+          <a:fontRef idx="minor">
+            <a:schemeClr val="tx1"/>
+          </a:fontRef>
+        </p:style>
+      </p:cxnSp>
+      <p:cxnSp>
+        <p:nvCxnSpPr>
+          <p:cNvPr id="81" name="Connector 80"/>
+          <p:cNvCxnSpPr/>
+          <p:nvPr/>
+        </p:nvCxnSpPr>
+        <p:spPr>
+          <a:xfrm>
+            <a:off x="7807756" y="4768596"/>
+            <a:ext cx="228600" cy="0"/>
+          </a:xfrm>
+          <a:prstGeom prst="bentConnector3">
+            <a:avLst/>
+          </a:prstGeom>
+          <a:ln w="12700">
+            <a:solidFill>
+              <a:srgbClr val="C9CBD6"/>
+            </a:solidFill>
+          </a:ln>
+        </p:spPr>
+        <p:style>
+          <a:lnRef idx="2">
+            <a:schemeClr val="accent1"/>
+          </a:lnRef>
+          <a:fillRef idx="0">
+            <a:schemeClr val="accent1"/>
+          </a:fillRef>
+          <a:effectRef idx="1">
+            <a:schemeClr val="accent1"/>
+          </a:effectRef>
+          <a:fontRef idx="minor">
+            <a:schemeClr val="tx1"/>
+          </a:fontRef>
+        </p:style>
+      </p:cxnSp>
+      <p:cxnSp>
+        <p:nvCxnSpPr>
+          <p:cNvPr id="82" name="Connector 81"/>
+          <p:cNvCxnSpPr/>
+          <p:nvPr/>
+        </p:nvCxnSpPr>
+        <p:spPr>
+          <a:xfrm>
+            <a:off x="8036356" y="5276088"/>
+            <a:ext cx="228600" cy="0"/>
+          </a:xfrm>
+          <a:prstGeom prst="bentConnector3">
+            <a:avLst/>
+          </a:prstGeom>
+          <a:ln w="12700">
+            <a:solidFill>
+              <a:srgbClr val="C9CBD6"/>
+            </a:solidFill>
+          </a:ln>
+        </p:spPr>
+        <p:style>
+          <a:lnRef idx="2">
+            <a:schemeClr val="accent1"/>
+          </a:lnRef>
+          <a:fillRef idx="0">
+            <a:schemeClr val="accent1"/>
+          </a:fillRef>
+          <a:effectRef idx="1">
+            <a:schemeClr val="accent1"/>
+          </a:effectRef>
+          <a:fontRef idx="minor">
+            <a:schemeClr val="tx1"/>
+          </a:fontRef>
+        </p:style>
+      </p:cxnSp>
+      <p:cxnSp>
+        <p:nvCxnSpPr>
+          <p:cNvPr id="83" name="Connector 82"/>
+          <p:cNvCxnSpPr/>
+          <p:nvPr/>
+        </p:nvCxnSpPr>
+        <p:spPr>
+          <a:xfrm>
+            <a:off x="8036356" y="5958840"/>
+            <a:ext cx="228600" cy="0"/>
+          </a:xfrm>
+          <a:prstGeom prst="bentConnector3">
+            <a:avLst/>
+          </a:prstGeom>
+          <a:ln w="12700">
+            <a:solidFill>
+              <a:srgbClr val="C9CBD6"/>
+            </a:solidFill>
+          </a:ln>
+        </p:spPr>
+        <p:style>
+          <a:lnRef idx="2">
+            <a:schemeClr val="accent1"/>
+          </a:lnRef>
+          <a:fillRef idx="0">
+            <a:schemeClr val="accent1"/>
+          </a:fillRef>
+          <a:effectRef idx="1">
+            <a:schemeClr val="accent1"/>
+          </a:effectRef>
+          <a:fontRef idx="minor">
+            <a:schemeClr val="tx1"/>
+          </a:fontRef>
+        </p:style>
+      </p:cxnSp>
+      <p:sp>
+        <p:nvSpPr>
+          <p:cNvPr id="84" name="Oval 83"/>
+          <p:cNvSpPr/>
+          <p:nvPr/>
+        </p:nvSpPr>
+        <p:spPr>
+          <a:xfrm>
+            <a:off x="7784896" y="4631436"/>
+            <a:ext cx="274320" cy="274320"/>
+          </a:xfrm>
+          <a:prstGeom prst="ellipse">
+            <a:avLst/>
+          </a:prstGeom>
+          <a:solidFill>
+            <a:srgbClr val="FEFFFF"/>
+          </a:solidFill>
+          <a:ln w="12700">
+            <a:solidFill>
+              <a:srgbClr val="03045E"/>
+            </a:solidFill>
+          </a:ln>
+          <a:effectLst/>
+        </p:spPr>
+        <p:style>
+          <a:lnRef idx="1">
+            <a:schemeClr val="accent1"/>
+          </a:lnRef>
+          <a:fillRef idx="3">
+            <a:schemeClr val="accent1"/>
+          </a:fillRef>
+          <a:effectRef idx="2">
+            <a:schemeClr val="accent1"/>
+          </a:effectRef>
+          <a:fontRef idx="minor">
+            <a:schemeClr val="lt1"/>
+          </a:fontRef>
+        </p:style>
+        <p:txBody>
+          <a:bodyPr rtlCol="0" anchor="ctr"/>
+          <a:lstStyle/>
+          <a:p>
+            <a:pPr algn="ctr"/>
+          </a:p>
+        </p:txBody>
+      </p:sp>
+      <p:sp>
+        <p:nvSpPr>
+          <p:cNvPr id="85" name="TextBox 84"/>
+          <p:cNvSpPr txBox="1"/>
+          <p:nvPr/>
+        </p:nvSpPr>
+        <p:spPr>
+          <a:xfrm>
+            <a:off x="7784896" y="4631436"/>
+            <a:ext cx="274320" cy="274320"/>
+          </a:xfrm>
+          <a:prstGeom prst="rect">
+            <a:avLst/>
+          </a:prstGeom>
+          <a:noFill/>
+        </p:spPr>
+        <p:txBody>
+          <a:bodyPr wrap="square" anchor="ctr" lIns="0" rIns="0" tIns="0" bIns="0">
+            <a:spAutoFit/>
+          </a:bodyPr>
+          <a:lstStyle/>
+          <a:p>
+            <a:pPr algn="ctr">
+              <a:lnSpc>
+                <a:spcPct val="105000"/>
+              </a:lnSpc>
+              <a:spcBef>
+                <a:spcPts val="0"/>
+              </a:spcBef>
+              <a:spcAft>
+                <a:spcPts val="200"/>
+              </a:spcAft>
+            </a:pPr>
+            <a:r>
+              <a:rPr sz="1300" b="1" i="0">
+                <a:solidFill>
+                  <a:srgbClr val="03045E"/>
+                </a:solidFill>
+                <a:latin typeface="Montserrat"/>
+              </a:rPr>
+              <a:t>×</a:t>
+            </a:r>
+          </a:p>
+        </p:txBody>
+      </p:sp>
+      <p:sp>
+        <p:nvSpPr>
+          <p:cNvPr id="86" name="TextBox 85"/>
+          <p:cNvSpPr txBox="1"/>
+          <p:nvPr/>
+        </p:nvSpPr>
+        <p:spPr>
+          <a:xfrm>
+            <a:off x="502920" y="6336792"/>
+            <a:ext cx="11185855" cy="274320"/>
           </a:xfrm>
           <a:prstGeom prst="rect">
             <a:avLst/>
@@ -10053,129 +13591,22 @@
               </a:spcAft>
             </a:pPr>
             <a:r>
-              <a:rPr sz="1300" b="1" i="0">
+              <a:rPr sz="900" b="1" i="0">
                 <a:solidFill>
                   <a:srgbClr val="03045E"/>
                 </a:solidFill>
-                <a:latin typeface="Montserrat"/>
-              </a:rPr>
-              <a:t>Key Takeaways</a:t>
-            </a:r>
-          </a:p>
-        </p:txBody>
-      </p:sp>
-      <p:sp>
-        <p:nvSpPr>
-          <p:cNvPr id="33" name="TextBox 32"/>
-          <p:cNvSpPr txBox="1"/>
-          <p:nvPr/>
-        </p:nvSpPr>
-        <p:spPr>
-          <a:xfrm>
-            <a:off x="8275320" y="1920240"/>
-            <a:ext cx="3429000" cy="4434840"/>
-          </a:xfrm>
-          <a:prstGeom prst="rect">
-            <a:avLst/>
-          </a:prstGeom>
-          <a:noFill/>
-        </p:spPr>
-        <p:txBody>
-          <a:bodyPr wrap="square" anchor="t" lIns="0" rIns="0" tIns="0" bIns="0">
-            <a:spAutoFit/>
-          </a:bodyPr>
-          <a:lstStyle/>
-          <a:p>
-            <a:pPr algn="l">
-              <a:lnSpc>
-                <a:spcPct val="108000"/>
-              </a:lnSpc>
-              <a:spcBef>
-                <a:spcPts val="0"/>
-              </a:spcBef>
-              <a:spcAft>
-                <a:spcPts val="700"/>
-              </a:spcAft>
-            </a:pPr>
-            <a:r>
-              <a:rPr sz="1100" b="1" i="0">
-                <a:solidFill>
-                  <a:srgbClr val="03045E"/>
-                </a:solidFill>
                 <a:latin typeface="Montserrat Medium"/>
               </a:rPr>
-              <a:t>•  </a:t>
-            </a:r>
-            <a:r>
-              <a:rPr sz="1100" b="0" i="0">
-                <a:solidFill>
-                  <a:srgbClr val="302E2E"/>
+              <a:t>▸ </a:t>
+            </a:r>
+            <a:r>
+              <a:rPr sz="900" b="0" i="1">
+                <a:solidFill>
+                  <a:srgbClr val="8A8A8A"/>
                 </a:solidFill>
                 <a:latin typeface="Montserrat Medium"/>
               </a:rPr>
-              <a:t>[Region A] is ~two-thirds of total value</a:t>
-            </a:r>
-          </a:p>
-          <a:p>
-            <a:pPr algn="l">
-              <a:lnSpc>
-                <a:spcPct val="108000"/>
-              </a:lnSpc>
-              <a:spcBef>
-                <a:spcPts val="0"/>
-              </a:spcBef>
-              <a:spcAft>
-                <a:spcPts val="700"/>
-              </a:spcAft>
-            </a:pPr>
-            <a:r>
-              <a:rPr sz="1100" b="1" i="0">
-                <a:solidFill>
-                  <a:srgbClr val="03045E"/>
-                </a:solidFill>
-                <a:latin typeface="Montserrat Medium"/>
-              </a:rPr>
-              <a:t>•  </a:t>
-            </a:r>
-            <a:r>
-              <a:rPr sz="1100" b="0" i="0">
-                <a:solidFill>
-                  <a:srgbClr val="302E2E"/>
-                </a:solidFill>
-                <a:latin typeface="Montserrat Medium"/>
-              </a:rPr>
-              <a:t>[Region B] is second despite fewer [deals/units]</a:t>
-            </a:r>
-          </a:p>
-          <a:p>
-            <a:pPr algn="l">
-              <a:lnSpc>
-                <a:spcPct val="108000"/>
-              </a:lnSpc>
-              <a:spcBef>
-                <a:spcPts val="0"/>
-              </a:spcBef>
-              <a:spcAft>
-                <a:spcPts val="700"/>
-              </a:spcAft>
-            </a:pPr>
-            <a:r>
-              <a:rPr sz="1100" b="1" i="0">
-                <a:solidFill>
-                  <a:srgbClr val="03045E"/>
-                </a:solidFill>
-                <a:latin typeface="Montserrat Medium"/>
-              </a:rPr>
-              <a:t>•  </a:t>
-            </a:r>
-            <a:r>
-              <a:rPr sz="1100" b="0" i="0">
-                <a:solidFill>
-                  <a:srgbClr val="302E2E"/>
-                </a:solidFill>
-                <a:latin typeface="Montserrat Medium"/>
-              </a:rPr>
-              <a:t>[Region C] remains underpenetrated</a:t>
+              <a:t>Each driver is estimated per segment (Geography · Deal size · Customer · Provider); the segment cross-product is modelled, not shown here.</a:t>
             </a:r>
           </a:p>
         </p:txBody>
@@ -10292,7 +13723,7 @@
                 </a:solidFill>
                 <a:latin typeface="Montserrat"/>
               </a:rPr>
-              <a:t>Trajectory</a:t>
+              <a:t>Headline TAM view</a:t>
             </a:r>
           </a:p>
         </p:txBody>
@@ -10337,7 +13768,7 @@
                 </a:solidFill>
                 <a:latin typeface="Montserrat Medium"/>
               </a:rPr>
-              <a:t>Source: aqmen analysis</a:t>
+              <a:t>Source: [sources], aqmen</a:t>
             </a:r>
           </a:p>
         </p:txBody>
@@ -10427,7 +13858,7 @@
                 </a:solidFill>
                 <a:latin typeface="Montserrat"/>
               </a:rPr>
-              <a:t>The market is [recovering / growing] at ~[X]% through [year]</a:t>
+              <a:t>The TAM is a ~$[XX]B opportunity, led by [Region]</a:t>
             </a:r>
           </a:p>
         </p:txBody>
@@ -10440,8 +13871,58 @@
         </p:nvSpPr>
         <p:spPr>
           <a:xfrm>
-            <a:off x="502920" y="1691640"/>
-            <a:ext cx="7269480" cy="320040"/>
+            <a:off x="10362895" y="1536192"/>
+            <a:ext cx="1554480" cy="219456"/>
+          </a:xfrm>
+          <a:prstGeom prst="rect">
+            <a:avLst/>
+          </a:prstGeom>
+          <a:noFill/>
+          <a:ln w="6350">
+            <a:solidFill>
+              <a:srgbClr val="8A8A8A"/>
+            </a:solidFill>
+          </a:ln>
+        </p:spPr>
+        <p:txBody>
+          <a:bodyPr wrap="square" anchor="ctr" lIns="0" rIns="0" tIns="0" bIns="0">
+            <a:spAutoFit/>
+          </a:bodyPr>
+          <a:lstStyle/>
+          <a:p>
+            <a:pPr algn="ctr">
+              <a:lnSpc>
+                <a:spcPct val="105000"/>
+              </a:lnSpc>
+              <a:spcBef>
+                <a:spcPts val="0"/>
+              </a:spcBef>
+              <a:spcAft>
+                <a:spcPts val="200"/>
+              </a:spcAft>
+            </a:pPr>
+            <a:r>
+              <a:rPr sz="850" b="0" i="0">
+                <a:solidFill>
+                  <a:srgbClr val="302E2E"/>
+                </a:solidFill>
+                <a:latin typeface="Montserrat Medium"/>
+              </a:rPr>
+              <a:t>ILLUSTRATIVE</a:t>
+            </a:r>
+          </a:p>
+        </p:txBody>
+      </p:sp>
+      <p:sp>
+        <p:nvSpPr>
+          <p:cNvPr id="8" name="TextBox 7"/>
+          <p:cNvSpPr txBox="1"/>
+          <p:nvPr/>
+        </p:nvSpPr>
+        <p:spPr>
+          <a:xfrm>
+            <a:off x="502920" y="1645920"/>
+            <a:ext cx="11185855" cy="320040"/>
           </a:xfrm>
           <a:prstGeom prst="rect">
             <a:avLst/>
@@ -10472,76 +13953,112 @@
                 </a:solidFill>
                 <a:latin typeface="Montserrat"/>
               </a:rPr>
-              <a:t>[Market] size, $B</a:t>
-            </a:r>
-          </a:p>
-        </p:txBody>
-      </p:sp>
-      <p:graphicFrame>
-        <p:nvGraphicFramePr>
-          <p:cNvPr id="8" name="Chart 7"/>
-          <p:cNvGraphicFramePr>
-            <a:graphicFrameLocks noGrp="1"/>
-          </p:cNvGraphicFramePr>
-          <p:nvPr/>
-        </p:nvGraphicFramePr>
-        <p:xfrm>
-          <a:off x="502920" y="2103120"/>
-          <a:ext cx="7269480" cy="4251960"/>
-        </p:xfrm>
-        <a:graphic>
-          <a:graphicData uri="http://schemas.openxmlformats.org/drawingml/2006/chart">
-            <c:chart xmlns:c="http://schemas.openxmlformats.org/drawingml/2006/chart" r:id="rId2"/>
-          </a:graphicData>
-        </a:graphic>
-      </p:graphicFrame>
-      <p:cxnSp>
-        <p:nvCxnSpPr>
-          <p:cNvPr id="9" name="Connector 8"/>
-          <p:cNvCxnSpPr/>
-          <p:nvPr/>
-        </p:nvCxnSpPr>
-        <p:spPr>
-          <a:xfrm>
-            <a:off x="8001000" y="1463040"/>
-            <a:ext cx="0" cy="4892040"/>
-          </a:xfrm>
-          <a:prstGeom prst="bentConnector3">
-            <a:avLst/>
-          </a:prstGeom>
-          <a:ln w="12700">
-            <a:solidFill>
-              <a:srgbClr val="C9CBD6"/>
-            </a:solidFill>
+              <a:t>[Market] TAM by region, [base year] $B</a:t>
+            </a:r>
+          </a:p>
+        </p:txBody>
+      </p:sp>
+      <p:sp>
+        <p:nvSpPr>
+          <p:cNvPr id="9" name="Rectangle 8"/>
+          <p:cNvSpPr/>
+          <p:nvPr/>
+        </p:nvSpPr>
+        <p:spPr>
+          <a:xfrm>
+            <a:off x="502920" y="2075688"/>
+            <a:ext cx="146304" cy="146304"/>
+          </a:xfrm>
+          <a:prstGeom prst="rect">
+            <a:avLst/>
+          </a:prstGeom>
+          <a:solidFill>
+            <a:srgbClr val="D6EEF5"/>
+          </a:solidFill>
+          <a:ln>
+            <a:noFill/>
           </a:ln>
+          <a:effectLst/>
         </p:spPr>
         <p:style>
-          <a:lnRef idx="2">
+          <a:lnRef idx="1">
             <a:schemeClr val="accent1"/>
           </a:lnRef>
-          <a:fillRef idx="0">
+          <a:fillRef idx="3">
             <a:schemeClr val="accent1"/>
           </a:fillRef>
-          <a:effectRef idx="1">
+          <a:effectRef idx="2">
             <a:schemeClr val="accent1"/>
           </a:effectRef>
           <a:fontRef idx="minor">
-            <a:schemeClr val="tx1"/>
+            <a:schemeClr val="lt1"/>
           </a:fontRef>
         </p:style>
-      </p:cxnSp>
-      <p:sp>
-        <p:nvSpPr>
-          <p:cNvPr id="10" name="Isosceles Triangle 9"/>
+        <p:txBody>
+          <a:bodyPr rtlCol="0" anchor="ctr"/>
+          <a:lstStyle/>
+          <a:p>
+            <a:pPr algn="ctr"/>
+          </a:p>
+        </p:txBody>
+      </p:sp>
+      <p:sp>
+        <p:nvSpPr>
+          <p:cNvPr id="10" name="TextBox 9"/>
+          <p:cNvSpPr txBox="1"/>
+          <p:nvPr/>
+        </p:nvSpPr>
+        <p:spPr>
+          <a:xfrm>
+            <a:off x="722376" y="2048256"/>
+            <a:ext cx="2011680" cy="228600"/>
+          </a:xfrm>
+          <a:prstGeom prst="rect">
+            <a:avLst/>
+          </a:prstGeom>
+          <a:noFill/>
+        </p:spPr>
+        <p:txBody>
+          <a:bodyPr wrap="square" anchor="ctr" lIns="0" rIns="0" tIns="0" bIns="0">
+            <a:spAutoFit/>
+          </a:bodyPr>
+          <a:lstStyle/>
+          <a:p>
+            <a:pPr algn="l">
+              <a:lnSpc>
+                <a:spcPct val="105000"/>
+              </a:lnSpc>
+              <a:spcBef>
+                <a:spcPts val="0"/>
+              </a:spcBef>
+              <a:spcAft>
+                <a:spcPts val="200"/>
+              </a:spcAft>
+            </a:pPr>
+            <a:r>
+              <a:rPr sz="950" b="0" i="0">
+                <a:solidFill>
+                  <a:srgbClr val="302E2E"/>
+                </a:solidFill>
+                <a:latin typeface="Montserrat Medium"/>
+              </a:rPr>
+              <a:t>Whitespace</a:t>
+            </a:r>
+          </a:p>
+        </p:txBody>
+      </p:sp>
+      <p:sp>
+        <p:nvSpPr>
+          <p:cNvPr id="11" name="Rectangle 10"/>
           <p:cNvSpPr/>
           <p:nvPr/>
         </p:nvSpPr>
         <p:spPr>
-          <a:xfrm rot="5400000">
-            <a:off x="8275320" y="1490472"/>
-            <a:ext cx="201168" cy="201168"/>
-          </a:xfrm>
-          <a:prstGeom prst="triangle">
+          <a:xfrm>
+            <a:off x="1865376" y="2075688"/>
+            <a:ext cx="146304" cy="146304"/>
+          </a:xfrm>
+          <a:prstGeom prst="rect">
             <a:avLst/>
           </a:prstGeom>
           <a:solidFill>
@@ -10576,14 +14093,59 @@
       </p:sp>
       <p:sp>
         <p:nvSpPr>
-          <p:cNvPr id="11" name="TextBox 10"/>
+          <p:cNvPr id="12" name="TextBox 11"/>
           <p:cNvSpPr txBox="1"/>
           <p:nvPr/>
         </p:nvSpPr>
         <p:spPr>
           <a:xfrm>
-            <a:off x="8567928" y="1472184"/>
-            <a:ext cx="3136392" cy="274320"/>
+            <a:off x="2084832" y="2048256"/>
+            <a:ext cx="2011680" cy="228600"/>
+          </a:xfrm>
+          <a:prstGeom prst="rect">
+            <a:avLst/>
+          </a:prstGeom>
+          <a:noFill/>
+        </p:spPr>
+        <p:txBody>
+          <a:bodyPr wrap="square" anchor="ctr" lIns="0" rIns="0" tIns="0" bIns="0">
+            <a:spAutoFit/>
+          </a:bodyPr>
+          <a:lstStyle/>
+          <a:p>
+            <a:pPr algn="l">
+              <a:lnSpc>
+                <a:spcPct val="105000"/>
+              </a:lnSpc>
+              <a:spcBef>
+                <a:spcPts val="0"/>
+              </a:spcBef>
+              <a:spcAft>
+                <a:spcPts val="200"/>
+              </a:spcAft>
+            </a:pPr>
+            <a:r>
+              <a:rPr sz="950" b="0" i="0">
+                <a:solidFill>
+                  <a:srgbClr val="302E2E"/>
+                </a:solidFill>
+                <a:latin typeface="Montserrat Medium"/>
+              </a:rPr>
+              <a:t>SAM</a:t>
+            </a:r>
+          </a:p>
+        </p:txBody>
+      </p:sp>
+      <p:sp>
+        <p:nvSpPr>
+          <p:cNvPr id="13" name="TextBox 12"/>
+          <p:cNvSpPr txBox="1"/>
+          <p:nvPr/>
+        </p:nvSpPr>
+        <p:spPr>
+          <a:xfrm>
+            <a:off x="502920" y="2286000"/>
+            <a:ext cx="4270071" cy="411480"/>
           </a:xfrm>
           <a:prstGeom prst="rect">
             <a:avLst/>
@@ -10596,7 +14158,7 @@
           </a:bodyPr>
           <a:lstStyle/>
           <a:p>
-            <a:pPr algn="l">
+            <a:pPr algn="ctr">
               <a:lnSpc>
                 <a:spcPct val="105000"/>
               </a:lnSpc>
@@ -10608,27 +14170,236 @@
               </a:spcAft>
             </a:pPr>
             <a:r>
-              <a:rPr sz="1300" b="1" i="0">
+              <a:rPr sz="1200" b="1" i="0">
                 <a:solidFill>
                   <a:srgbClr val="03045E"/>
                 </a:solidFill>
-                <a:latin typeface="Montserrat"/>
-              </a:rPr>
-              <a:t>Key Takeaways</a:t>
-            </a:r>
-          </a:p>
-        </p:txBody>
-      </p:sp>
-      <p:sp>
-        <p:nvSpPr>
-          <p:cNvPr id="12" name="TextBox 11"/>
+                <a:latin typeface="Montserrat Medium"/>
+              </a:rPr>
+              <a:t>53.3</a:t>
+            </a:r>
+          </a:p>
+          <a:p>
+            <a:pPr algn="ctr">
+              <a:lnSpc>
+                <a:spcPct val="105000"/>
+              </a:lnSpc>
+              <a:spcBef>
+                <a:spcPts val="0"/>
+              </a:spcBef>
+              <a:spcAft>
+                <a:spcPts val="200"/>
+              </a:spcAft>
+            </a:pPr>
+            <a:r>
+              <a:rPr sz="1000" b="0" i="1">
+                <a:solidFill>
+                  <a:srgbClr val="8A8A8A"/>
+                </a:solidFill>
+                <a:latin typeface="Montserrat Medium"/>
+              </a:rPr>
+              <a:t>(61%)</a:t>
+            </a:r>
+          </a:p>
+        </p:txBody>
+      </p:sp>
+      <p:sp>
+        <p:nvSpPr>
+          <p:cNvPr id="14" name="Rectangle 13"/>
+          <p:cNvSpPr/>
+          <p:nvPr/>
+        </p:nvSpPr>
+        <p:spPr>
+          <a:xfrm>
+            <a:off x="502920" y="2743200"/>
+            <a:ext cx="4270071" cy="2878043"/>
+          </a:xfrm>
+          <a:prstGeom prst="rect">
+            <a:avLst/>
+          </a:prstGeom>
+          <a:pattFill prst="ltDnDiag">
+            <a:fgClr>
+              <a:srgbClr val="6BAED6"/>
+            </a:fgClr>
+            <a:bgClr>
+              <a:srgbClr val="FEFFFF"/>
+            </a:bgClr>
+          </a:pattFill>
+          <a:ln w="12700">
+            <a:solidFill>
+              <a:srgbClr val="FEFFFF"/>
+            </a:solidFill>
+          </a:ln>
+          <a:effectLst/>
+        </p:spPr>
+        <p:style>
+          <a:lnRef idx="1">
+            <a:schemeClr val="accent1"/>
+          </a:lnRef>
+          <a:fillRef idx="3">
+            <a:schemeClr val="accent1"/>
+          </a:fillRef>
+          <a:effectRef idx="2">
+            <a:schemeClr val="accent1"/>
+          </a:effectRef>
+          <a:fontRef idx="minor">
+            <a:schemeClr val="lt1"/>
+          </a:fontRef>
+        </p:style>
+        <p:txBody>
+          <a:bodyPr rtlCol="0" anchor="ctr"/>
+          <a:lstStyle/>
+          <a:p>
+            <a:pPr algn="ctr"/>
+          </a:p>
+        </p:txBody>
+      </p:sp>
+      <p:sp>
+        <p:nvSpPr>
+          <p:cNvPr id="15" name="TextBox 14"/>
           <p:cNvSpPr txBox="1"/>
           <p:nvPr/>
         </p:nvSpPr>
         <p:spPr>
           <a:xfrm>
-            <a:off x="8275320" y="1920240"/>
-            <a:ext cx="3429000" cy="4434840"/>
+            <a:off x="502920" y="2743200"/>
+            <a:ext cx="4270071" cy="2878043"/>
+          </a:xfrm>
+          <a:prstGeom prst="rect">
+            <a:avLst/>
+          </a:prstGeom>
+          <a:noFill/>
+        </p:spPr>
+        <p:txBody>
+          <a:bodyPr wrap="square" anchor="ctr" lIns="0" rIns="0" tIns="0" bIns="0">
+            <a:spAutoFit/>
+          </a:bodyPr>
+          <a:lstStyle/>
+          <a:p>
+            <a:pPr algn="ctr">
+              <a:lnSpc>
+                <a:spcPct val="105000"/>
+              </a:lnSpc>
+              <a:spcBef>
+                <a:spcPts val="0"/>
+              </a:spcBef>
+              <a:spcAft>
+                <a:spcPts val="200"/>
+              </a:spcAft>
+            </a:pPr>
+            <a:r>
+              <a:rPr sz="1000" b="1" i="0">
+                <a:solidFill>
+                  <a:srgbClr val="03045E"/>
+                </a:solidFill>
+                <a:latin typeface="Montserrat Medium"/>
+              </a:rPr>
+              <a:t>46.6</a:t>
+            </a:r>
+          </a:p>
+        </p:txBody>
+      </p:sp>
+      <p:sp>
+        <p:nvSpPr>
+          <p:cNvPr id="16" name="Rectangle 15"/>
+          <p:cNvSpPr/>
+          <p:nvPr/>
+        </p:nvSpPr>
+        <p:spPr>
+          <a:xfrm>
+            <a:off x="502920" y="5621243"/>
+            <a:ext cx="4270071" cy="413796"/>
+          </a:xfrm>
+          <a:prstGeom prst="rect">
+            <a:avLst/>
+          </a:prstGeom>
+          <a:solidFill>
+            <a:srgbClr val="03045E"/>
+          </a:solidFill>
+          <a:ln w="12700">
+            <a:solidFill>
+              <a:srgbClr val="FEFFFF"/>
+            </a:solidFill>
+          </a:ln>
+          <a:effectLst/>
+        </p:spPr>
+        <p:style>
+          <a:lnRef idx="1">
+            <a:schemeClr val="accent1"/>
+          </a:lnRef>
+          <a:fillRef idx="3">
+            <a:schemeClr val="accent1"/>
+          </a:fillRef>
+          <a:effectRef idx="2">
+            <a:schemeClr val="accent1"/>
+          </a:effectRef>
+          <a:fontRef idx="minor">
+            <a:schemeClr val="lt1"/>
+          </a:fontRef>
+        </p:style>
+        <p:txBody>
+          <a:bodyPr rtlCol="0" anchor="ctr"/>
+          <a:lstStyle/>
+          <a:p>
+            <a:pPr algn="ctr"/>
+          </a:p>
+        </p:txBody>
+      </p:sp>
+      <p:sp>
+        <p:nvSpPr>
+          <p:cNvPr id="17" name="TextBox 16"/>
+          <p:cNvSpPr txBox="1"/>
+          <p:nvPr/>
+        </p:nvSpPr>
+        <p:spPr>
+          <a:xfrm>
+            <a:off x="502920" y="5621243"/>
+            <a:ext cx="4270071" cy="413796"/>
+          </a:xfrm>
+          <a:prstGeom prst="rect">
+            <a:avLst/>
+          </a:prstGeom>
+          <a:noFill/>
+        </p:spPr>
+        <p:txBody>
+          <a:bodyPr wrap="square" anchor="ctr" lIns="0" rIns="0" tIns="0" bIns="0">
+            <a:spAutoFit/>
+          </a:bodyPr>
+          <a:lstStyle/>
+          <a:p>
+            <a:pPr algn="ctr">
+              <a:lnSpc>
+                <a:spcPct val="105000"/>
+              </a:lnSpc>
+              <a:spcBef>
+                <a:spcPts val="0"/>
+              </a:spcBef>
+              <a:spcAft>
+                <a:spcPts val="200"/>
+              </a:spcAft>
+            </a:pPr>
+            <a:r>
+              <a:rPr sz="1000" b="1" i="0">
+                <a:solidFill>
+                  <a:srgbClr val="FEFFFF"/>
+                </a:solidFill>
+                <a:latin typeface="Montserrat Medium"/>
+              </a:rPr>
+              <a:t>6.7</a:t>
+            </a:r>
+          </a:p>
+        </p:txBody>
+      </p:sp>
+      <p:sp>
+        <p:nvSpPr>
+          <p:cNvPr id="18" name="TextBox 17"/>
+          <p:cNvSpPr txBox="1"/>
+          <p:nvPr/>
+        </p:nvSpPr>
+        <p:spPr>
+          <a:xfrm>
+            <a:off x="502920" y="6080760"/>
+            <a:ext cx="4270071" cy="274320"/>
           </a:xfrm>
           <a:prstGeom prst="rect">
             <a:avLst/>
@@ -10641,8 +14412,775 @@
           </a:bodyPr>
           <a:lstStyle/>
           <a:p>
+            <a:pPr algn="ctr">
+              <a:lnSpc>
+                <a:spcPct val="105000"/>
+              </a:lnSpc>
+              <a:spcBef>
+                <a:spcPts val="0"/>
+              </a:spcBef>
+              <a:spcAft>
+                <a:spcPts val="200"/>
+              </a:spcAft>
+            </a:pPr>
+            <a:r>
+              <a:rPr sz="1050" b="1" i="0">
+                <a:solidFill>
+                  <a:srgbClr val="03045E"/>
+                </a:solidFill>
+                <a:latin typeface="Montserrat"/>
+              </a:rPr>
+              <a:t>[Region A]</a:t>
+            </a:r>
+          </a:p>
+        </p:txBody>
+      </p:sp>
+      <p:sp>
+        <p:nvSpPr>
+          <p:cNvPr id="19" name="TextBox 18"/>
+          <p:cNvSpPr txBox="1"/>
+          <p:nvPr/>
+        </p:nvSpPr>
+        <p:spPr>
+          <a:xfrm>
+            <a:off x="4882719" y="2286000"/>
+            <a:ext cx="1674380" cy="411480"/>
+          </a:xfrm>
+          <a:prstGeom prst="rect">
+            <a:avLst/>
+          </a:prstGeom>
+          <a:noFill/>
+        </p:spPr>
+        <p:txBody>
+          <a:bodyPr wrap="square" anchor="t" lIns="0" rIns="0" tIns="0" bIns="0">
+            <a:spAutoFit/>
+          </a:bodyPr>
+          <a:lstStyle/>
+          <a:p>
+            <a:pPr algn="ctr">
+              <a:lnSpc>
+                <a:spcPct val="105000"/>
+              </a:lnSpc>
+              <a:spcBef>
+                <a:spcPts val="0"/>
+              </a:spcBef>
+              <a:spcAft>
+                <a:spcPts val="200"/>
+              </a:spcAft>
+            </a:pPr>
+            <a:r>
+              <a:rPr sz="1200" b="1" i="0">
+                <a:solidFill>
+                  <a:srgbClr val="03045E"/>
+                </a:solidFill>
+                <a:latin typeface="Montserrat Medium"/>
+              </a:rPr>
+              <a:t>20.8</a:t>
+            </a:r>
+          </a:p>
+          <a:p>
+            <a:pPr algn="ctr">
+              <a:lnSpc>
+                <a:spcPct val="105000"/>
+              </a:lnSpc>
+              <a:spcBef>
+                <a:spcPts val="0"/>
+              </a:spcBef>
+              <a:spcAft>
+                <a:spcPts val="200"/>
+              </a:spcAft>
+            </a:pPr>
+            <a:r>
+              <a:rPr sz="1000" b="0" i="1">
+                <a:solidFill>
+                  <a:srgbClr val="8A8A8A"/>
+                </a:solidFill>
+                <a:latin typeface="Montserrat Medium"/>
+              </a:rPr>
+              <a:t>(24%)</a:t>
+            </a:r>
+          </a:p>
+        </p:txBody>
+      </p:sp>
+      <p:sp>
+        <p:nvSpPr>
+          <p:cNvPr id="20" name="Rectangle 19"/>
+          <p:cNvSpPr/>
+          <p:nvPr/>
+        </p:nvSpPr>
+        <p:spPr>
+          <a:xfrm>
+            <a:off x="4882719" y="2743200"/>
+            <a:ext cx="1674380" cy="1136395"/>
+          </a:xfrm>
+          <a:prstGeom prst="rect">
+            <a:avLst/>
+          </a:prstGeom>
+          <a:pattFill prst="ltDnDiag">
+            <a:fgClr>
+              <a:srgbClr val="6BAED6"/>
+            </a:fgClr>
+            <a:bgClr>
+              <a:srgbClr val="FEFFFF"/>
+            </a:bgClr>
+          </a:pattFill>
+          <a:ln w="12700">
+            <a:solidFill>
+              <a:srgbClr val="FEFFFF"/>
+            </a:solidFill>
+          </a:ln>
+          <a:effectLst/>
+        </p:spPr>
+        <p:style>
+          <a:lnRef idx="1">
+            <a:schemeClr val="accent1"/>
+          </a:lnRef>
+          <a:fillRef idx="3">
+            <a:schemeClr val="accent1"/>
+          </a:fillRef>
+          <a:effectRef idx="2">
+            <a:schemeClr val="accent1"/>
+          </a:effectRef>
+          <a:fontRef idx="minor">
+            <a:schemeClr val="lt1"/>
+          </a:fontRef>
+        </p:style>
+        <p:txBody>
+          <a:bodyPr rtlCol="0" anchor="ctr"/>
+          <a:lstStyle/>
+          <a:p>
+            <a:pPr algn="ctr"/>
+          </a:p>
+        </p:txBody>
+      </p:sp>
+      <p:sp>
+        <p:nvSpPr>
+          <p:cNvPr id="21" name="TextBox 20"/>
+          <p:cNvSpPr txBox="1"/>
+          <p:nvPr/>
+        </p:nvSpPr>
+        <p:spPr>
+          <a:xfrm>
+            <a:off x="4882719" y="2743200"/>
+            <a:ext cx="1674380" cy="1136395"/>
+          </a:xfrm>
+          <a:prstGeom prst="rect">
+            <a:avLst/>
+          </a:prstGeom>
+          <a:noFill/>
+        </p:spPr>
+        <p:txBody>
+          <a:bodyPr wrap="square" anchor="ctr" lIns="0" rIns="0" tIns="0" bIns="0">
+            <a:spAutoFit/>
+          </a:bodyPr>
+          <a:lstStyle/>
+          <a:p>
+            <a:pPr algn="ctr">
+              <a:lnSpc>
+                <a:spcPct val="105000"/>
+              </a:lnSpc>
+              <a:spcBef>
+                <a:spcPts val="0"/>
+              </a:spcBef>
+              <a:spcAft>
+                <a:spcPts val="200"/>
+              </a:spcAft>
+            </a:pPr>
+            <a:r>
+              <a:rPr sz="1000" b="1" i="0">
+                <a:solidFill>
+                  <a:srgbClr val="03045E"/>
+                </a:solidFill>
+                <a:latin typeface="Montserrat Medium"/>
+              </a:rPr>
+              <a:t>18.4</a:t>
+            </a:r>
+          </a:p>
+        </p:txBody>
+      </p:sp>
+      <p:sp>
+        <p:nvSpPr>
+          <p:cNvPr id="22" name="Rectangle 21"/>
+          <p:cNvSpPr/>
+          <p:nvPr/>
+        </p:nvSpPr>
+        <p:spPr>
+          <a:xfrm>
+            <a:off x="4882719" y="3879595"/>
+            <a:ext cx="1674380" cy="148225"/>
+          </a:xfrm>
+          <a:prstGeom prst="rect">
+            <a:avLst/>
+          </a:prstGeom>
+          <a:solidFill>
+            <a:srgbClr val="03045E"/>
+          </a:solidFill>
+          <a:ln w="12700">
+            <a:solidFill>
+              <a:srgbClr val="FEFFFF"/>
+            </a:solidFill>
+          </a:ln>
+          <a:effectLst/>
+        </p:spPr>
+        <p:style>
+          <a:lnRef idx="1">
+            <a:schemeClr val="accent1"/>
+          </a:lnRef>
+          <a:fillRef idx="3">
+            <a:schemeClr val="accent1"/>
+          </a:fillRef>
+          <a:effectRef idx="2">
+            <a:schemeClr val="accent1"/>
+          </a:effectRef>
+          <a:fontRef idx="minor">
+            <a:schemeClr val="lt1"/>
+          </a:fontRef>
+        </p:style>
+        <p:txBody>
+          <a:bodyPr rtlCol="0" anchor="ctr"/>
+          <a:lstStyle/>
+          <a:p>
+            <a:pPr algn="ctr"/>
+          </a:p>
+        </p:txBody>
+      </p:sp>
+      <p:sp>
+        <p:nvSpPr>
+          <p:cNvPr id="23" name="TextBox 22"/>
+          <p:cNvSpPr txBox="1"/>
+          <p:nvPr/>
+        </p:nvSpPr>
+        <p:spPr>
+          <a:xfrm>
+            <a:off x="4882719" y="3879595"/>
+            <a:ext cx="1674380" cy="148225"/>
+          </a:xfrm>
+          <a:prstGeom prst="rect">
+            <a:avLst/>
+          </a:prstGeom>
+          <a:noFill/>
+        </p:spPr>
+        <p:txBody>
+          <a:bodyPr wrap="square" anchor="ctr" lIns="0" rIns="0" tIns="0" bIns="0">
+            <a:spAutoFit/>
+          </a:bodyPr>
+          <a:lstStyle/>
+          <a:p>
+            <a:pPr algn="ctr">
+              <a:lnSpc>
+                <a:spcPct val="105000"/>
+              </a:lnSpc>
+              <a:spcBef>
+                <a:spcPts val="0"/>
+              </a:spcBef>
+              <a:spcAft>
+                <a:spcPts val="200"/>
+              </a:spcAft>
+            </a:pPr>
+            <a:r>
+              <a:rPr sz="1000" b="1" i="0">
+                <a:solidFill>
+                  <a:srgbClr val="FEFFFF"/>
+                </a:solidFill>
+                <a:latin typeface="Montserrat Medium"/>
+              </a:rPr>
+              <a:t>2.4</a:t>
+            </a:r>
+          </a:p>
+        </p:txBody>
+      </p:sp>
+      <p:sp>
+        <p:nvSpPr>
+          <p:cNvPr id="24" name="TextBox 23"/>
+          <p:cNvSpPr txBox="1"/>
+          <p:nvPr/>
+        </p:nvSpPr>
+        <p:spPr>
+          <a:xfrm>
+            <a:off x="4882719" y="6080760"/>
+            <a:ext cx="1674380" cy="274320"/>
+          </a:xfrm>
+          <a:prstGeom prst="rect">
+            <a:avLst/>
+          </a:prstGeom>
+          <a:noFill/>
+        </p:spPr>
+        <p:txBody>
+          <a:bodyPr wrap="square" anchor="t" lIns="0" rIns="0" tIns="0" bIns="0">
+            <a:spAutoFit/>
+          </a:bodyPr>
+          <a:lstStyle/>
+          <a:p>
+            <a:pPr algn="ctr">
+              <a:lnSpc>
+                <a:spcPct val="105000"/>
+              </a:lnSpc>
+              <a:spcBef>
+                <a:spcPts val="0"/>
+              </a:spcBef>
+              <a:spcAft>
+                <a:spcPts val="200"/>
+              </a:spcAft>
+            </a:pPr>
+            <a:r>
+              <a:rPr sz="1050" b="1" i="0">
+                <a:solidFill>
+                  <a:srgbClr val="03045E"/>
+                </a:solidFill>
+                <a:latin typeface="Montserrat"/>
+              </a:rPr>
+              <a:t>[Region B]</a:t>
+            </a:r>
+          </a:p>
+        </p:txBody>
+      </p:sp>
+      <p:sp>
+        <p:nvSpPr>
+          <p:cNvPr id="25" name="TextBox 24"/>
+          <p:cNvSpPr txBox="1"/>
+          <p:nvPr/>
+        </p:nvSpPr>
+        <p:spPr>
+          <a:xfrm>
+            <a:off x="6666827" y="2286000"/>
+            <a:ext cx="1105571" cy="411480"/>
+          </a:xfrm>
+          <a:prstGeom prst="rect">
+            <a:avLst/>
+          </a:prstGeom>
+          <a:noFill/>
+        </p:spPr>
+        <p:txBody>
+          <a:bodyPr wrap="square" anchor="t" lIns="0" rIns="0" tIns="0" bIns="0">
+            <a:spAutoFit/>
+          </a:bodyPr>
+          <a:lstStyle/>
+          <a:p>
+            <a:pPr algn="ctr">
+              <a:lnSpc>
+                <a:spcPct val="105000"/>
+              </a:lnSpc>
+              <a:spcBef>
+                <a:spcPts val="0"/>
+              </a:spcBef>
+              <a:spcAft>
+                <a:spcPts val="200"/>
+              </a:spcAft>
+            </a:pPr>
+            <a:r>
+              <a:rPr sz="1200" b="1" i="0">
+                <a:solidFill>
+                  <a:srgbClr val="03045E"/>
+                </a:solidFill>
+                <a:latin typeface="Montserrat Medium"/>
+              </a:rPr>
+              <a:t>13.8</a:t>
+            </a:r>
+          </a:p>
+          <a:p>
+            <a:pPr algn="ctr">
+              <a:lnSpc>
+                <a:spcPct val="105000"/>
+              </a:lnSpc>
+              <a:spcBef>
+                <a:spcPts val="0"/>
+              </a:spcBef>
+              <a:spcAft>
+                <a:spcPts val="200"/>
+              </a:spcAft>
+            </a:pPr>
+            <a:r>
+              <a:rPr sz="1000" b="0" i="1">
+                <a:solidFill>
+                  <a:srgbClr val="8A8A8A"/>
+                </a:solidFill>
+                <a:latin typeface="Montserrat Medium"/>
+              </a:rPr>
+              <a:t>(16%)</a:t>
+            </a:r>
+          </a:p>
+        </p:txBody>
+      </p:sp>
+      <p:sp>
+        <p:nvSpPr>
+          <p:cNvPr id="26" name="Rectangle 25"/>
+          <p:cNvSpPr/>
+          <p:nvPr/>
+        </p:nvSpPr>
+        <p:spPr>
+          <a:xfrm>
+            <a:off x="6666827" y="2743200"/>
+            <a:ext cx="1105571" cy="772007"/>
+          </a:xfrm>
+          <a:prstGeom prst="rect">
+            <a:avLst/>
+          </a:prstGeom>
+          <a:pattFill prst="ltDnDiag">
+            <a:fgClr>
+              <a:srgbClr val="6BAED6"/>
+            </a:fgClr>
+            <a:bgClr>
+              <a:srgbClr val="FEFFFF"/>
+            </a:bgClr>
+          </a:pattFill>
+          <a:ln w="12700">
+            <a:solidFill>
+              <a:srgbClr val="FEFFFF"/>
+            </a:solidFill>
+          </a:ln>
+          <a:effectLst/>
+        </p:spPr>
+        <p:style>
+          <a:lnRef idx="1">
+            <a:schemeClr val="accent1"/>
+          </a:lnRef>
+          <a:fillRef idx="3">
+            <a:schemeClr val="accent1"/>
+          </a:fillRef>
+          <a:effectRef idx="2">
+            <a:schemeClr val="accent1"/>
+          </a:effectRef>
+          <a:fontRef idx="minor">
+            <a:schemeClr val="lt1"/>
+          </a:fontRef>
+        </p:style>
+        <p:txBody>
+          <a:bodyPr rtlCol="0" anchor="ctr"/>
+          <a:lstStyle/>
+          <a:p>
+            <a:pPr algn="ctr"/>
+          </a:p>
+        </p:txBody>
+      </p:sp>
+      <p:sp>
+        <p:nvSpPr>
+          <p:cNvPr id="27" name="TextBox 26"/>
+          <p:cNvSpPr txBox="1"/>
+          <p:nvPr/>
+        </p:nvSpPr>
+        <p:spPr>
+          <a:xfrm>
+            <a:off x="6666827" y="2743200"/>
+            <a:ext cx="1105571" cy="772007"/>
+          </a:xfrm>
+          <a:prstGeom prst="rect">
+            <a:avLst/>
+          </a:prstGeom>
+          <a:noFill/>
+        </p:spPr>
+        <p:txBody>
+          <a:bodyPr wrap="square" anchor="ctr" lIns="0" rIns="0" tIns="0" bIns="0">
+            <a:spAutoFit/>
+          </a:bodyPr>
+          <a:lstStyle/>
+          <a:p>
+            <a:pPr algn="ctr">
+              <a:lnSpc>
+                <a:spcPct val="105000"/>
+              </a:lnSpc>
+              <a:spcBef>
+                <a:spcPts val="0"/>
+              </a:spcBef>
+              <a:spcAft>
+                <a:spcPts val="200"/>
+              </a:spcAft>
+            </a:pPr>
+            <a:r>
+              <a:rPr sz="1000" b="1" i="0">
+                <a:solidFill>
+                  <a:srgbClr val="03045E"/>
+                </a:solidFill>
+                <a:latin typeface="Montserrat Medium"/>
+              </a:rPr>
+              <a:t>12.5</a:t>
+            </a:r>
+          </a:p>
+        </p:txBody>
+      </p:sp>
+      <p:sp>
+        <p:nvSpPr>
+          <p:cNvPr id="28" name="Rectangle 27"/>
+          <p:cNvSpPr/>
+          <p:nvPr/>
+        </p:nvSpPr>
+        <p:spPr>
+          <a:xfrm>
+            <a:off x="6666827" y="3515207"/>
+            <a:ext cx="1105571" cy="80288"/>
+          </a:xfrm>
+          <a:prstGeom prst="rect">
+            <a:avLst/>
+          </a:prstGeom>
+          <a:solidFill>
+            <a:srgbClr val="03045E"/>
+          </a:solidFill>
+          <a:ln w="12700">
+            <a:solidFill>
+              <a:srgbClr val="FEFFFF"/>
+            </a:solidFill>
+          </a:ln>
+          <a:effectLst/>
+        </p:spPr>
+        <p:style>
+          <a:lnRef idx="1">
+            <a:schemeClr val="accent1"/>
+          </a:lnRef>
+          <a:fillRef idx="3">
+            <a:schemeClr val="accent1"/>
+          </a:fillRef>
+          <a:effectRef idx="2">
+            <a:schemeClr val="accent1"/>
+          </a:effectRef>
+          <a:fontRef idx="minor">
+            <a:schemeClr val="lt1"/>
+          </a:fontRef>
+        </p:style>
+        <p:txBody>
+          <a:bodyPr rtlCol="0" anchor="ctr"/>
+          <a:lstStyle/>
+          <a:p>
+            <a:pPr algn="ctr"/>
+          </a:p>
+        </p:txBody>
+      </p:sp>
+      <p:sp>
+        <p:nvSpPr>
+          <p:cNvPr id="29" name="TextBox 28"/>
+          <p:cNvSpPr txBox="1"/>
+          <p:nvPr/>
+        </p:nvSpPr>
+        <p:spPr>
+          <a:xfrm>
+            <a:off x="6666827" y="3515207"/>
+            <a:ext cx="1105571" cy="80288"/>
+          </a:xfrm>
+          <a:prstGeom prst="rect">
+            <a:avLst/>
+          </a:prstGeom>
+          <a:noFill/>
+        </p:spPr>
+        <p:txBody>
+          <a:bodyPr wrap="square" anchor="ctr" lIns="0" rIns="0" tIns="0" bIns="0">
+            <a:spAutoFit/>
+          </a:bodyPr>
+          <a:lstStyle/>
+          <a:p>
+            <a:pPr algn="ctr">
+              <a:lnSpc>
+                <a:spcPct val="105000"/>
+              </a:lnSpc>
+              <a:spcBef>
+                <a:spcPts val="0"/>
+              </a:spcBef>
+              <a:spcAft>
+                <a:spcPts val="200"/>
+              </a:spcAft>
+            </a:pPr>
+            <a:r>
+              <a:rPr sz="1000" b="1" i="0">
+                <a:solidFill>
+                  <a:srgbClr val="FEFFFF"/>
+                </a:solidFill>
+                <a:latin typeface="Montserrat Medium"/>
+              </a:rPr>
+              <a:t>1.3</a:t>
+            </a:r>
+          </a:p>
+        </p:txBody>
+      </p:sp>
+      <p:sp>
+        <p:nvSpPr>
+          <p:cNvPr id="30" name="TextBox 29"/>
+          <p:cNvSpPr txBox="1"/>
+          <p:nvPr/>
+        </p:nvSpPr>
+        <p:spPr>
+          <a:xfrm>
+            <a:off x="6666827" y="6080760"/>
+            <a:ext cx="1105571" cy="274320"/>
+          </a:xfrm>
+          <a:prstGeom prst="rect">
+            <a:avLst/>
+          </a:prstGeom>
+          <a:noFill/>
+        </p:spPr>
+        <p:txBody>
+          <a:bodyPr wrap="square" anchor="t" lIns="0" rIns="0" tIns="0" bIns="0">
+            <a:spAutoFit/>
+          </a:bodyPr>
+          <a:lstStyle/>
+          <a:p>
+            <a:pPr algn="ctr">
+              <a:lnSpc>
+                <a:spcPct val="105000"/>
+              </a:lnSpc>
+              <a:spcBef>
+                <a:spcPts val="0"/>
+              </a:spcBef>
+              <a:spcAft>
+                <a:spcPts val="200"/>
+              </a:spcAft>
+            </a:pPr>
+            <a:r>
+              <a:rPr sz="1050" b="1" i="0">
+                <a:solidFill>
+                  <a:srgbClr val="03045E"/>
+                </a:solidFill>
+                <a:latin typeface="Montserrat"/>
+              </a:rPr>
+              <a:t>[Region C]</a:t>
+            </a:r>
+          </a:p>
+        </p:txBody>
+      </p:sp>
+      <p:cxnSp>
+        <p:nvCxnSpPr>
+          <p:cNvPr id="31" name="Connector 30"/>
+          <p:cNvCxnSpPr/>
+          <p:nvPr/>
+        </p:nvCxnSpPr>
+        <p:spPr>
+          <a:xfrm>
+            <a:off x="8001000" y="1463040"/>
+            <a:ext cx="0" cy="4892040"/>
+          </a:xfrm>
+          <a:prstGeom prst="bentConnector3">
+            <a:avLst/>
+          </a:prstGeom>
+          <a:ln w="12700">
+            <a:solidFill>
+              <a:srgbClr val="C9CBD6"/>
+            </a:solidFill>
+          </a:ln>
+        </p:spPr>
+        <p:style>
+          <a:lnRef idx="2">
+            <a:schemeClr val="accent1"/>
+          </a:lnRef>
+          <a:fillRef idx="0">
+            <a:schemeClr val="accent1"/>
+          </a:fillRef>
+          <a:effectRef idx="1">
+            <a:schemeClr val="accent1"/>
+          </a:effectRef>
+          <a:fontRef idx="minor">
+            <a:schemeClr val="tx1"/>
+          </a:fontRef>
+        </p:style>
+      </p:cxnSp>
+      <p:sp>
+        <p:nvSpPr>
+          <p:cNvPr id="32" name="Isosceles Triangle 31"/>
+          <p:cNvSpPr/>
+          <p:nvPr/>
+        </p:nvSpPr>
+        <p:spPr>
+          <a:xfrm rot="5400000">
+            <a:off x="8275320" y="1490472"/>
+            <a:ext cx="201168" cy="201168"/>
+          </a:xfrm>
+          <a:prstGeom prst="triangle">
+            <a:avLst/>
+          </a:prstGeom>
+          <a:solidFill>
+            <a:srgbClr val="03045E"/>
+          </a:solidFill>
+          <a:ln>
+            <a:noFill/>
+          </a:ln>
+          <a:effectLst/>
+        </p:spPr>
+        <p:style>
+          <a:lnRef idx="1">
+            <a:schemeClr val="accent1"/>
+          </a:lnRef>
+          <a:fillRef idx="3">
+            <a:schemeClr val="accent1"/>
+          </a:fillRef>
+          <a:effectRef idx="2">
+            <a:schemeClr val="accent1"/>
+          </a:effectRef>
+          <a:fontRef idx="minor">
+            <a:schemeClr val="lt1"/>
+          </a:fontRef>
+        </p:style>
+        <p:txBody>
+          <a:bodyPr rtlCol="0" anchor="ctr"/>
+          <a:lstStyle/>
+          <a:p>
+            <a:pPr algn="ctr"/>
+          </a:p>
+        </p:txBody>
+      </p:sp>
+      <p:sp>
+        <p:nvSpPr>
+          <p:cNvPr id="33" name="TextBox 32"/>
+          <p:cNvSpPr txBox="1"/>
+          <p:nvPr/>
+        </p:nvSpPr>
+        <p:spPr>
+          <a:xfrm>
+            <a:off x="8567928" y="1472184"/>
+            <a:ext cx="3136392" cy="274320"/>
+          </a:xfrm>
+          <a:prstGeom prst="rect">
+            <a:avLst/>
+          </a:prstGeom>
+          <a:noFill/>
+        </p:spPr>
+        <p:txBody>
+          <a:bodyPr wrap="square" anchor="t" lIns="0" rIns="0" tIns="0" bIns="0">
+            <a:spAutoFit/>
+          </a:bodyPr>
+          <a:lstStyle/>
+          <a:p>
             <a:pPr algn="l">
               <a:lnSpc>
+                <a:spcPct val="105000"/>
+              </a:lnSpc>
+              <a:spcBef>
+                <a:spcPts val="0"/>
+              </a:spcBef>
+              <a:spcAft>
+                <a:spcPts val="200"/>
+              </a:spcAft>
+            </a:pPr>
+            <a:r>
+              <a:rPr sz="1300" b="1" i="0">
+                <a:solidFill>
+                  <a:srgbClr val="03045E"/>
+                </a:solidFill>
+                <a:latin typeface="Montserrat"/>
+              </a:rPr>
+              <a:t>Key Takeaways</a:t>
+            </a:r>
+          </a:p>
+        </p:txBody>
+      </p:sp>
+      <p:sp>
+        <p:nvSpPr>
+          <p:cNvPr id="34" name="TextBox 33"/>
+          <p:cNvSpPr txBox="1"/>
+          <p:nvPr/>
+        </p:nvSpPr>
+        <p:spPr>
+          <a:xfrm>
+            <a:off x="8275320" y="1920240"/>
+            <a:ext cx="3429000" cy="4434840"/>
+          </a:xfrm>
+          <a:prstGeom prst="rect">
+            <a:avLst/>
+          </a:prstGeom>
+          <a:noFill/>
+        </p:spPr>
+        <p:txBody>
+          <a:bodyPr wrap="square" anchor="t" lIns="0" rIns="0" tIns="0" bIns="0">
+            <a:spAutoFit/>
+          </a:bodyPr>
+          <a:lstStyle/>
+          <a:p>
+            <a:pPr algn="l">
+              <a:lnSpc>
                 <a:spcPct val="108000"/>
               </a:lnSpc>
               <a:spcBef>
@@ -10668,7 +15206,7 @@
                 </a:solidFill>
                 <a:latin typeface="Montserrat Medium"/>
               </a:rPr>
-              <a:t>Trough in [year]; recovery underway</a:t>
+              <a:t>[Region A] is ~two-thirds of total value</a:t>
             </a:r>
           </a:p>
           <a:p>
@@ -10699,7 +15237,38 @@
                 </a:solidFill>
                 <a:latin typeface="Montserrat Medium"/>
               </a:rPr>
-              <a:t>~[X]% CAGR projected through [year]</a:t>
+              <a:t>[Region B] is second despite fewer [deals/units]</a:t>
+            </a:r>
+          </a:p>
+          <a:p>
+            <a:pPr algn="l">
+              <a:lnSpc>
+                <a:spcPct val="108000"/>
+              </a:lnSpc>
+              <a:spcBef>
+                <a:spcPts val="0"/>
+              </a:spcBef>
+              <a:spcAft>
+                <a:spcPts val="700"/>
+              </a:spcAft>
+            </a:pPr>
+            <a:r>
+              <a:rPr sz="1100" b="1" i="0">
+                <a:solidFill>
+                  <a:srgbClr val="03045E"/>
+                </a:solidFill>
+                <a:latin typeface="Montserrat Medium"/>
+              </a:rPr>
+              <a:t>•  </a:t>
+            </a:r>
+            <a:r>
+              <a:rPr sz="1100" b="0" i="0">
+                <a:solidFill>
+                  <a:srgbClr val="302E2E"/>
+                </a:solidFill>
+                <a:latin typeface="Montserrat Medium"/>
+              </a:rPr>
+              <a:t>[Region C] remains underpenetrated</a:t>
             </a:r>
           </a:p>
         </p:txBody>
@@ -10816,7 +15385,7 @@
                 </a:solidFill>
                 <a:latin typeface="Montserrat"/>
               </a:rPr>
-              <a:t>Segmentation breakdown</a:t>
+              <a:t>Serviceable market by segment</a:t>
             </a:r>
           </a:p>
         </p:txBody>
@@ -10861,7 +15430,7 @@
                 </a:solidFill>
                 <a:latin typeface="Montserrat Medium"/>
               </a:rPr>
-              <a:t>Source: aqmen analysis</a:t>
+              <a:t>Source: [sources], aqmen</a:t>
             </a:r>
           </a:p>
         </p:txBody>
@@ -10951,7 +15520,7 @@
                 </a:solidFill>
                 <a:latin typeface="Montserrat"/>
               </a:rPr>
-              <a:t>[Segment A] drives over half of the market by value</a:t>
+              <a:t>Within the SAM, [deal size] concentrates value in [Region A]</a:t>
             </a:r>
           </a:p>
         </p:txBody>
@@ -10964,8 +15533,58 @@
         </p:nvSpPr>
         <p:spPr>
           <a:xfrm>
-            <a:off x="502920" y="1691640"/>
-            <a:ext cx="7269480" cy="320040"/>
+            <a:off x="10362895" y="1536192"/>
+            <a:ext cx="1554480" cy="219456"/>
+          </a:xfrm>
+          <a:prstGeom prst="rect">
+            <a:avLst/>
+          </a:prstGeom>
+          <a:noFill/>
+          <a:ln w="6350">
+            <a:solidFill>
+              <a:srgbClr val="8A8A8A"/>
+            </a:solidFill>
+          </a:ln>
+        </p:spPr>
+        <p:txBody>
+          <a:bodyPr wrap="square" anchor="ctr" lIns="0" rIns="0" tIns="0" bIns="0">
+            <a:spAutoFit/>
+          </a:bodyPr>
+          <a:lstStyle/>
+          <a:p>
+            <a:pPr algn="ctr">
+              <a:lnSpc>
+                <a:spcPct val="105000"/>
+              </a:lnSpc>
+              <a:spcBef>
+                <a:spcPts val="0"/>
+              </a:spcBef>
+              <a:spcAft>
+                <a:spcPts val="200"/>
+              </a:spcAft>
+            </a:pPr>
+            <a:r>
+              <a:rPr sz="850" b="0" i="0">
+                <a:solidFill>
+                  <a:srgbClr val="302E2E"/>
+                </a:solidFill>
+                <a:latin typeface="Montserrat Medium"/>
+              </a:rPr>
+              <a:t>ILLUSTRATIVE</a:t>
+            </a:r>
+          </a:p>
+        </p:txBody>
+      </p:sp>
+      <p:sp>
+        <p:nvSpPr>
+          <p:cNvPr id="8" name="TextBox 7"/>
+          <p:cNvSpPr txBox="1"/>
+          <p:nvPr/>
+        </p:nvSpPr>
+        <p:spPr>
+          <a:xfrm>
+            <a:off x="502920" y="1645920"/>
+            <a:ext cx="11185855" cy="320040"/>
           </a:xfrm>
           <a:prstGeom prst="rect">
             <a:avLst/>
@@ -10996,76 +15615,23 @@
                 </a:solidFill>
                 <a:latin typeface="Montserrat"/>
               </a:rPr>
-              <a:t>[Market] by segment, $B</a:t>
-            </a:r>
-          </a:p>
-        </p:txBody>
-      </p:sp>
-      <p:graphicFrame>
-        <p:nvGraphicFramePr>
-          <p:cNvPr id="8" name="Chart 7"/>
-          <p:cNvGraphicFramePr>
-            <a:graphicFrameLocks noGrp="1"/>
-          </p:cNvGraphicFramePr>
-          <p:nvPr/>
-        </p:nvGraphicFramePr>
-        <p:xfrm>
-          <a:off x="502920" y="2103120"/>
-          <a:ext cx="7269480" cy="4251960"/>
-        </p:xfrm>
-        <a:graphic>
-          <a:graphicData uri="http://schemas.openxmlformats.org/drawingml/2006/chart">
-            <c:chart xmlns:c="http://schemas.openxmlformats.org/drawingml/2006/chart" r:id="rId2"/>
-          </a:graphicData>
-        </a:graphic>
-      </p:graphicFrame>
-      <p:cxnSp>
-        <p:nvCxnSpPr>
-          <p:cNvPr id="9" name="Connector 8"/>
-          <p:cNvCxnSpPr/>
-          <p:nvPr/>
-        </p:nvCxnSpPr>
-        <p:spPr>
-          <a:xfrm>
-            <a:off x="8001000" y="1463040"/>
-            <a:ext cx="0" cy="4892040"/>
-          </a:xfrm>
-          <a:prstGeom prst="bentConnector3">
-            <a:avLst/>
-          </a:prstGeom>
-          <a:ln w="12700">
-            <a:solidFill>
-              <a:srgbClr val="C9CBD6"/>
-            </a:solidFill>
-          </a:ln>
-        </p:spPr>
-        <p:style>
-          <a:lnRef idx="2">
-            <a:schemeClr val="accent1"/>
-          </a:lnRef>
-          <a:fillRef idx="0">
-            <a:schemeClr val="accent1"/>
-          </a:fillRef>
-          <a:effectRef idx="1">
-            <a:schemeClr val="accent1"/>
-          </a:effectRef>
-          <a:fontRef idx="minor">
-            <a:schemeClr val="tx1"/>
-          </a:fontRef>
-        </p:style>
-      </p:cxnSp>
-      <p:sp>
-        <p:nvSpPr>
-          <p:cNvPr id="10" name="Isosceles Triangle 9"/>
+              <a:t>[Market] SAM by region × [dimension], [base year] $B</a:t>
+            </a:r>
+          </a:p>
+        </p:txBody>
+      </p:sp>
+      <p:sp>
+        <p:nvSpPr>
+          <p:cNvPr id="9" name="Rectangle 8"/>
           <p:cNvSpPr/>
           <p:nvPr/>
         </p:nvSpPr>
         <p:spPr>
-          <a:xfrm rot="5400000">
-            <a:off x="8275320" y="1490472"/>
-            <a:ext cx="201168" cy="201168"/>
-          </a:xfrm>
-          <a:prstGeom prst="triangle">
+          <a:xfrm>
+            <a:off x="502920" y="2075688"/>
+            <a:ext cx="146304" cy="146304"/>
+          </a:xfrm>
+          <a:prstGeom prst="rect">
             <a:avLst/>
           </a:prstGeom>
           <a:solidFill>
@@ -11100,14 +15666,326 @@
       </p:sp>
       <p:sp>
         <p:nvSpPr>
-          <p:cNvPr id="11" name="TextBox 10"/>
+          <p:cNvPr id="10" name="TextBox 9"/>
           <p:cNvSpPr txBox="1"/>
           <p:nvPr/>
         </p:nvSpPr>
         <p:spPr>
           <a:xfrm>
-            <a:off x="8567928" y="1472184"/>
-            <a:ext cx="3136392" cy="274320"/>
+            <a:off x="722376" y="2048256"/>
+            <a:ext cx="2011680" cy="228600"/>
+          </a:xfrm>
+          <a:prstGeom prst="rect">
+            <a:avLst/>
+          </a:prstGeom>
+          <a:noFill/>
+        </p:spPr>
+        <p:txBody>
+          <a:bodyPr wrap="square" anchor="ctr" lIns="0" rIns="0" tIns="0" bIns="0">
+            <a:spAutoFit/>
+          </a:bodyPr>
+          <a:lstStyle/>
+          <a:p>
+            <a:pPr algn="l">
+              <a:lnSpc>
+                <a:spcPct val="105000"/>
+              </a:lnSpc>
+              <a:spcBef>
+                <a:spcPts val="0"/>
+              </a:spcBef>
+              <a:spcAft>
+                <a:spcPts val="200"/>
+              </a:spcAft>
+            </a:pPr>
+            <a:r>
+              <a:rPr sz="950" b="0" i="0">
+                <a:solidFill>
+                  <a:srgbClr val="302E2E"/>
+                </a:solidFill>
+                <a:latin typeface="Montserrat Medium"/>
+              </a:rPr>
+              <a:t>Small</a:t>
+            </a:r>
+          </a:p>
+        </p:txBody>
+      </p:sp>
+      <p:sp>
+        <p:nvSpPr>
+          <p:cNvPr id="11" name="Rectangle 10"/>
+          <p:cNvSpPr/>
+          <p:nvPr/>
+        </p:nvSpPr>
+        <p:spPr>
+          <a:xfrm>
+            <a:off x="1522476" y="2075688"/>
+            <a:ext cx="146304" cy="146304"/>
+          </a:xfrm>
+          <a:prstGeom prst="rect">
+            <a:avLst/>
+          </a:prstGeom>
+          <a:solidFill>
+            <a:srgbClr val="0728A3"/>
+          </a:solidFill>
+          <a:ln>
+            <a:noFill/>
+          </a:ln>
+          <a:effectLst/>
+        </p:spPr>
+        <p:style>
+          <a:lnRef idx="1">
+            <a:schemeClr val="accent1"/>
+          </a:lnRef>
+          <a:fillRef idx="3">
+            <a:schemeClr val="accent1"/>
+          </a:fillRef>
+          <a:effectRef idx="2">
+            <a:schemeClr val="accent1"/>
+          </a:effectRef>
+          <a:fontRef idx="minor">
+            <a:schemeClr val="lt1"/>
+          </a:fontRef>
+        </p:style>
+        <p:txBody>
+          <a:bodyPr rtlCol="0" anchor="ctr"/>
+          <a:lstStyle/>
+          <a:p>
+            <a:pPr algn="ctr"/>
+          </a:p>
+        </p:txBody>
+      </p:sp>
+      <p:sp>
+        <p:nvSpPr>
+          <p:cNvPr id="12" name="TextBox 11"/>
+          <p:cNvSpPr txBox="1"/>
+          <p:nvPr/>
+        </p:nvSpPr>
+        <p:spPr>
+          <a:xfrm>
+            <a:off x="1741932" y="2048256"/>
+            <a:ext cx="2011680" cy="228600"/>
+          </a:xfrm>
+          <a:prstGeom prst="rect">
+            <a:avLst/>
+          </a:prstGeom>
+          <a:noFill/>
+        </p:spPr>
+        <p:txBody>
+          <a:bodyPr wrap="square" anchor="ctr" lIns="0" rIns="0" tIns="0" bIns="0">
+            <a:spAutoFit/>
+          </a:bodyPr>
+          <a:lstStyle/>
+          <a:p>
+            <a:pPr algn="l">
+              <a:lnSpc>
+                <a:spcPct val="105000"/>
+              </a:lnSpc>
+              <a:spcBef>
+                <a:spcPts val="0"/>
+              </a:spcBef>
+              <a:spcAft>
+                <a:spcPts val="200"/>
+              </a:spcAft>
+            </a:pPr>
+            <a:r>
+              <a:rPr sz="950" b="0" i="0">
+                <a:solidFill>
+                  <a:srgbClr val="302E2E"/>
+                </a:solidFill>
+                <a:latin typeface="Montserrat Medium"/>
+              </a:rPr>
+              <a:t>Medium</a:t>
+            </a:r>
+          </a:p>
+        </p:txBody>
+      </p:sp>
+      <p:sp>
+        <p:nvSpPr>
+          <p:cNvPr id="13" name="Rectangle 12"/>
+          <p:cNvSpPr/>
+          <p:nvPr/>
+        </p:nvSpPr>
+        <p:spPr>
+          <a:xfrm>
+            <a:off x="2610612" y="2075688"/>
+            <a:ext cx="146304" cy="146304"/>
+          </a:xfrm>
+          <a:prstGeom prst="rect">
+            <a:avLst/>
+          </a:prstGeom>
+          <a:solidFill>
+            <a:srgbClr val="2E6FD6"/>
+          </a:solidFill>
+          <a:ln>
+            <a:noFill/>
+          </a:ln>
+          <a:effectLst/>
+        </p:spPr>
+        <p:style>
+          <a:lnRef idx="1">
+            <a:schemeClr val="accent1"/>
+          </a:lnRef>
+          <a:fillRef idx="3">
+            <a:schemeClr val="accent1"/>
+          </a:fillRef>
+          <a:effectRef idx="2">
+            <a:schemeClr val="accent1"/>
+          </a:effectRef>
+          <a:fontRef idx="minor">
+            <a:schemeClr val="lt1"/>
+          </a:fontRef>
+        </p:style>
+        <p:txBody>
+          <a:bodyPr rtlCol="0" anchor="ctr"/>
+          <a:lstStyle/>
+          <a:p>
+            <a:pPr algn="ctr"/>
+          </a:p>
+        </p:txBody>
+      </p:sp>
+      <p:sp>
+        <p:nvSpPr>
+          <p:cNvPr id="14" name="TextBox 13"/>
+          <p:cNvSpPr txBox="1"/>
+          <p:nvPr/>
+        </p:nvSpPr>
+        <p:spPr>
+          <a:xfrm>
+            <a:off x="2830068" y="2048256"/>
+            <a:ext cx="2011680" cy="228600"/>
+          </a:xfrm>
+          <a:prstGeom prst="rect">
+            <a:avLst/>
+          </a:prstGeom>
+          <a:noFill/>
+        </p:spPr>
+        <p:txBody>
+          <a:bodyPr wrap="square" anchor="ctr" lIns="0" rIns="0" tIns="0" bIns="0">
+            <a:spAutoFit/>
+          </a:bodyPr>
+          <a:lstStyle/>
+          <a:p>
+            <a:pPr algn="l">
+              <a:lnSpc>
+                <a:spcPct val="105000"/>
+              </a:lnSpc>
+              <a:spcBef>
+                <a:spcPts val="0"/>
+              </a:spcBef>
+              <a:spcAft>
+                <a:spcPts val="200"/>
+              </a:spcAft>
+            </a:pPr>
+            <a:r>
+              <a:rPr sz="950" b="0" i="0">
+                <a:solidFill>
+                  <a:srgbClr val="302E2E"/>
+                </a:solidFill>
+                <a:latin typeface="Montserrat Medium"/>
+              </a:rPr>
+              <a:t>Large</a:t>
+            </a:r>
+          </a:p>
+        </p:txBody>
+      </p:sp>
+      <p:sp>
+        <p:nvSpPr>
+          <p:cNvPr id="15" name="Rectangle 14"/>
+          <p:cNvSpPr/>
+          <p:nvPr/>
+        </p:nvSpPr>
+        <p:spPr>
+          <a:xfrm>
+            <a:off x="3630168" y="2075688"/>
+            <a:ext cx="146304" cy="146304"/>
+          </a:xfrm>
+          <a:prstGeom prst="rect">
+            <a:avLst/>
+          </a:prstGeom>
+          <a:solidFill>
+            <a:srgbClr val="6BAED6"/>
+          </a:solidFill>
+          <a:ln>
+            <a:noFill/>
+          </a:ln>
+          <a:effectLst/>
+        </p:spPr>
+        <p:style>
+          <a:lnRef idx="1">
+            <a:schemeClr val="accent1"/>
+          </a:lnRef>
+          <a:fillRef idx="3">
+            <a:schemeClr val="accent1"/>
+          </a:fillRef>
+          <a:effectRef idx="2">
+            <a:schemeClr val="accent1"/>
+          </a:effectRef>
+          <a:fontRef idx="minor">
+            <a:schemeClr val="lt1"/>
+          </a:fontRef>
+        </p:style>
+        <p:txBody>
+          <a:bodyPr rtlCol="0" anchor="ctr"/>
+          <a:lstStyle/>
+          <a:p>
+            <a:pPr algn="ctr"/>
+          </a:p>
+        </p:txBody>
+      </p:sp>
+      <p:sp>
+        <p:nvSpPr>
+          <p:cNvPr id="16" name="TextBox 15"/>
+          <p:cNvSpPr txBox="1"/>
+          <p:nvPr/>
+        </p:nvSpPr>
+        <p:spPr>
+          <a:xfrm>
+            <a:off x="3849624" y="2048256"/>
+            <a:ext cx="2011680" cy="228600"/>
+          </a:xfrm>
+          <a:prstGeom prst="rect">
+            <a:avLst/>
+          </a:prstGeom>
+          <a:noFill/>
+        </p:spPr>
+        <p:txBody>
+          <a:bodyPr wrap="square" anchor="ctr" lIns="0" rIns="0" tIns="0" bIns="0">
+            <a:spAutoFit/>
+          </a:bodyPr>
+          <a:lstStyle/>
+          <a:p>
+            <a:pPr algn="l">
+              <a:lnSpc>
+                <a:spcPct val="105000"/>
+              </a:lnSpc>
+              <a:spcBef>
+                <a:spcPts val="0"/>
+              </a:spcBef>
+              <a:spcAft>
+                <a:spcPts val="200"/>
+              </a:spcAft>
+            </a:pPr>
+            <a:r>
+              <a:rPr sz="950" b="0" i="0">
+                <a:solidFill>
+                  <a:srgbClr val="302E2E"/>
+                </a:solidFill>
+                <a:latin typeface="Montserrat Medium"/>
+              </a:rPr>
+              <a:t>Mega</a:t>
+            </a:r>
+          </a:p>
+        </p:txBody>
+      </p:sp>
+      <p:sp>
+        <p:nvSpPr>
+          <p:cNvPr id="17" name="TextBox 16"/>
+          <p:cNvSpPr txBox="1"/>
+          <p:nvPr/>
+        </p:nvSpPr>
+        <p:spPr>
+          <a:xfrm>
+            <a:off x="502920" y="2286000"/>
+            <a:ext cx="4541842" cy="411480"/>
           </a:xfrm>
           <a:prstGeom prst="rect">
             <a:avLst/>
@@ -11120,7 +15998,7 @@
           </a:bodyPr>
           <a:lstStyle/>
           <a:p>
-            <a:pPr algn="l">
+            <a:pPr algn="ctr">
               <a:lnSpc>
                 <a:spcPct val="105000"/>
               </a:lnSpc>
@@ -11132,27 +16010,413 @@
               </a:spcAft>
             </a:pPr>
             <a:r>
-              <a:rPr sz="1300" b="1" i="0">
+              <a:rPr sz="1200" b="1" i="0">
                 <a:solidFill>
                   <a:srgbClr val="03045E"/>
                 </a:solidFill>
-                <a:latin typeface="Montserrat"/>
-              </a:rPr>
-              <a:t>Key Takeaways</a:t>
-            </a:r>
-          </a:p>
-        </p:txBody>
-      </p:sp>
-      <p:sp>
-        <p:nvSpPr>
-          <p:cNvPr id="12" name="TextBox 11"/>
+                <a:latin typeface="Montserrat Medium"/>
+              </a:rPr>
+              <a:t>6.7</a:t>
+            </a:r>
+          </a:p>
+          <a:p>
+            <a:pPr algn="ctr">
+              <a:lnSpc>
+                <a:spcPct val="105000"/>
+              </a:lnSpc>
+              <a:spcBef>
+                <a:spcPts val="0"/>
+              </a:spcBef>
+              <a:spcAft>
+                <a:spcPts val="200"/>
+              </a:spcAft>
+            </a:pPr>
+            <a:r>
+              <a:rPr sz="1000" b="0" i="1">
+                <a:solidFill>
+                  <a:srgbClr val="8A8A8A"/>
+                </a:solidFill>
+                <a:latin typeface="Montserrat Medium"/>
+              </a:rPr>
+              <a:t>(64%)</a:t>
+            </a:r>
+          </a:p>
+        </p:txBody>
+      </p:sp>
+      <p:sp>
+        <p:nvSpPr>
+          <p:cNvPr id="18" name="Rectangle 17"/>
+          <p:cNvSpPr/>
+          <p:nvPr/>
+        </p:nvSpPr>
+        <p:spPr>
+          <a:xfrm>
+            <a:off x="502920" y="2743200"/>
+            <a:ext cx="4541842" cy="638715"/>
+          </a:xfrm>
+          <a:prstGeom prst="rect">
+            <a:avLst/>
+          </a:prstGeom>
+          <a:solidFill>
+            <a:srgbClr val="03045E"/>
+          </a:solidFill>
+          <a:ln w="12700">
+            <a:solidFill>
+              <a:srgbClr val="FEFFFF"/>
+            </a:solidFill>
+          </a:ln>
+          <a:effectLst/>
+        </p:spPr>
+        <p:style>
+          <a:lnRef idx="1">
+            <a:schemeClr val="accent1"/>
+          </a:lnRef>
+          <a:fillRef idx="3">
+            <a:schemeClr val="accent1"/>
+          </a:fillRef>
+          <a:effectRef idx="2">
+            <a:schemeClr val="accent1"/>
+          </a:effectRef>
+          <a:fontRef idx="minor">
+            <a:schemeClr val="lt1"/>
+          </a:fontRef>
+        </p:style>
+        <p:txBody>
+          <a:bodyPr rtlCol="0" anchor="ctr"/>
+          <a:lstStyle/>
+          <a:p>
+            <a:pPr algn="ctr"/>
+          </a:p>
+        </p:txBody>
+      </p:sp>
+      <p:sp>
+        <p:nvSpPr>
+          <p:cNvPr id="19" name="TextBox 18"/>
           <p:cNvSpPr txBox="1"/>
           <p:nvPr/>
         </p:nvSpPr>
         <p:spPr>
           <a:xfrm>
-            <a:off x="8275320" y="1920240"/>
-            <a:ext cx="3429000" cy="4434840"/>
+            <a:off x="502920" y="2743200"/>
+            <a:ext cx="4541842" cy="638715"/>
+          </a:xfrm>
+          <a:prstGeom prst="rect">
+            <a:avLst/>
+          </a:prstGeom>
+          <a:noFill/>
+        </p:spPr>
+        <p:txBody>
+          <a:bodyPr wrap="square" anchor="ctr" lIns="0" rIns="0" tIns="0" bIns="0">
+            <a:spAutoFit/>
+          </a:bodyPr>
+          <a:lstStyle/>
+          <a:p>
+            <a:pPr algn="ctr">
+              <a:lnSpc>
+                <a:spcPct val="105000"/>
+              </a:lnSpc>
+              <a:spcBef>
+                <a:spcPts val="0"/>
+              </a:spcBef>
+              <a:spcAft>
+                <a:spcPts val="200"/>
+              </a:spcAft>
+            </a:pPr>
+            <a:r>
+              <a:rPr sz="1000" b="1" i="0">
+                <a:solidFill>
+                  <a:srgbClr val="FEFFFF"/>
+                </a:solidFill>
+                <a:latin typeface="Montserrat Medium"/>
+              </a:rPr>
+              <a:t>1.3</a:t>
+            </a:r>
+          </a:p>
+        </p:txBody>
+      </p:sp>
+      <p:sp>
+        <p:nvSpPr>
+          <p:cNvPr id="20" name="Rectangle 19"/>
+          <p:cNvSpPr/>
+          <p:nvPr/>
+        </p:nvSpPr>
+        <p:spPr>
+          <a:xfrm>
+            <a:off x="502920" y="3381915"/>
+            <a:ext cx="4541842" cy="736979"/>
+          </a:xfrm>
+          <a:prstGeom prst="rect">
+            <a:avLst/>
+          </a:prstGeom>
+          <a:solidFill>
+            <a:srgbClr val="0728A3"/>
+          </a:solidFill>
+          <a:ln w="12700">
+            <a:solidFill>
+              <a:srgbClr val="FEFFFF"/>
+            </a:solidFill>
+          </a:ln>
+          <a:effectLst/>
+        </p:spPr>
+        <p:style>
+          <a:lnRef idx="1">
+            <a:schemeClr val="accent1"/>
+          </a:lnRef>
+          <a:fillRef idx="3">
+            <a:schemeClr val="accent1"/>
+          </a:fillRef>
+          <a:effectRef idx="2">
+            <a:schemeClr val="accent1"/>
+          </a:effectRef>
+          <a:fontRef idx="minor">
+            <a:schemeClr val="lt1"/>
+          </a:fontRef>
+        </p:style>
+        <p:txBody>
+          <a:bodyPr rtlCol="0" anchor="ctr"/>
+          <a:lstStyle/>
+          <a:p>
+            <a:pPr algn="ctr"/>
+          </a:p>
+        </p:txBody>
+      </p:sp>
+      <p:sp>
+        <p:nvSpPr>
+          <p:cNvPr id="21" name="TextBox 20"/>
+          <p:cNvSpPr txBox="1"/>
+          <p:nvPr/>
+        </p:nvSpPr>
+        <p:spPr>
+          <a:xfrm>
+            <a:off x="502920" y="3381915"/>
+            <a:ext cx="4541842" cy="736979"/>
+          </a:xfrm>
+          <a:prstGeom prst="rect">
+            <a:avLst/>
+          </a:prstGeom>
+          <a:noFill/>
+        </p:spPr>
+        <p:txBody>
+          <a:bodyPr wrap="square" anchor="ctr" lIns="0" rIns="0" tIns="0" bIns="0">
+            <a:spAutoFit/>
+          </a:bodyPr>
+          <a:lstStyle/>
+          <a:p>
+            <a:pPr algn="ctr">
+              <a:lnSpc>
+                <a:spcPct val="105000"/>
+              </a:lnSpc>
+              <a:spcBef>
+                <a:spcPts val="0"/>
+              </a:spcBef>
+              <a:spcAft>
+                <a:spcPts val="200"/>
+              </a:spcAft>
+            </a:pPr>
+            <a:r>
+              <a:rPr sz="1000" b="1" i="0">
+                <a:solidFill>
+                  <a:srgbClr val="FEFFFF"/>
+                </a:solidFill>
+                <a:latin typeface="Montserrat Medium"/>
+              </a:rPr>
+              <a:t>1.5</a:t>
+            </a:r>
+          </a:p>
+        </p:txBody>
+      </p:sp>
+      <p:sp>
+        <p:nvSpPr>
+          <p:cNvPr id="22" name="Rectangle 21"/>
+          <p:cNvSpPr/>
+          <p:nvPr/>
+        </p:nvSpPr>
+        <p:spPr>
+          <a:xfrm>
+            <a:off x="502920" y="4118894"/>
+            <a:ext cx="4541842" cy="1130034"/>
+          </a:xfrm>
+          <a:prstGeom prst="rect">
+            <a:avLst/>
+          </a:prstGeom>
+          <a:solidFill>
+            <a:srgbClr val="2E6FD6"/>
+          </a:solidFill>
+          <a:ln w="12700">
+            <a:solidFill>
+              <a:srgbClr val="FEFFFF"/>
+            </a:solidFill>
+          </a:ln>
+          <a:effectLst/>
+        </p:spPr>
+        <p:style>
+          <a:lnRef idx="1">
+            <a:schemeClr val="accent1"/>
+          </a:lnRef>
+          <a:fillRef idx="3">
+            <a:schemeClr val="accent1"/>
+          </a:fillRef>
+          <a:effectRef idx="2">
+            <a:schemeClr val="accent1"/>
+          </a:effectRef>
+          <a:fontRef idx="minor">
+            <a:schemeClr val="lt1"/>
+          </a:fontRef>
+        </p:style>
+        <p:txBody>
+          <a:bodyPr rtlCol="0" anchor="ctr"/>
+          <a:lstStyle/>
+          <a:p>
+            <a:pPr algn="ctr"/>
+          </a:p>
+        </p:txBody>
+      </p:sp>
+      <p:sp>
+        <p:nvSpPr>
+          <p:cNvPr id="23" name="TextBox 22"/>
+          <p:cNvSpPr txBox="1"/>
+          <p:nvPr/>
+        </p:nvSpPr>
+        <p:spPr>
+          <a:xfrm>
+            <a:off x="502920" y="4118894"/>
+            <a:ext cx="4541842" cy="1130034"/>
+          </a:xfrm>
+          <a:prstGeom prst="rect">
+            <a:avLst/>
+          </a:prstGeom>
+          <a:noFill/>
+        </p:spPr>
+        <p:txBody>
+          <a:bodyPr wrap="square" anchor="ctr" lIns="0" rIns="0" tIns="0" bIns="0">
+            <a:spAutoFit/>
+          </a:bodyPr>
+          <a:lstStyle/>
+          <a:p>
+            <a:pPr algn="ctr">
+              <a:lnSpc>
+                <a:spcPct val="105000"/>
+              </a:lnSpc>
+              <a:spcBef>
+                <a:spcPts val="0"/>
+              </a:spcBef>
+              <a:spcAft>
+                <a:spcPts val="200"/>
+              </a:spcAft>
+            </a:pPr>
+            <a:r>
+              <a:rPr sz="1000" b="1" i="0">
+                <a:solidFill>
+                  <a:srgbClr val="FEFFFF"/>
+                </a:solidFill>
+                <a:latin typeface="Montserrat Medium"/>
+              </a:rPr>
+              <a:t>2.3</a:t>
+            </a:r>
+          </a:p>
+        </p:txBody>
+      </p:sp>
+      <p:sp>
+        <p:nvSpPr>
+          <p:cNvPr id="24" name="Rectangle 23"/>
+          <p:cNvSpPr/>
+          <p:nvPr/>
+        </p:nvSpPr>
+        <p:spPr>
+          <a:xfrm>
+            <a:off x="502920" y="5248928"/>
+            <a:ext cx="4541842" cy="786111"/>
+          </a:xfrm>
+          <a:prstGeom prst="rect">
+            <a:avLst/>
+          </a:prstGeom>
+          <a:solidFill>
+            <a:srgbClr val="6BAED6"/>
+          </a:solidFill>
+          <a:ln w="12700">
+            <a:solidFill>
+              <a:srgbClr val="FEFFFF"/>
+            </a:solidFill>
+          </a:ln>
+          <a:effectLst/>
+        </p:spPr>
+        <p:style>
+          <a:lnRef idx="1">
+            <a:schemeClr val="accent1"/>
+          </a:lnRef>
+          <a:fillRef idx="3">
+            <a:schemeClr val="accent1"/>
+          </a:fillRef>
+          <a:effectRef idx="2">
+            <a:schemeClr val="accent1"/>
+          </a:effectRef>
+          <a:fontRef idx="minor">
+            <a:schemeClr val="lt1"/>
+          </a:fontRef>
+        </p:style>
+        <p:txBody>
+          <a:bodyPr rtlCol="0" anchor="ctr"/>
+          <a:lstStyle/>
+          <a:p>
+            <a:pPr algn="ctr"/>
+          </a:p>
+        </p:txBody>
+      </p:sp>
+      <p:sp>
+        <p:nvSpPr>
+          <p:cNvPr id="25" name="TextBox 24"/>
+          <p:cNvSpPr txBox="1"/>
+          <p:nvPr/>
+        </p:nvSpPr>
+        <p:spPr>
+          <a:xfrm>
+            <a:off x="502920" y="5248928"/>
+            <a:ext cx="4541842" cy="786111"/>
+          </a:xfrm>
+          <a:prstGeom prst="rect">
+            <a:avLst/>
+          </a:prstGeom>
+          <a:noFill/>
+        </p:spPr>
+        <p:txBody>
+          <a:bodyPr wrap="square" anchor="ctr" lIns="0" rIns="0" tIns="0" bIns="0">
+            <a:spAutoFit/>
+          </a:bodyPr>
+          <a:lstStyle/>
+          <a:p>
+            <a:pPr algn="ctr">
+              <a:lnSpc>
+                <a:spcPct val="105000"/>
+              </a:lnSpc>
+              <a:spcBef>
+                <a:spcPts val="0"/>
+              </a:spcBef>
+              <a:spcAft>
+                <a:spcPts val="200"/>
+              </a:spcAft>
+            </a:pPr>
+            <a:r>
+              <a:rPr sz="1000" b="1" i="0">
+                <a:solidFill>
+                  <a:srgbClr val="FEFFFF"/>
+                </a:solidFill>
+                <a:latin typeface="Montserrat Medium"/>
+              </a:rPr>
+              <a:t>1.6</a:t>
+            </a:r>
+          </a:p>
+        </p:txBody>
+      </p:sp>
+      <p:sp>
+        <p:nvSpPr>
+          <p:cNvPr id="26" name="TextBox 25"/>
+          <p:cNvSpPr txBox="1"/>
+          <p:nvPr/>
+        </p:nvSpPr>
+        <p:spPr>
+          <a:xfrm>
+            <a:off x="502920" y="6080760"/>
+            <a:ext cx="4541842" cy="274320"/>
           </a:xfrm>
           <a:prstGeom prst="rect">
             <a:avLst/>
@@ -11165,8 +16429,1129 @@
           </a:bodyPr>
           <a:lstStyle/>
           <a:p>
+            <a:pPr algn="ctr">
+              <a:lnSpc>
+                <a:spcPct val="105000"/>
+              </a:lnSpc>
+              <a:spcBef>
+                <a:spcPts val="0"/>
+              </a:spcBef>
+              <a:spcAft>
+                <a:spcPts val="200"/>
+              </a:spcAft>
+            </a:pPr>
+            <a:r>
+              <a:rPr sz="1050" b="1" i="0">
+                <a:solidFill>
+                  <a:srgbClr val="03045E"/>
+                </a:solidFill>
+                <a:latin typeface="Montserrat"/>
+              </a:rPr>
+              <a:t>[Region A]</a:t>
+            </a:r>
+          </a:p>
+        </p:txBody>
+      </p:sp>
+      <p:sp>
+        <p:nvSpPr>
+          <p:cNvPr id="27" name="TextBox 26"/>
+          <p:cNvSpPr txBox="1"/>
+          <p:nvPr/>
+        </p:nvSpPr>
+        <p:spPr>
+          <a:xfrm>
+            <a:off x="5154490" y="2286000"/>
+            <a:ext cx="1626928" cy="411480"/>
+          </a:xfrm>
+          <a:prstGeom prst="rect">
+            <a:avLst/>
+          </a:prstGeom>
+          <a:noFill/>
+        </p:spPr>
+        <p:txBody>
+          <a:bodyPr wrap="square" anchor="t" lIns="0" rIns="0" tIns="0" bIns="0">
+            <a:spAutoFit/>
+          </a:bodyPr>
+          <a:lstStyle/>
+          <a:p>
+            <a:pPr algn="ctr">
+              <a:lnSpc>
+                <a:spcPct val="105000"/>
+              </a:lnSpc>
+              <a:spcBef>
+                <a:spcPts val="0"/>
+              </a:spcBef>
+              <a:spcAft>
+                <a:spcPts val="200"/>
+              </a:spcAft>
+            </a:pPr>
+            <a:r>
+              <a:rPr sz="1200" b="1" i="0">
+                <a:solidFill>
+                  <a:srgbClr val="03045E"/>
+                </a:solidFill>
+                <a:latin typeface="Montserrat Medium"/>
+              </a:rPr>
+              <a:t>2.4</a:t>
+            </a:r>
+          </a:p>
+          <a:p>
+            <a:pPr algn="ctr">
+              <a:lnSpc>
+                <a:spcPct val="105000"/>
+              </a:lnSpc>
+              <a:spcBef>
+                <a:spcPts val="0"/>
+              </a:spcBef>
+              <a:spcAft>
+                <a:spcPts val="200"/>
+              </a:spcAft>
+            </a:pPr>
+            <a:r>
+              <a:rPr sz="1000" b="0" i="1">
+                <a:solidFill>
+                  <a:srgbClr val="8A8A8A"/>
+                </a:solidFill>
+                <a:latin typeface="Montserrat Medium"/>
+              </a:rPr>
+              <a:t>(23%)</a:t>
+            </a:r>
+          </a:p>
+        </p:txBody>
+      </p:sp>
+      <p:sp>
+        <p:nvSpPr>
+          <p:cNvPr id="28" name="Rectangle 27"/>
+          <p:cNvSpPr/>
+          <p:nvPr/>
+        </p:nvSpPr>
+        <p:spPr>
+          <a:xfrm>
+            <a:off x="5154490" y="2743200"/>
+            <a:ext cx="1626928" cy="245659"/>
+          </a:xfrm>
+          <a:prstGeom prst="rect">
+            <a:avLst/>
+          </a:prstGeom>
+          <a:solidFill>
+            <a:srgbClr val="03045E"/>
+          </a:solidFill>
+          <a:ln w="12700">
+            <a:solidFill>
+              <a:srgbClr val="FEFFFF"/>
+            </a:solidFill>
+          </a:ln>
+          <a:effectLst/>
+        </p:spPr>
+        <p:style>
+          <a:lnRef idx="1">
+            <a:schemeClr val="accent1"/>
+          </a:lnRef>
+          <a:fillRef idx="3">
+            <a:schemeClr val="accent1"/>
+          </a:fillRef>
+          <a:effectRef idx="2">
+            <a:schemeClr val="accent1"/>
+          </a:effectRef>
+          <a:fontRef idx="minor">
+            <a:schemeClr val="lt1"/>
+          </a:fontRef>
+        </p:style>
+        <p:txBody>
+          <a:bodyPr rtlCol="0" anchor="ctr"/>
+          <a:lstStyle/>
+          <a:p>
+            <a:pPr algn="ctr"/>
+          </a:p>
+        </p:txBody>
+      </p:sp>
+      <p:sp>
+        <p:nvSpPr>
+          <p:cNvPr id="29" name="TextBox 28"/>
+          <p:cNvSpPr txBox="1"/>
+          <p:nvPr/>
+        </p:nvSpPr>
+        <p:spPr>
+          <a:xfrm>
+            <a:off x="5154490" y="2743200"/>
+            <a:ext cx="1626928" cy="245659"/>
+          </a:xfrm>
+          <a:prstGeom prst="rect">
+            <a:avLst/>
+          </a:prstGeom>
+          <a:noFill/>
+        </p:spPr>
+        <p:txBody>
+          <a:bodyPr wrap="square" anchor="ctr" lIns="0" rIns="0" tIns="0" bIns="0">
+            <a:spAutoFit/>
+          </a:bodyPr>
+          <a:lstStyle/>
+          <a:p>
+            <a:pPr algn="ctr">
+              <a:lnSpc>
+                <a:spcPct val="105000"/>
+              </a:lnSpc>
+              <a:spcBef>
+                <a:spcPts val="0"/>
+              </a:spcBef>
+              <a:spcAft>
+                <a:spcPts val="200"/>
+              </a:spcAft>
+            </a:pPr>
+            <a:r>
+              <a:rPr sz="1000" b="1" i="0">
+                <a:solidFill>
+                  <a:srgbClr val="FEFFFF"/>
+                </a:solidFill>
+                <a:latin typeface="Montserrat Medium"/>
+              </a:rPr>
+              <a:t>0.5</a:t>
+            </a:r>
+          </a:p>
+        </p:txBody>
+      </p:sp>
+      <p:sp>
+        <p:nvSpPr>
+          <p:cNvPr id="30" name="Rectangle 29"/>
+          <p:cNvSpPr/>
+          <p:nvPr/>
+        </p:nvSpPr>
+        <p:spPr>
+          <a:xfrm>
+            <a:off x="5154490" y="2988859"/>
+            <a:ext cx="1626928" cy="294791"/>
+          </a:xfrm>
+          <a:prstGeom prst="rect">
+            <a:avLst/>
+          </a:prstGeom>
+          <a:solidFill>
+            <a:srgbClr val="0728A3"/>
+          </a:solidFill>
+          <a:ln w="12700">
+            <a:solidFill>
+              <a:srgbClr val="FEFFFF"/>
+            </a:solidFill>
+          </a:ln>
+          <a:effectLst/>
+        </p:spPr>
+        <p:style>
+          <a:lnRef idx="1">
+            <a:schemeClr val="accent1"/>
+          </a:lnRef>
+          <a:fillRef idx="3">
+            <a:schemeClr val="accent1"/>
+          </a:fillRef>
+          <a:effectRef idx="2">
+            <a:schemeClr val="accent1"/>
+          </a:effectRef>
+          <a:fontRef idx="minor">
+            <a:schemeClr val="lt1"/>
+          </a:fontRef>
+        </p:style>
+        <p:txBody>
+          <a:bodyPr rtlCol="0" anchor="ctr"/>
+          <a:lstStyle/>
+          <a:p>
+            <a:pPr algn="ctr"/>
+          </a:p>
+        </p:txBody>
+      </p:sp>
+      <p:sp>
+        <p:nvSpPr>
+          <p:cNvPr id="31" name="TextBox 30"/>
+          <p:cNvSpPr txBox="1"/>
+          <p:nvPr/>
+        </p:nvSpPr>
+        <p:spPr>
+          <a:xfrm>
+            <a:off x="5154490" y="2988859"/>
+            <a:ext cx="1626928" cy="294791"/>
+          </a:xfrm>
+          <a:prstGeom prst="rect">
+            <a:avLst/>
+          </a:prstGeom>
+          <a:noFill/>
+        </p:spPr>
+        <p:txBody>
+          <a:bodyPr wrap="square" anchor="ctr" lIns="0" rIns="0" tIns="0" bIns="0">
+            <a:spAutoFit/>
+          </a:bodyPr>
+          <a:lstStyle/>
+          <a:p>
+            <a:pPr algn="ctr">
+              <a:lnSpc>
+                <a:spcPct val="105000"/>
+              </a:lnSpc>
+              <a:spcBef>
+                <a:spcPts val="0"/>
+              </a:spcBef>
+              <a:spcAft>
+                <a:spcPts val="200"/>
+              </a:spcAft>
+            </a:pPr>
+            <a:r>
+              <a:rPr sz="1000" b="1" i="0">
+                <a:solidFill>
+                  <a:srgbClr val="FEFFFF"/>
+                </a:solidFill>
+                <a:latin typeface="Montserrat Medium"/>
+              </a:rPr>
+              <a:t>0.6</a:t>
+            </a:r>
+          </a:p>
+        </p:txBody>
+      </p:sp>
+      <p:sp>
+        <p:nvSpPr>
+          <p:cNvPr id="32" name="Rectangle 31"/>
+          <p:cNvSpPr/>
+          <p:nvPr/>
+        </p:nvSpPr>
+        <p:spPr>
+          <a:xfrm>
+            <a:off x="5154490" y="3283650"/>
+            <a:ext cx="1626928" cy="343923"/>
+          </a:xfrm>
+          <a:prstGeom prst="rect">
+            <a:avLst/>
+          </a:prstGeom>
+          <a:solidFill>
+            <a:srgbClr val="2E6FD6"/>
+          </a:solidFill>
+          <a:ln w="12700">
+            <a:solidFill>
+              <a:srgbClr val="FEFFFF"/>
+            </a:solidFill>
+          </a:ln>
+          <a:effectLst/>
+        </p:spPr>
+        <p:style>
+          <a:lnRef idx="1">
+            <a:schemeClr val="accent1"/>
+          </a:lnRef>
+          <a:fillRef idx="3">
+            <a:schemeClr val="accent1"/>
+          </a:fillRef>
+          <a:effectRef idx="2">
+            <a:schemeClr val="accent1"/>
+          </a:effectRef>
+          <a:fontRef idx="minor">
+            <a:schemeClr val="lt1"/>
+          </a:fontRef>
+        </p:style>
+        <p:txBody>
+          <a:bodyPr rtlCol="0" anchor="ctr"/>
+          <a:lstStyle/>
+          <a:p>
+            <a:pPr algn="ctr"/>
+          </a:p>
+        </p:txBody>
+      </p:sp>
+      <p:sp>
+        <p:nvSpPr>
+          <p:cNvPr id="33" name="TextBox 32"/>
+          <p:cNvSpPr txBox="1"/>
+          <p:nvPr/>
+        </p:nvSpPr>
+        <p:spPr>
+          <a:xfrm>
+            <a:off x="5154490" y="3283650"/>
+            <a:ext cx="1626928" cy="343923"/>
+          </a:xfrm>
+          <a:prstGeom prst="rect">
+            <a:avLst/>
+          </a:prstGeom>
+          <a:noFill/>
+        </p:spPr>
+        <p:txBody>
+          <a:bodyPr wrap="square" anchor="ctr" lIns="0" rIns="0" tIns="0" bIns="0">
+            <a:spAutoFit/>
+          </a:bodyPr>
+          <a:lstStyle/>
+          <a:p>
+            <a:pPr algn="ctr">
+              <a:lnSpc>
+                <a:spcPct val="105000"/>
+              </a:lnSpc>
+              <a:spcBef>
+                <a:spcPts val="0"/>
+              </a:spcBef>
+              <a:spcAft>
+                <a:spcPts val="200"/>
+              </a:spcAft>
+            </a:pPr>
+            <a:r>
+              <a:rPr sz="1000" b="1" i="0">
+                <a:solidFill>
+                  <a:srgbClr val="FEFFFF"/>
+                </a:solidFill>
+                <a:latin typeface="Montserrat Medium"/>
+              </a:rPr>
+              <a:t>0.7</a:t>
+            </a:r>
+          </a:p>
+        </p:txBody>
+      </p:sp>
+      <p:sp>
+        <p:nvSpPr>
+          <p:cNvPr id="34" name="Rectangle 33"/>
+          <p:cNvSpPr/>
+          <p:nvPr/>
+        </p:nvSpPr>
+        <p:spPr>
+          <a:xfrm>
+            <a:off x="5154490" y="3627573"/>
+            <a:ext cx="1626928" cy="294791"/>
+          </a:xfrm>
+          <a:prstGeom prst="rect">
+            <a:avLst/>
+          </a:prstGeom>
+          <a:solidFill>
+            <a:srgbClr val="6BAED6"/>
+          </a:solidFill>
+          <a:ln w="12700">
+            <a:solidFill>
+              <a:srgbClr val="FEFFFF"/>
+            </a:solidFill>
+          </a:ln>
+          <a:effectLst/>
+        </p:spPr>
+        <p:style>
+          <a:lnRef idx="1">
+            <a:schemeClr val="accent1"/>
+          </a:lnRef>
+          <a:fillRef idx="3">
+            <a:schemeClr val="accent1"/>
+          </a:fillRef>
+          <a:effectRef idx="2">
+            <a:schemeClr val="accent1"/>
+          </a:effectRef>
+          <a:fontRef idx="minor">
+            <a:schemeClr val="lt1"/>
+          </a:fontRef>
+        </p:style>
+        <p:txBody>
+          <a:bodyPr rtlCol="0" anchor="ctr"/>
+          <a:lstStyle/>
+          <a:p>
+            <a:pPr algn="ctr"/>
+          </a:p>
+        </p:txBody>
+      </p:sp>
+      <p:sp>
+        <p:nvSpPr>
+          <p:cNvPr id="35" name="TextBox 34"/>
+          <p:cNvSpPr txBox="1"/>
+          <p:nvPr/>
+        </p:nvSpPr>
+        <p:spPr>
+          <a:xfrm>
+            <a:off x="5154490" y="3627573"/>
+            <a:ext cx="1626928" cy="294791"/>
+          </a:xfrm>
+          <a:prstGeom prst="rect">
+            <a:avLst/>
+          </a:prstGeom>
+          <a:noFill/>
+        </p:spPr>
+        <p:txBody>
+          <a:bodyPr wrap="square" anchor="ctr" lIns="0" rIns="0" tIns="0" bIns="0">
+            <a:spAutoFit/>
+          </a:bodyPr>
+          <a:lstStyle/>
+          <a:p>
+            <a:pPr algn="ctr">
+              <a:lnSpc>
+                <a:spcPct val="105000"/>
+              </a:lnSpc>
+              <a:spcBef>
+                <a:spcPts val="0"/>
+              </a:spcBef>
+              <a:spcAft>
+                <a:spcPts val="200"/>
+              </a:spcAft>
+            </a:pPr>
+            <a:r>
+              <a:rPr sz="1000" b="1" i="0">
+                <a:solidFill>
+                  <a:srgbClr val="FEFFFF"/>
+                </a:solidFill>
+                <a:latin typeface="Montserrat Medium"/>
+              </a:rPr>
+              <a:t>0.6</a:t>
+            </a:r>
+          </a:p>
+        </p:txBody>
+      </p:sp>
+      <p:sp>
+        <p:nvSpPr>
+          <p:cNvPr id="36" name="TextBox 35"/>
+          <p:cNvSpPr txBox="1"/>
+          <p:nvPr/>
+        </p:nvSpPr>
+        <p:spPr>
+          <a:xfrm>
+            <a:off x="5154490" y="6080760"/>
+            <a:ext cx="1626928" cy="274320"/>
+          </a:xfrm>
+          <a:prstGeom prst="rect">
+            <a:avLst/>
+          </a:prstGeom>
+          <a:noFill/>
+        </p:spPr>
+        <p:txBody>
+          <a:bodyPr wrap="square" anchor="t" lIns="0" rIns="0" tIns="0" bIns="0">
+            <a:spAutoFit/>
+          </a:bodyPr>
+          <a:lstStyle/>
+          <a:p>
+            <a:pPr algn="ctr">
+              <a:lnSpc>
+                <a:spcPct val="105000"/>
+              </a:lnSpc>
+              <a:spcBef>
+                <a:spcPts val="0"/>
+              </a:spcBef>
+              <a:spcAft>
+                <a:spcPts val="200"/>
+              </a:spcAft>
+            </a:pPr>
+            <a:r>
+              <a:rPr sz="1050" b="1" i="0">
+                <a:solidFill>
+                  <a:srgbClr val="03045E"/>
+                </a:solidFill>
+                <a:latin typeface="Montserrat"/>
+              </a:rPr>
+              <a:t>[Region B]</a:t>
+            </a:r>
+          </a:p>
+        </p:txBody>
+      </p:sp>
+      <p:sp>
+        <p:nvSpPr>
+          <p:cNvPr id="37" name="TextBox 36"/>
+          <p:cNvSpPr txBox="1"/>
+          <p:nvPr/>
+        </p:nvSpPr>
+        <p:spPr>
+          <a:xfrm>
+            <a:off x="6891146" y="2286000"/>
+            <a:ext cx="881253" cy="411480"/>
+          </a:xfrm>
+          <a:prstGeom prst="rect">
+            <a:avLst/>
+          </a:prstGeom>
+          <a:noFill/>
+        </p:spPr>
+        <p:txBody>
+          <a:bodyPr wrap="square" anchor="t" lIns="0" rIns="0" tIns="0" bIns="0">
+            <a:spAutoFit/>
+          </a:bodyPr>
+          <a:lstStyle/>
+          <a:p>
+            <a:pPr algn="ctr">
+              <a:lnSpc>
+                <a:spcPct val="105000"/>
+              </a:lnSpc>
+              <a:spcBef>
+                <a:spcPts val="0"/>
+              </a:spcBef>
+              <a:spcAft>
+                <a:spcPts val="200"/>
+              </a:spcAft>
+            </a:pPr>
+            <a:r>
+              <a:rPr sz="1200" b="1" i="0">
+                <a:solidFill>
+                  <a:srgbClr val="03045E"/>
+                </a:solidFill>
+                <a:latin typeface="Montserrat Medium"/>
+              </a:rPr>
+              <a:t>1.2</a:t>
+            </a:r>
+          </a:p>
+          <a:p>
+            <a:pPr algn="ctr">
+              <a:lnSpc>
+                <a:spcPct val="105000"/>
+              </a:lnSpc>
+              <a:spcBef>
+                <a:spcPts val="0"/>
+              </a:spcBef>
+              <a:spcAft>
+                <a:spcPts val="200"/>
+              </a:spcAft>
+            </a:pPr>
+            <a:r>
+              <a:rPr sz="1000" b="0" i="1">
+                <a:solidFill>
+                  <a:srgbClr val="8A8A8A"/>
+                </a:solidFill>
+                <a:latin typeface="Montserrat Medium"/>
+              </a:rPr>
+              <a:t>(12%)</a:t>
+            </a:r>
+          </a:p>
+        </p:txBody>
+      </p:sp>
+      <p:sp>
+        <p:nvSpPr>
+          <p:cNvPr id="38" name="Rectangle 37"/>
+          <p:cNvSpPr/>
+          <p:nvPr/>
+        </p:nvSpPr>
+        <p:spPr>
+          <a:xfrm>
+            <a:off x="6891146" y="2743200"/>
+            <a:ext cx="881253" cy="196527"/>
+          </a:xfrm>
+          <a:prstGeom prst="rect">
+            <a:avLst/>
+          </a:prstGeom>
+          <a:solidFill>
+            <a:srgbClr val="03045E"/>
+          </a:solidFill>
+          <a:ln w="12700">
+            <a:solidFill>
+              <a:srgbClr val="FEFFFF"/>
+            </a:solidFill>
+          </a:ln>
+          <a:effectLst/>
+        </p:spPr>
+        <p:style>
+          <a:lnRef idx="1">
+            <a:schemeClr val="accent1"/>
+          </a:lnRef>
+          <a:fillRef idx="3">
+            <a:schemeClr val="accent1"/>
+          </a:fillRef>
+          <a:effectRef idx="2">
+            <a:schemeClr val="accent1"/>
+          </a:effectRef>
+          <a:fontRef idx="minor">
+            <a:schemeClr val="lt1"/>
+          </a:fontRef>
+        </p:style>
+        <p:txBody>
+          <a:bodyPr rtlCol="0" anchor="ctr"/>
+          <a:lstStyle/>
+          <a:p>
+            <a:pPr algn="ctr"/>
+          </a:p>
+        </p:txBody>
+      </p:sp>
+      <p:sp>
+        <p:nvSpPr>
+          <p:cNvPr id="39" name="TextBox 38"/>
+          <p:cNvSpPr txBox="1"/>
+          <p:nvPr/>
+        </p:nvSpPr>
+        <p:spPr>
+          <a:xfrm>
+            <a:off x="6891146" y="2743200"/>
+            <a:ext cx="881253" cy="196527"/>
+          </a:xfrm>
+          <a:prstGeom prst="rect">
+            <a:avLst/>
+          </a:prstGeom>
+          <a:noFill/>
+        </p:spPr>
+        <p:txBody>
+          <a:bodyPr wrap="square" anchor="ctr" lIns="0" rIns="0" tIns="0" bIns="0">
+            <a:spAutoFit/>
+          </a:bodyPr>
+          <a:lstStyle/>
+          <a:p>
+            <a:pPr algn="ctr">
+              <a:lnSpc>
+                <a:spcPct val="105000"/>
+              </a:lnSpc>
+              <a:spcBef>
+                <a:spcPts val="0"/>
+              </a:spcBef>
+              <a:spcAft>
+                <a:spcPts val="200"/>
+              </a:spcAft>
+            </a:pPr>
+            <a:r>
+              <a:rPr sz="1000" b="1" i="0">
+                <a:solidFill>
+                  <a:srgbClr val="FEFFFF"/>
+                </a:solidFill>
+                <a:latin typeface="Montserrat Medium"/>
+              </a:rPr>
+              <a:t>0.4</a:t>
+            </a:r>
+          </a:p>
+        </p:txBody>
+      </p:sp>
+      <p:sp>
+        <p:nvSpPr>
+          <p:cNvPr id="40" name="Rectangle 39"/>
+          <p:cNvSpPr/>
+          <p:nvPr/>
+        </p:nvSpPr>
+        <p:spPr>
+          <a:xfrm>
+            <a:off x="6891146" y="2939727"/>
+            <a:ext cx="881253" cy="147395"/>
+          </a:xfrm>
+          <a:prstGeom prst="rect">
+            <a:avLst/>
+          </a:prstGeom>
+          <a:solidFill>
+            <a:srgbClr val="0728A3"/>
+          </a:solidFill>
+          <a:ln w="12700">
+            <a:solidFill>
+              <a:srgbClr val="FEFFFF"/>
+            </a:solidFill>
+          </a:ln>
+          <a:effectLst/>
+        </p:spPr>
+        <p:style>
+          <a:lnRef idx="1">
+            <a:schemeClr val="accent1"/>
+          </a:lnRef>
+          <a:fillRef idx="3">
+            <a:schemeClr val="accent1"/>
+          </a:fillRef>
+          <a:effectRef idx="2">
+            <a:schemeClr val="accent1"/>
+          </a:effectRef>
+          <a:fontRef idx="minor">
+            <a:schemeClr val="lt1"/>
+          </a:fontRef>
+        </p:style>
+        <p:txBody>
+          <a:bodyPr rtlCol="0" anchor="ctr"/>
+          <a:lstStyle/>
+          <a:p>
+            <a:pPr algn="ctr"/>
+          </a:p>
+        </p:txBody>
+      </p:sp>
+      <p:sp>
+        <p:nvSpPr>
+          <p:cNvPr id="41" name="TextBox 40"/>
+          <p:cNvSpPr txBox="1"/>
+          <p:nvPr/>
+        </p:nvSpPr>
+        <p:spPr>
+          <a:xfrm>
+            <a:off x="6891146" y="2939727"/>
+            <a:ext cx="881253" cy="147395"/>
+          </a:xfrm>
+          <a:prstGeom prst="rect">
+            <a:avLst/>
+          </a:prstGeom>
+          <a:noFill/>
+        </p:spPr>
+        <p:txBody>
+          <a:bodyPr wrap="square" anchor="ctr" lIns="0" rIns="0" tIns="0" bIns="0">
+            <a:spAutoFit/>
+          </a:bodyPr>
+          <a:lstStyle/>
+          <a:p>
+            <a:pPr algn="ctr">
+              <a:lnSpc>
+                <a:spcPct val="105000"/>
+              </a:lnSpc>
+              <a:spcBef>
+                <a:spcPts val="0"/>
+              </a:spcBef>
+              <a:spcAft>
+                <a:spcPts val="200"/>
+              </a:spcAft>
+            </a:pPr>
+            <a:r>
+              <a:rPr sz="1000" b="1" i="0">
+                <a:solidFill>
+                  <a:srgbClr val="FEFFFF"/>
+                </a:solidFill>
+                <a:latin typeface="Montserrat Medium"/>
+              </a:rPr>
+              <a:t>0.3</a:t>
+            </a:r>
+          </a:p>
+        </p:txBody>
+      </p:sp>
+      <p:sp>
+        <p:nvSpPr>
+          <p:cNvPr id="42" name="Rectangle 41"/>
+          <p:cNvSpPr/>
+          <p:nvPr/>
+        </p:nvSpPr>
+        <p:spPr>
+          <a:xfrm>
+            <a:off x="6891146" y="3087122"/>
+            <a:ext cx="881253" cy="147395"/>
+          </a:xfrm>
+          <a:prstGeom prst="rect">
+            <a:avLst/>
+          </a:prstGeom>
+          <a:solidFill>
+            <a:srgbClr val="2E6FD6"/>
+          </a:solidFill>
+          <a:ln w="12700">
+            <a:solidFill>
+              <a:srgbClr val="FEFFFF"/>
+            </a:solidFill>
+          </a:ln>
+          <a:effectLst/>
+        </p:spPr>
+        <p:style>
+          <a:lnRef idx="1">
+            <a:schemeClr val="accent1"/>
+          </a:lnRef>
+          <a:fillRef idx="3">
+            <a:schemeClr val="accent1"/>
+          </a:fillRef>
+          <a:effectRef idx="2">
+            <a:schemeClr val="accent1"/>
+          </a:effectRef>
+          <a:fontRef idx="minor">
+            <a:schemeClr val="lt1"/>
+          </a:fontRef>
+        </p:style>
+        <p:txBody>
+          <a:bodyPr rtlCol="0" anchor="ctr"/>
+          <a:lstStyle/>
+          <a:p>
+            <a:pPr algn="ctr"/>
+          </a:p>
+        </p:txBody>
+      </p:sp>
+      <p:sp>
+        <p:nvSpPr>
+          <p:cNvPr id="43" name="TextBox 42"/>
+          <p:cNvSpPr txBox="1"/>
+          <p:nvPr/>
+        </p:nvSpPr>
+        <p:spPr>
+          <a:xfrm>
+            <a:off x="6891146" y="3087122"/>
+            <a:ext cx="881253" cy="147395"/>
+          </a:xfrm>
+          <a:prstGeom prst="rect">
+            <a:avLst/>
+          </a:prstGeom>
+          <a:noFill/>
+        </p:spPr>
+        <p:txBody>
+          <a:bodyPr wrap="square" anchor="ctr" lIns="0" rIns="0" tIns="0" bIns="0">
+            <a:spAutoFit/>
+          </a:bodyPr>
+          <a:lstStyle/>
+          <a:p>
+            <a:pPr algn="ctr">
+              <a:lnSpc>
+                <a:spcPct val="105000"/>
+              </a:lnSpc>
+              <a:spcBef>
+                <a:spcPts val="0"/>
+              </a:spcBef>
+              <a:spcAft>
+                <a:spcPts val="200"/>
+              </a:spcAft>
+            </a:pPr>
+            <a:r>
+              <a:rPr sz="1000" b="1" i="0">
+                <a:solidFill>
+                  <a:srgbClr val="FEFFFF"/>
+                </a:solidFill>
+                <a:latin typeface="Montserrat Medium"/>
+              </a:rPr>
+              <a:t>0.3</a:t>
+            </a:r>
+          </a:p>
+        </p:txBody>
+      </p:sp>
+      <p:sp>
+        <p:nvSpPr>
+          <p:cNvPr id="44" name="Rectangle 43"/>
+          <p:cNvSpPr/>
+          <p:nvPr/>
+        </p:nvSpPr>
+        <p:spPr>
+          <a:xfrm>
+            <a:off x="6891146" y="3234517"/>
+            <a:ext cx="881253" cy="98263"/>
+          </a:xfrm>
+          <a:prstGeom prst="rect">
+            <a:avLst/>
+          </a:prstGeom>
+          <a:solidFill>
+            <a:srgbClr val="6BAED6"/>
+          </a:solidFill>
+          <a:ln w="12700">
+            <a:solidFill>
+              <a:srgbClr val="FEFFFF"/>
+            </a:solidFill>
+          </a:ln>
+          <a:effectLst/>
+        </p:spPr>
+        <p:style>
+          <a:lnRef idx="1">
+            <a:schemeClr val="accent1"/>
+          </a:lnRef>
+          <a:fillRef idx="3">
+            <a:schemeClr val="accent1"/>
+          </a:fillRef>
+          <a:effectRef idx="2">
+            <a:schemeClr val="accent1"/>
+          </a:effectRef>
+          <a:fontRef idx="minor">
+            <a:schemeClr val="lt1"/>
+          </a:fontRef>
+        </p:style>
+        <p:txBody>
+          <a:bodyPr rtlCol="0" anchor="ctr"/>
+          <a:lstStyle/>
+          <a:p>
+            <a:pPr algn="ctr"/>
+          </a:p>
+        </p:txBody>
+      </p:sp>
+      <p:sp>
+        <p:nvSpPr>
+          <p:cNvPr id="45" name="TextBox 44"/>
+          <p:cNvSpPr txBox="1"/>
+          <p:nvPr/>
+        </p:nvSpPr>
+        <p:spPr>
+          <a:xfrm>
+            <a:off x="6891146" y="3234517"/>
+            <a:ext cx="881253" cy="98263"/>
+          </a:xfrm>
+          <a:prstGeom prst="rect">
+            <a:avLst/>
+          </a:prstGeom>
+          <a:noFill/>
+        </p:spPr>
+        <p:txBody>
+          <a:bodyPr wrap="square" anchor="ctr" lIns="0" rIns="0" tIns="0" bIns="0">
+            <a:spAutoFit/>
+          </a:bodyPr>
+          <a:lstStyle/>
+          <a:p>
+            <a:pPr algn="ctr">
+              <a:lnSpc>
+                <a:spcPct val="105000"/>
+              </a:lnSpc>
+              <a:spcBef>
+                <a:spcPts val="0"/>
+              </a:spcBef>
+              <a:spcAft>
+                <a:spcPts val="200"/>
+              </a:spcAft>
+            </a:pPr>
+            <a:r>
+              <a:rPr sz="1000" b="1" i="0">
+                <a:solidFill>
+                  <a:srgbClr val="FEFFFF"/>
+                </a:solidFill>
+                <a:latin typeface="Montserrat Medium"/>
+              </a:rPr>
+              <a:t>0.2</a:t>
+            </a:r>
+          </a:p>
+        </p:txBody>
+      </p:sp>
+      <p:sp>
+        <p:nvSpPr>
+          <p:cNvPr id="46" name="TextBox 45"/>
+          <p:cNvSpPr txBox="1"/>
+          <p:nvPr/>
+        </p:nvSpPr>
+        <p:spPr>
+          <a:xfrm>
+            <a:off x="6891146" y="6080760"/>
+            <a:ext cx="881253" cy="274320"/>
+          </a:xfrm>
+          <a:prstGeom prst="rect">
+            <a:avLst/>
+          </a:prstGeom>
+          <a:noFill/>
+        </p:spPr>
+        <p:txBody>
+          <a:bodyPr wrap="square" anchor="t" lIns="0" rIns="0" tIns="0" bIns="0">
+            <a:spAutoFit/>
+          </a:bodyPr>
+          <a:lstStyle/>
+          <a:p>
+            <a:pPr algn="ctr">
+              <a:lnSpc>
+                <a:spcPct val="105000"/>
+              </a:lnSpc>
+              <a:spcBef>
+                <a:spcPts val="0"/>
+              </a:spcBef>
+              <a:spcAft>
+                <a:spcPts val="200"/>
+              </a:spcAft>
+            </a:pPr>
+            <a:r>
+              <a:rPr sz="1050" b="1" i="0">
+                <a:solidFill>
+                  <a:srgbClr val="03045E"/>
+                </a:solidFill>
+                <a:latin typeface="Montserrat"/>
+              </a:rPr>
+              <a:t>[Region C]</a:t>
+            </a:r>
+          </a:p>
+        </p:txBody>
+      </p:sp>
+      <p:cxnSp>
+        <p:nvCxnSpPr>
+          <p:cNvPr id="47" name="Connector 46"/>
+          <p:cNvCxnSpPr/>
+          <p:nvPr/>
+        </p:nvCxnSpPr>
+        <p:spPr>
+          <a:xfrm>
+            <a:off x="8001000" y="1463040"/>
+            <a:ext cx="0" cy="4892040"/>
+          </a:xfrm>
+          <a:prstGeom prst="bentConnector3">
+            <a:avLst/>
+          </a:prstGeom>
+          <a:ln w="12700">
+            <a:solidFill>
+              <a:srgbClr val="C9CBD6"/>
+            </a:solidFill>
+          </a:ln>
+        </p:spPr>
+        <p:style>
+          <a:lnRef idx="2">
+            <a:schemeClr val="accent1"/>
+          </a:lnRef>
+          <a:fillRef idx="0">
+            <a:schemeClr val="accent1"/>
+          </a:fillRef>
+          <a:effectRef idx="1">
+            <a:schemeClr val="accent1"/>
+          </a:effectRef>
+          <a:fontRef idx="minor">
+            <a:schemeClr val="tx1"/>
+          </a:fontRef>
+        </p:style>
+      </p:cxnSp>
+      <p:sp>
+        <p:nvSpPr>
+          <p:cNvPr id="48" name="Isosceles Triangle 47"/>
+          <p:cNvSpPr/>
+          <p:nvPr/>
+        </p:nvSpPr>
+        <p:spPr>
+          <a:xfrm rot="5400000">
+            <a:off x="8275320" y="1490472"/>
+            <a:ext cx="201168" cy="201168"/>
+          </a:xfrm>
+          <a:prstGeom prst="triangle">
+            <a:avLst/>
+          </a:prstGeom>
+          <a:solidFill>
+            <a:srgbClr val="03045E"/>
+          </a:solidFill>
+          <a:ln>
+            <a:noFill/>
+          </a:ln>
+          <a:effectLst/>
+        </p:spPr>
+        <p:style>
+          <a:lnRef idx="1">
+            <a:schemeClr val="accent1"/>
+          </a:lnRef>
+          <a:fillRef idx="3">
+            <a:schemeClr val="accent1"/>
+          </a:fillRef>
+          <a:effectRef idx="2">
+            <a:schemeClr val="accent1"/>
+          </a:effectRef>
+          <a:fontRef idx="minor">
+            <a:schemeClr val="lt1"/>
+          </a:fontRef>
+        </p:style>
+        <p:txBody>
+          <a:bodyPr rtlCol="0" anchor="ctr"/>
+          <a:lstStyle/>
+          <a:p>
+            <a:pPr algn="ctr"/>
+          </a:p>
+        </p:txBody>
+      </p:sp>
+      <p:sp>
+        <p:nvSpPr>
+          <p:cNvPr id="49" name="TextBox 48"/>
+          <p:cNvSpPr txBox="1"/>
+          <p:nvPr/>
+        </p:nvSpPr>
+        <p:spPr>
+          <a:xfrm>
+            <a:off x="8567928" y="1472184"/>
+            <a:ext cx="3136392" cy="274320"/>
+          </a:xfrm>
+          <a:prstGeom prst="rect">
+            <a:avLst/>
+          </a:prstGeom>
+          <a:noFill/>
+        </p:spPr>
+        <p:txBody>
+          <a:bodyPr wrap="square" anchor="t" lIns="0" rIns="0" tIns="0" bIns="0">
+            <a:spAutoFit/>
+          </a:bodyPr>
+          <a:lstStyle/>
+          <a:p>
             <a:pPr algn="l">
               <a:lnSpc>
+                <a:spcPct val="105000"/>
+              </a:lnSpc>
+              <a:spcBef>
+                <a:spcPts val="0"/>
+              </a:spcBef>
+              <a:spcAft>
+                <a:spcPts val="200"/>
+              </a:spcAft>
+            </a:pPr>
+            <a:r>
+              <a:rPr sz="1300" b="1" i="0">
+                <a:solidFill>
+                  <a:srgbClr val="03045E"/>
+                </a:solidFill>
+                <a:latin typeface="Montserrat"/>
+              </a:rPr>
+              <a:t>Key Takeaways</a:t>
+            </a:r>
+          </a:p>
+        </p:txBody>
+      </p:sp>
+      <p:sp>
+        <p:nvSpPr>
+          <p:cNvPr id="50" name="TextBox 49"/>
+          <p:cNvSpPr txBox="1"/>
+          <p:nvPr/>
+        </p:nvSpPr>
+        <p:spPr>
+          <a:xfrm>
+            <a:off x="8275320" y="1920240"/>
+            <a:ext cx="3429000" cy="4434840"/>
+          </a:xfrm>
+          <a:prstGeom prst="rect">
+            <a:avLst/>
+          </a:prstGeom>
+          <a:noFill/>
+        </p:spPr>
+        <p:txBody>
+          <a:bodyPr wrap="square" anchor="t" lIns="0" rIns="0" tIns="0" bIns="0">
+            <a:spAutoFit/>
+          </a:bodyPr>
+          <a:lstStyle/>
+          <a:p>
+            <a:pPr algn="l">
+              <a:lnSpc>
                 <a:spcPct val="108000"/>
               </a:lnSpc>
               <a:spcBef>
@@ -11192,7 +17577,7 @@
                 </a:solidFill>
                 <a:latin typeface="Montserrat Medium"/>
               </a:rPr>
-              <a:t>Mix skews to [Segment A] in [Region A]</a:t>
+              <a:t>[Large/Mega] deals drive over half of served value</a:t>
             </a:r>
           </a:p>
           <a:p>
@@ -11223,7 +17608,7 @@
                 </a:solidFill>
                 <a:latin typeface="Montserrat Medium"/>
               </a:rPr>
-              <a:t>[Segment C] is nascent everywhere</a:t>
+              <a:t>[Region A] leads every segment; [Region C] is thin in [Mega]</a:t>
             </a:r>
           </a:p>
         </p:txBody>
@@ -11340,7 +17725,7 @@
                 </a:solidFill>
                 <a:latin typeface="Montserrat"/>
               </a:rPr>
-              <a:t>Triangulation</a:t>
+              <a:t>Trajectory by region</a:t>
             </a:r>
           </a:p>
         </p:txBody>
@@ -11475,7 +17860,7 @@
                 </a:solidFill>
                 <a:latin typeface="Montserrat"/>
               </a:rPr>
-              <a:t>Bottom-up and top-down reconcile to within [X]%</a:t>
+              <a:t>The market is [recovering / growing] at ~[X]% through [year]</a:t>
             </a:r>
           </a:p>
         </p:txBody>
@@ -11520,7 +17905,7 @@
                 </a:solidFill>
                 <a:latin typeface="Montserrat"/>
               </a:rPr>
-              <a:t>Triangulation, $B</a:t>
+              <a:t>[Market] size by region, $B</a:t>
             </a:r>
           </a:p>
         </p:txBody>
@@ -11716,7 +18101,7 @@
                 </a:solidFill>
                 <a:latin typeface="Montserrat Medium"/>
               </a:rPr>
-              <a:t>Two independent methods agree within [X]%</a:t>
+              <a:t>Trough in [year]; recovery underway</a:t>
             </a:r>
           </a:p>
           <a:p>
@@ -11747,7 +18132,7 @@
                 </a:solidFill>
                 <a:latin typeface="Montserrat Medium"/>
               </a:rPr>
-              <a:t>Divergence explained by [reason]</a:t>
+              <a:t>~[X]% CAGR projected through [year], led by [Region A]</a:t>
             </a:r>
           </a:p>
         </p:txBody>
